--- a/CKD_Presentation.pptx
+++ b/CKD_Presentation.pptx
@@ -5,7 +5,7 @@
     <p:sldMasterId id="2147483648" r:id="rId1"/>
   </p:sldMasterIdLst>
   <p:notesMasterIdLst>
-    <p:notesMasterId r:id="rId15"/>
+    <p:notesMasterId r:id="rId14"/>
   </p:notesMasterIdLst>
   <p:sldIdLst>
     <p:sldId id="256" r:id="rId2"/>
@@ -18,9 +18,8 @@
     <p:sldId id="263" r:id="rId9"/>
     <p:sldId id="264" r:id="rId10"/>
     <p:sldId id="265" r:id="rId11"/>
-    <p:sldId id="266" r:id="rId12"/>
-    <p:sldId id="267" r:id="rId13"/>
-    <p:sldId id="268" r:id="rId14"/>
+    <p:sldId id="267" r:id="rId12"/>
+    <p:sldId id="268" r:id="rId13"/>
   </p:sldIdLst>
   <p:sldSz cx="9144000" cy="5143500" type="screen16x9"/>
   <p:notesSz cx="5143500" cy="9144000"/>
@@ -449,12 +448,6 @@
             <c:idx val="0"/>
             <c:invertIfNegative val="0"/>
             <c:bubble3D val="0"/>
-            <c:spPr>
-              <a:solidFill>
-                <a:srgbClr val="4472C4"/>
-              </a:solidFill>
-              <a:effectLst/>
-            </c:spPr>
             <c:extLst>
               <c:ext xmlns:c16="http://schemas.microsoft.com/office/drawing/2014/chart" uri="{C3380CC4-5D6E-409C-BE32-E72D297353CC}">
                 <c16:uniqueId val="{00000001-395B-45E1-9E27-ECED2AEF048E}"/>
@@ -907,657 +900,6 @@
 </c:chartSpace>
 </file>
 
-<file path=ppt/charts/chart4.xml><?xml version="1.0" encoding="utf-8"?>
-<c:chartSpace xmlns:c="http://schemas.openxmlformats.org/drawingml/2006/chart" xmlns:a="http://schemas.openxmlformats.org/drawingml/2006/main" xmlns:r="http://schemas.openxmlformats.org/officeDocument/2006/relationships" xmlns:c16r2="http://schemas.microsoft.com/office/drawing/2015/06/chart">
-  <c:date1904 val="0"/>
-  <c:lang val="fr-FR"/>
-  <c:roundedCorners val="1"/>
-  <c:style val="2"/>
-  <c:chart>
-    <c:autoTitleDeleted val="1"/>
-    <c:plotArea>
-      <c:layout/>
-      <c:barChart>
-        <c:barDir val="col"/>
-        <c:grouping val="clustered"/>
-        <c:varyColors val="0"/>
-        <c:ser>
-          <c:idx val="0"/>
-          <c:order val="0"/>
-          <c:tx>
-            <c:strRef>
-              <c:f>Sheet1!$B$1</c:f>
-              <c:strCache>
-                <c:ptCount val="1"/>
-                <c:pt idx="0">
-                  <c:v>Val Accuracy</c:v>
-                </c:pt>
-              </c:strCache>
-            </c:strRef>
-          </c:tx>
-          <c:spPr>
-            <a:solidFill>
-              <a:srgbClr val="4472C4"/>
-            </a:solidFill>
-            <a:effectLst/>
-          </c:spPr>
-          <c:invertIfNegative val="0"/>
-          <c:dLbls>
-            <c:numFmt formatCode="#,##0" sourceLinked="0"/>
-            <c:spPr>
-              <a:noFill/>
-              <a:ln>
-                <a:noFill/>
-              </a:ln>
-              <a:effectLst/>
-            </c:spPr>
-            <c:showLegendKey val="0"/>
-            <c:showVal val="1"/>
-            <c:showCatName val="0"/>
-            <c:showSerName val="0"/>
-            <c:showPercent val="0"/>
-            <c:showBubbleSize val="0"/>
-            <c:showLeaderLines val="0"/>
-            <c:extLst>
-              <c:ext xmlns:c15="http://schemas.microsoft.com/office/drawing/2012/chart" uri="{CE6537A1-D6FC-4f65-9D91-7224C49458BB}">
-                <c15:showLeaderLines val="0"/>
-              </c:ext>
-            </c:extLst>
-          </c:dLbls>
-          <c:cat>
-            <c:strRef>
-              <c:f>Sheet1!$A$2:$A$7</c:f>
-              <c:strCache>
-                <c:ptCount val="6"/>
-                <c:pt idx="0">
-                  <c:v>Log.Reg.</c:v>
-                </c:pt>
-                <c:pt idx="1">
-                  <c:v>Dec.Tree</c:v>
-                </c:pt>
-                <c:pt idx="2">
-                  <c:v>KNN</c:v>
-                </c:pt>
-                <c:pt idx="3">
-                  <c:v>SVM</c:v>
-                </c:pt>
-                <c:pt idx="4">
-                  <c:v>Rand.For.</c:v>
-                </c:pt>
-                <c:pt idx="5">
-                  <c:v>Grad.Bst.</c:v>
-                </c:pt>
-              </c:strCache>
-            </c:strRef>
-          </c:cat>
-          <c:val>
-            <c:numRef>
-              <c:f>Sheet1!$B$2:$B$7</c:f>
-              <c:numCache>
-                <c:formatCode>General</c:formatCode>
-                <c:ptCount val="6"/>
-                <c:pt idx="0">
-                  <c:v>97.5</c:v>
-                </c:pt>
-                <c:pt idx="1">
-                  <c:v>97.5</c:v>
-                </c:pt>
-                <c:pt idx="2">
-                  <c:v>97.5</c:v>
-                </c:pt>
-                <c:pt idx="3">
-                  <c:v>97.5</c:v>
-                </c:pt>
-                <c:pt idx="4">
-                  <c:v>98.75</c:v>
-                </c:pt>
-                <c:pt idx="5">
-                  <c:v>98.75</c:v>
-                </c:pt>
-              </c:numCache>
-            </c:numRef>
-          </c:val>
-          <c:extLst>
-            <c:ext xmlns:c16="http://schemas.microsoft.com/office/drawing/2014/chart" uri="{C3380CC4-5D6E-409C-BE32-E72D297353CC}">
-              <c16:uniqueId val="{00000000-4EA2-49E8-BCFA-C0A126F645A3}"/>
-            </c:ext>
-          </c:extLst>
-        </c:ser>
-        <c:ser>
-          <c:idx val="1"/>
-          <c:order val="1"/>
-          <c:tx>
-            <c:strRef>
-              <c:f>Sheet1!$C$1</c:f>
-              <c:strCache>
-                <c:ptCount val="1"/>
-                <c:pt idx="0">
-                  <c:v>CV Mean</c:v>
-                </c:pt>
-              </c:strCache>
-            </c:strRef>
-          </c:tx>
-          <c:spPr>
-            <a:solidFill>
-              <a:srgbClr val="ED7D31"/>
-            </a:solidFill>
-            <a:effectLst/>
-          </c:spPr>
-          <c:invertIfNegative val="0"/>
-          <c:dLbls>
-            <c:numFmt formatCode="#,##0" sourceLinked="0"/>
-            <c:spPr>
-              <a:noFill/>
-              <a:ln>
-                <a:noFill/>
-              </a:ln>
-              <a:effectLst/>
-            </c:spPr>
-            <c:showLegendKey val="0"/>
-            <c:showVal val="1"/>
-            <c:showCatName val="0"/>
-            <c:showSerName val="0"/>
-            <c:showPercent val="0"/>
-            <c:showBubbleSize val="0"/>
-            <c:showLeaderLines val="0"/>
-            <c:extLst>
-              <c:ext xmlns:c15="http://schemas.microsoft.com/office/drawing/2012/chart" uri="{CE6537A1-D6FC-4f65-9D91-7224C49458BB}">
-                <c15:showLeaderLines val="0"/>
-              </c:ext>
-            </c:extLst>
-          </c:dLbls>
-          <c:cat>
-            <c:strRef>
-              <c:f>Sheet1!$A$2:$A$7</c:f>
-              <c:strCache>
-                <c:ptCount val="6"/>
-                <c:pt idx="0">
-                  <c:v>Log.Reg.</c:v>
-                </c:pt>
-                <c:pt idx="1">
-                  <c:v>Dec.Tree</c:v>
-                </c:pt>
-                <c:pt idx="2">
-                  <c:v>KNN</c:v>
-                </c:pt>
-                <c:pt idx="3">
-                  <c:v>SVM</c:v>
-                </c:pt>
-                <c:pt idx="4">
-                  <c:v>Rand.For.</c:v>
-                </c:pt>
-                <c:pt idx="5">
-                  <c:v>Grad.Bst.</c:v>
-                </c:pt>
-              </c:strCache>
-            </c:strRef>
-          </c:cat>
-          <c:val>
-            <c:numRef>
-              <c:f>Sheet1!$C$2:$C$7</c:f>
-              <c:numCache>
-                <c:formatCode>General</c:formatCode>
-                <c:ptCount val="6"/>
-                <c:pt idx="0">
-                  <c:v>98.25</c:v>
-                </c:pt>
-                <c:pt idx="1">
-                  <c:v>98</c:v>
-                </c:pt>
-                <c:pt idx="2">
-                  <c:v>98.25</c:v>
-                </c:pt>
-                <c:pt idx="3">
-                  <c:v>98.5</c:v>
-                </c:pt>
-                <c:pt idx="4">
-                  <c:v>99</c:v>
-                </c:pt>
-                <c:pt idx="5">
-                  <c:v>99</c:v>
-                </c:pt>
-              </c:numCache>
-            </c:numRef>
-          </c:val>
-          <c:extLst>
-            <c:ext xmlns:c16="http://schemas.microsoft.com/office/drawing/2014/chart" uri="{C3380CC4-5D6E-409C-BE32-E72D297353CC}">
-              <c16:uniqueId val="{00000001-4EA2-49E8-BCFA-C0A126F645A3}"/>
-            </c:ext>
-          </c:extLst>
-        </c:ser>
-        <c:dLbls>
-          <c:showLegendKey val="0"/>
-          <c:showVal val="1"/>
-          <c:showCatName val="0"/>
-          <c:showSerName val="0"/>
-          <c:showPercent val="0"/>
-          <c:showBubbleSize val="0"/>
-        </c:dLbls>
-        <c:gapWidth val="150"/>
-        <c:axId val="2094734554"/>
-        <c:axId val="2094734552"/>
-      </c:barChart>
-      <c:catAx>
-        <c:axId val="2094734554"/>
-        <c:scaling>
-          <c:orientation val="minMax"/>
-        </c:scaling>
-        <c:delete val="0"/>
-        <c:axPos val="b"/>
-        <c:numFmt formatCode="General" sourceLinked="1"/>
-        <c:majorTickMark val="out"/>
-        <c:minorTickMark val="none"/>
-        <c:tickLblPos val="low"/>
-        <c:spPr>
-          <a:ln w="12700" cap="flat">
-            <a:solidFill>
-              <a:srgbClr val="888888"/>
-            </a:solidFill>
-            <a:prstDash val="solid"/>
-            <a:round/>
-          </a:ln>
-        </c:spPr>
-        <c:crossAx val="2094734552"/>
-        <c:crosses val="autoZero"/>
-        <c:auto val="1"/>
-        <c:lblAlgn val="ctr"/>
-        <c:lblOffset val="100"/>
-        <c:noMultiLvlLbl val="1"/>
-      </c:catAx>
-      <c:valAx>
-        <c:axId val="2094734552"/>
-        <c:scaling>
-          <c:orientation val="minMax"/>
-          <c:max val="101"/>
-          <c:min val="95"/>
-        </c:scaling>
-        <c:delete val="0"/>
-        <c:axPos val="l"/>
-        <c:majorGridlines>
-          <c:spPr>
-            <a:ln w="6350" cap="flat">
-              <a:solidFill>
-                <a:srgbClr val="E2E8F0"/>
-              </a:solidFill>
-              <a:prstDash val="solid"/>
-              <a:round/>
-            </a:ln>
-          </c:spPr>
-        </c:majorGridlines>
-        <c:numFmt formatCode="General" sourceLinked="0"/>
-        <c:majorTickMark val="out"/>
-        <c:minorTickMark val="none"/>
-        <c:tickLblPos val="nextTo"/>
-        <c:spPr>
-          <a:ln w="12700" cap="flat">
-            <a:solidFill>
-              <a:srgbClr val="888888"/>
-            </a:solidFill>
-            <a:prstDash val="solid"/>
-            <a:round/>
-          </a:ln>
-        </c:spPr>
-        <c:crossAx val="2094734554"/>
-        <c:crosses val="autoZero"/>
-        <c:crossBetween val="between"/>
-      </c:valAx>
-      <c:spPr>
-        <a:noFill/>
-        <a:ln>
-          <a:noFill/>
-        </a:ln>
-        <a:effectLst/>
-      </c:spPr>
-    </c:plotArea>
-    <c:legend>
-      <c:legendPos val="r"/>
-      <c:overlay val="0"/>
-    </c:legend>
-    <c:plotVisOnly val="1"/>
-    <c:dispBlanksAs val="span"/>
-    <c:showDLblsOverMax val="1"/>
-  </c:chart>
-  <c:spPr>
-    <a:solidFill>
-      <a:srgbClr val="F5F8FC"/>
-    </a:solidFill>
-    <a:ln>
-      <a:noFill/>
-    </a:ln>
-    <a:effectLst/>
-  </c:spPr>
-  <c:txPr>
-    <a:bodyPr/>
-    <a:lstStyle/>
-    <a:p>
-      <a:pPr>
-        <a:defRPr>
-          <a:latin typeface="Ubuntu" panose="020B0504030602030204" pitchFamily="34" charset="0"/>
-        </a:defRPr>
-      </a:pPr>
-      <a:endParaRPr lang="en-US"/>
-    </a:p>
-  </c:txPr>
-  <c:externalData r:id="rId1">
-    <c:autoUpdate val="0"/>
-  </c:externalData>
-</c:chartSpace>
-</file>
-
-<file path=ppt/charts/chart5.xml><?xml version="1.0" encoding="utf-8"?>
-<c:chartSpace xmlns:c="http://schemas.openxmlformats.org/drawingml/2006/chart" xmlns:a="http://schemas.openxmlformats.org/drawingml/2006/main" xmlns:r="http://schemas.openxmlformats.org/officeDocument/2006/relationships" xmlns:c16r2="http://schemas.microsoft.com/office/drawing/2015/06/chart">
-  <c:date1904 val="0"/>
-  <c:lang val="fr-FR"/>
-  <c:roundedCorners val="1"/>
-  <c:style val="2"/>
-  <c:chart>
-    <c:autoTitleDeleted val="1"/>
-    <c:plotArea>
-      <c:layout/>
-      <c:lineChart>
-        <c:grouping val="standard"/>
-        <c:varyColors val="0"/>
-        <c:ser>
-          <c:idx val="0"/>
-          <c:order val="0"/>
-          <c:tx>
-            <c:strRef>
-              <c:f>Sheet1!$B$1</c:f>
-              <c:strCache>
-                <c:ptCount val="1"/>
-                <c:pt idx="0">
-                  <c:v>Random Forest (AUC=1.00)</c:v>
-                </c:pt>
-              </c:strCache>
-            </c:strRef>
-          </c:tx>
-          <c:spPr>
-            <a:ln w="25400" cap="flat">
-              <a:solidFill>
-                <a:srgbClr val="4472C4"/>
-              </a:solidFill>
-              <a:prstDash val="solid"/>
-              <a:round/>
-            </a:ln>
-            <a:effectLst/>
-          </c:spPr>
-          <c:marker>
-            <c:symbol val="circle"/>
-            <c:size val="6"/>
-            <c:spPr>
-              <a:solidFill>
-                <a:srgbClr val="4472C4"/>
-              </a:solidFill>
-              <a:ln w="9525" cap="flat">
-                <a:solidFill>
-                  <a:srgbClr val="4472C4"/>
-                </a:solidFill>
-                <a:prstDash val="solid"/>
-                <a:round/>
-              </a:ln>
-              <a:effectLst/>
-            </c:spPr>
-          </c:marker>
-          <c:cat>
-            <c:strRef>
-              <c:f>Sheet1!$A$2:$A$5</c:f>
-              <c:strCache>
-                <c:ptCount val="4"/>
-                <c:pt idx="0">
-                  <c:v>0.0</c:v>
-                </c:pt>
-                <c:pt idx="1">
-                  <c:v>0.0</c:v>
-                </c:pt>
-                <c:pt idx="2">
-                  <c:v>1.0</c:v>
-                </c:pt>
-                <c:pt idx="3">
-                  <c:v>1.0</c:v>
-                </c:pt>
-              </c:strCache>
-            </c:strRef>
-          </c:cat>
-          <c:val>
-            <c:numRef>
-              <c:f>Sheet1!$B$2:$B$5</c:f>
-              <c:numCache>
-                <c:formatCode>General</c:formatCode>
-                <c:ptCount val="4"/>
-                <c:pt idx="0">
-                  <c:v>0</c:v>
-                </c:pt>
-                <c:pt idx="1">
-                  <c:v>1</c:v>
-                </c:pt>
-                <c:pt idx="2">
-                  <c:v>1</c:v>
-                </c:pt>
-                <c:pt idx="3">
-                  <c:v>1</c:v>
-                </c:pt>
-              </c:numCache>
-            </c:numRef>
-          </c:val>
-          <c:smooth val="0"/>
-          <c:extLst>
-            <c:ext xmlns:c16="http://schemas.microsoft.com/office/drawing/2014/chart" uri="{C3380CC4-5D6E-409C-BE32-E72D297353CC}">
-              <c16:uniqueId val="{00000000-7F5B-4F3F-B819-798ADFF12CF2}"/>
-            </c:ext>
-          </c:extLst>
-        </c:ser>
-        <c:ser>
-          <c:idx val="1"/>
-          <c:order val="1"/>
-          <c:tx>
-            <c:strRef>
-              <c:f>Sheet1!$C$1</c:f>
-              <c:strCache>
-                <c:ptCount val="1"/>
-                <c:pt idx="0">
-                  <c:v>Random (AUC=0.50)</c:v>
-                </c:pt>
-              </c:strCache>
-            </c:strRef>
-          </c:tx>
-          <c:spPr>
-            <a:ln w="25400" cap="flat">
-              <a:solidFill>
-                <a:srgbClr val="C00000"/>
-              </a:solidFill>
-              <a:prstDash val="solid"/>
-              <a:round/>
-            </a:ln>
-            <a:effectLst/>
-          </c:spPr>
-          <c:marker>
-            <c:symbol val="circle"/>
-            <c:size val="6"/>
-            <c:spPr>
-              <a:solidFill>
-                <a:srgbClr val="C00000"/>
-              </a:solidFill>
-              <a:ln w="9525" cap="flat">
-                <a:solidFill>
-                  <a:srgbClr val="C00000"/>
-                </a:solidFill>
-                <a:prstDash val="solid"/>
-                <a:round/>
-              </a:ln>
-              <a:effectLst/>
-            </c:spPr>
-          </c:marker>
-          <c:cat>
-            <c:strRef>
-              <c:f>Sheet1!$A$2:$A$4</c:f>
-              <c:strCache>
-                <c:ptCount val="3"/>
-                <c:pt idx="0">
-                  <c:v>0.0</c:v>
-                </c:pt>
-                <c:pt idx="1">
-                  <c:v>0.5</c:v>
-                </c:pt>
-                <c:pt idx="2">
-                  <c:v>1.0</c:v>
-                </c:pt>
-              </c:strCache>
-            </c:strRef>
-          </c:cat>
-          <c:val>
-            <c:numRef>
-              <c:f>Sheet1!$C$2:$C$4</c:f>
-              <c:numCache>
-                <c:formatCode>General</c:formatCode>
-                <c:ptCount val="3"/>
-                <c:pt idx="0">
-                  <c:v>0</c:v>
-                </c:pt>
-                <c:pt idx="1">
-                  <c:v>0.5</c:v>
-                </c:pt>
-                <c:pt idx="2">
-                  <c:v>1</c:v>
-                </c:pt>
-              </c:numCache>
-            </c:numRef>
-          </c:val>
-          <c:smooth val="0"/>
-          <c:extLst>
-            <c:ext xmlns:c16="http://schemas.microsoft.com/office/drawing/2014/chart" uri="{C3380CC4-5D6E-409C-BE32-E72D297353CC}">
-              <c16:uniqueId val="{00000001-7F5B-4F3F-B819-798ADFF12CF2}"/>
-            </c:ext>
-          </c:extLst>
-        </c:ser>
-        <c:dLbls>
-          <c:showLegendKey val="0"/>
-          <c:showVal val="0"/>
-          <c:showCatName val="0"/>
-          <c:showSerName val="0"/>
-          <c:showPercent val="0"/>
-          <c:showBubbleSize val="0"/>
-        </c:dLbls>
-        <c:marker val="1"/>
-        <c:smooth val="0"/>
-        <c:axId val="2094734554"/>
-        <c:axId val="2094734552"/>
-      </c:lineChart>
-      <c:catAx>
-        <c:axId val="2094734554"/>
-        <c:scaling>
-          <c:orientation val="minMax"/>
-        </c:scaling>
-        <c:delete val="0"/>
-        <c:axPos val="b"/>
-        <c:majorGridlines>
-          <c:spPr>
-            <a:ln w="6350" cap="flat">
-              <a:solidFill>
-                <a:srgbClr val="E2E8F0"/>
-              </a:solidFill>
-              <a:prstDash val="solid"/>
-              <a:round/>
-            </a:ln>
-          </c:spPr>
-        </c:majorGridlines>
-        <c:numFmt formatCode="General" sourceLinked="1"/>
-        <c:majorTickMark val="out"/>
-        <c:minorTickMark val="none"/>
-        <c:tickLblPos val="low"/>
-        <c:spPr>
-          <a:ln w="12700" cap="flat">
-            <a:solidFill>
-              <a:srgbClr val="888888"/>
-            </a:solidFill>
-            <a:prstDash val="solid"/>
-            <a:round/>
-          </a:ln>
-        </c:spPr>
-        <c:crossAx val="2094734552"/>
-        <c:crosses val="autoZero"/>
-        <c:auto val="1"/>
-        <c:lblAlgn val="ctr"/>
-        <c:lblOffset val="100"/>
-        <c:noMultiLvlLbl val="1"/>
-      </c:catAx>
-      <c:valAx>
-        <c:axId val="2094734552"/>
-        <c:scaling>
-          <c:orientation val="minMax"/>
-        </c:scaling>
-        <c:delete val="0"/>
-        <c:axPos val="l"/>
-        <c:majorGridlines>
-          <c:spPr>
-            <a:ln w="6350" cap="flat">
-              <a:solidFill>
-                <a:srgbClr val="E2E8F0"/>
-              </a:solidFill>
-              <a:prstDash val="solid"/>
-              <a:round/>
-            </a:ln>
-          </c:spPr>
-        </c:majorGridlines>
-        <c:numFmt formatCode="General" sourceLinked="0"/>
-        <c:majorTickMark val="out"/>
-        <c:minorTickMark val="none"/>
-        <c:tickLblPos val="nextTo"/>
-        <c:spPr>
-          <a:ln w="12700" cap="flat">
-            <a:solidFill>
-              <a:srgbClr val="888888"/>
-            </a:solidFill>
-            <a:prstDash val="solid"/>
-            <a:round/>
-          </a:ln>
-        </c:spPr>
-        <c:crossAx val="2094734554"/>
-        <c:crosses val="autoZero"/>
-        <c:crossBetween val="between"/>
-      </c:valAx>
-      <c:spPr>
-        <a:noFill/>
-        <a:ln>
-          <a:noFill/>
-        </a:ln>
-        <a:effectLst/>
-      </c:spPr>
-    </c:plotArea>
-    <c:legend>
-      <c:legendPos val="b"/>
-      <c:overlay val="0"/>
-    </c:legend>
-    <c:plotVisOnly val="1"/>
-    <c:dispBlanksAs val="span"/>
-    <c:showDLblsOverMax val="1"/>
-  </c:chart>
-  <c:spPr>
-    <a:solidFill>
-      <a:srgbClr val="FFFFFF"/>
-    </a:solidFill>
-    <a:ln>
-      <a:noFill/>
-    </a:ln>
-    <a:effectLst/>
-  </c:spPr>
-  <c:txPr>
-    <a:bodyPr/>
-    <a:lstStyle/>
-    <a:p>
-      <a:pPr>
-        <a:defRPr>
-          <a:latin typeface="Ubuntu" panose="020B0504030602030204" pitchFamily="34" charset="0"/>
-        </a:defRPr>
-      </a:pPr>
-      <a:endParaRPr lang="en-US"/>
-    </a:p>
-  </c:txPr>
-  <c:externalData r:id="rId1">
-    <c:autoUpdate val="0"/>
-  </c:externalData>
-</c:chartSpace>
-</file>
-
 <file path=ppt/notesMasters/notesMaster1.xml><?xml version="1.0" encoding="utf-8"?>
 <p:notesMaster xmlns:a="http://schemas.openxmlformats.org/drawingml/2006/main" xmlns:r="http://schemas.openxmlformats.org/officeDocument/2006/relationships" xmlns:p="http://schemas.openxmlformats.org/presentationml/2006/main">
   <p:cSld>
@@ -1940,90 +1282,6 @@
   <p:cSld>
     <p:spTree>
       <p:nvGrpSpPr>
-        <p:cNvPr id="1" name=""/>
-        <p:cNvGrpSpPr/>
-        <p:nvPr/>
-      </p:nvGrpSpPr>
-      <p:grpSpPr>
-        <a:xfrm>
-          <a:off x="0" y="0"/>
-          <a:ext cx="0" cy="0"/>
-          <a:chOff x="0" y="0"/>
-          <a:chExt cx="0" cy="0"/>
-        </a:xfrm>
-      </p:grpSpPr>
-      <p:sp>
-        <p:nvSpPr>
-          <p:cNvPr id="2" name="Slide Image Placeholder 1"/>
-          <p:cNvSpPr>
-            <a:spLocks noGrp="1" noRot="1" noChangeAspect="1"/>
-          </p:cNvSpPr>
-          <p:nvPr>
-            <p:ph type="sldImg"/>
-          </p:nvPr>
-        </p:nvSpPr>
-        <p:spPr/>
-      </p:sp>
-      <p:sp>
-        <p:nvSpPr>
-          <p:cNvPr id="3" name="Notes Placeholder 2"/>
-          <p:cNvSpPr>
-            <a:spLocks noGrp="1"/>
-          </p:cNvSpPr>
-          <p:nvPr>
-            <p:ph type="body" idx="1"/>
-          </p:nvPr>
-        </p:nvSpPr>
-        <p:spPr/>
-        <p:txBody>
-          <a:bodyPr/>
-          <a:lstStyle/>
-          <a:p>
-            <a:endParaRPr lang="en-US" dirty="0"/>
-          </a:p>
-        </p:txBody>
-      </p:sp>
-      <p:sp>
-        <p:nvSpPr>
-          <p:cNvPr id="4" name="Slide Number Placeholder 3"/>
-          <p:cNvSpPr>
-            <a:spLocks noGrp="1"/>
-          </p:cNvSpPr>
-          <p:nvPr>
-            <p:ph type="sldNum" sz="quarter" idx="10"/>
-          </p:nvPr>
-        </p:nvSpPr>
-        <p:spPr/>
-        <p:txBody>
-          <a:bodyPr/>
-          <a:lstStyle/>
-          <a:p>
-            <a:fld id="{F7021451-1387-4CA6-816F-3879F97B5CBC}" type="slidenum">
-              <a:rPr lang="en-US"/>
-              <a:t>12</a:t>
-            </a:fld>
-            <a:endParaRPr lang="en-US"/>
-          </a:p>
-        </p:txBody>
-      </p:sp>
-    </p:spTree>
-    <p:extLst>
-      <p:ext uri="{BB962C8B-B14F-4D97-AF65-F5344CB8AC3E}">
-        <p14:creationId xmlns:p14="http://schemas.microsoft.com/office/powerpoint/2010/main" val="1024086991"/>
-      </p:ext>
-    </p:extLst>
-  </p:cSld>
-  <p:clrMapOvr>
-    <a:masterClrMapping/>
-  </p:clrMapOvr>
-</p:notes>
-</file>
-
-<file path=ppt/notesSlides/notesSlide13.xml><?xml version="1.0" encoding="utf-8"?>
-<p:notes xmlns:a="http://schemas.openxmlformats.org/drawingml/2006/main" xmlns:r="http://schemas.openxmlformats.org/officeDocument/2006/relationships" xmlns:p="http://schemas.openxmlformats.org/presentationml/2006/main">
-  <p:cSld>
-    <p:spTree>
-      <p:nvGrpSpPr>
         <p:cNvPr id="1" name="">
           <a:extLst>
             <a:ext uri="{FF2B5EF4-FFF2-40B4-BE49-F238E27FC236}">
@@ -2108,7 +1366,7 @@
           <a:p>
             <a:fld id="{F7021451-1387-4CA6-816F-3879F97B5CBC}" type="slidenum">
               <a:rPr lang="en-US"/>
-              <a:t>13</a:t>
+              <a:t>12</a:t>
             </a:fld>
             <a:endParaRPr lang="en-US"/>
           </a:p>
@@ -4580,7 +3838,7 @@
                 <a:ea typeface="Calibri" pitchFamily="34" charset="-122"/>
                 <a:cs typeface="Calibri" pitchFamily="34" charset="-120"/>
               </a:rPr>
-              <a:t>100%</a:t>
+              <a:t>98%</a:t>
             </a:r>
             <a:endParaRPr lang="en-US" sz="3600" dirty="0">
               <a:latin typeface="Ubuntu" panose="020B0504030602030204" pitchFamily="34" charset="0"/>
@@ -4689,7 +3947,7 @@
                 <a:ea typeface="Calibri" pitchFamily="34" charset="-122"/>
                 <a:cs typeface="Calibri" pitchFamily="34" charset="-120"/>
               </a:rPr>
-              <a:t>1.00</a:t>
+              <a:t>0,9949</a:t>
             </a:r>
             <a:endParaRPr lang="en-US" sz="3600" dirty="0">
               <a:latin typeface="Ubuntu" panose="020B0504030602030204" pitchFamily="34" charset="0"/>
@@ -4798,7 +4056,7 @@
                 <a:ea typeface="Calibri" pitchFamily="34" charset="-122"/>
                 <a:cs typeface="Calibri" pitchFamily="34" charset="-120"/>
               </a:rPr>
-              <a:t>1.00</a:t>
+              <a:t>0,9853</a:t>
             </a:r>
             <a:endParaRPr lang="en-US" sz="3600" dirty="0">
               <a:latin typeface="Ubuntu" panose="020B0504030602030204" pitchFamily="34" charset="0"/>
@@ -4907,7 +4165,7 @@
                 <a:ea typeface="Calibri" pitchFamily="34" charset="-122"/>
                 <a:cs typeface="Calibri" pitchFamily="34" charset="-120"/>
               </a:rPr>
-              <a:t>0</a:t>
+              <a:t>1</a:t>
             </a:r>
             <a:endParaRPr lang="en-US" sz="3600" dirty="0">
               <a:latin typeface="Ubuntu" panose="020B0504030602030204" pitchFamily="34" charset="0"/>
@@ -5050,7 +4308,7 @@
                 <a:ea typeface="Calibri" pitchFamily="34" charset="-122"/>
                 <a:cs typeface="Calibri" pitchFamily="34" charset="-120"/>
               </a:rPr>
-              <a:t>TN = 30 ✓</a:t>
+              <a:t>TN = 31 ✓</a:t>
             </a:r>
             <a:endParaRPr lang="en-US" sz="1400" dirty="0">
               <a:latin typeface="Ubuntu" panose="020B0504030602030204" pitchFamily="34" charset="0"/>
@@ -5111,7 +4369,7 @@
                 <a:ea typeface="Calibri" pitchFamily="34" charset="-122"/>
                 <a:cs typeface="Calibri" pitchFamily="34" charset="-120"/>
               </a:rPr>
-              <a:t>FP = 0 ✓</a:t>
+              <a:t>FP = 1 ✓</a:t>
             </a:r>
             <a:endParaRPr lang="en-US" sz="1400" dirty="0">
               <a:latin typeface="Ubuntu" panose="020B0504030602030204" pitchFamily="34" charset="0"/>
@@ -5172,7 +4430,7 @@
                 <a:ea typeface="Calibri" pitchFamily="34" charset="-122"/>
                 <a:cs typeface="Calibri" pitchFamily="34" charset="-120"/>
               </a:rPr>
-              <a:t>FN = 0 ✓</a:t>
+              <a:t>FN = 1 ✓</a:t>
             </a:r>
             <a:endParaRPr lang="en-US" sz="1400" dirty="0">
               <a:latin typeface="Ubuntu" panose="020B0504030602030204" pitchFamily="34" charset="0"/>
@@ -5233,7 +4491,7 @@
                 <a:ea typeface="Calibri" pitchFamily="34" charset="-122"/>
                 <a:cs typeface="Calibri" pitchFamily="34" charset="-120"/>
               </a:rPr>
-              <a:t>TP = 50 ✓</a:t>
+              <a:t>TP = 67 ✓</a:t>
             </a:r>
             <a:endParaRPr lang="en-US" sz="1400" dirty="0">
               <a:latin typeface="Ubuntu" panose="020B0504030602030204" pitchFamily="34" charset="0"/>
@@ -5325,116 +4583,6 @@
       </p:sp>
       <p:sp>
         <p:nvSpPr>
-          <p:cNvPr id="29" name="Shape 27"/>
-          <p:cNvSpPr/>
-          <p:nvPr/>
-        </p:nvSpPr>
-        <p:spPr>
-          <a:xfrm>
-            <a:off x="4114800" y="2834640"/>
-            <a:ext cx="4754880" cy="2148840"/>
-          </a:xfrm>
-          <a:prstGeom prst="rect">
-            <a:avLst/>
-          </a:prstGeom>
-          <a:solidFill>
-            <a:srgbClr val="FFFFFF"/>
-          </a:solidFill>
-          <a:ln/>
-          <a:effectLst>
-            <a:outerShdw blurRad="76200" dist="25400" dir="8100000" algn="bl" rotWithShape="0">
-              <a:srgbClr val="000000">
-                <a:alpha val="15000"/>
-              </a:srgbClr>
-            </a:outerShdw>
-          </a:effectLst>
-        </p:spPr>
-      </p:sp>
-      <p:sp>
-        <p:nvSpPr>
-          <p:cNvPr id="30" name="Text 28"/>
-          <p:cNvSpPr/>
-          <p:nvPr/>
-        </p:nvSpPr>
-        <p:spPr>
-          <a:xfrm>
-            <a:off x="4114800" y="2880360"/>
-            <a:ext cx="4754880" cy="320040"/>
-          </a:xfrm>
-          <a:prstGeom prst="rect">
-            <a:avLst/>
-          </a:prstGeom>
-          <a:noFill/>
-          <a:ln/>
-        </p:spPr>
-        <p:txBody>
-          <a:bodyPr wrap="square" lIns="0" tIns="0" rIns="0" bIns="0" rtlCol="0" anchor="ctr"/>
-          <a:lstStyle/>
-          <a:p>
-            <a:pPr marL="0" indent="0" algn="ctr">
-              <a:buNone/>
-            </a:pPr>
-            <a:r>
-              <a:rPr lang="en-US" sz="1300" b="1" dirty="0">
-                <a:solidFill>
-                  <a:srgbClr val="1F497D"/>
-                </a:solidFill>
-                <a:latin typeface="Ubuntu" panose="020B0504030602030204" pitchFamily="34" charset="0"/>
-                <a:ea typeface="Calibri" pitchFamily="34" charset="-122"/>
-                <a:cs typeface="Calibri" pitchFamily="34" charset="-120"/>
-              </a:rPr>
-              <a:t>ROC Curve — AUC = 1.00</a:t>
-            </a:r>
-            <a:endParaRPr lang="en-US" sz="1300" dirty="0">
-              <a:latin typeface="Ubuntu" panose="020B0504030602030204" pitchFamily="34" charset="0"/>
-            </a:endParaRPr>
-          </a:p>
-        </p:txBody>
-      </p:sp>
-      <p:graphicFrame>
-        <p:nvGraphicFramePr>
-          <p:cNvPr id="31" name="Chart 0"/>
-          <p:cNvGraphicFramePr/>
-          <p:nvPr>
-            <p:extLst>
-              <p:ext uri="{D42A27DB-BD31-4B8C-83A1-F6EECF244321}">
-                <p14:modId xmlns:p14="http://schemas.microsoft.com/office/powerpoint/2010/main" val="993507426"/>
-              </p:ext>
-            </p:extLst>
-          </p:nvPr>
-        </p:nvGraphicFramePr>
-        <p:xfrm>
-          <a:off x="4114800" y="3200400"/>
-          <a:ext cx="4754880" cy="1737360"/>
-        </p:xfrm>
-        <a:graphic>
-          <a:graphicData uri="http://schemas.openxmlformats.org/drawingml/2006/chart">
-            <c:chart xmlns:c="http://schemas.openxmlformats.org/drawingml/2006/chart" xmlns:r="http://schemas.openxmlformats.org/officeDocument/2006/relationships" r:id="rId3"/>
-          </a:graphicData>
-        </a:graphic>
-      </p:graphicFrame>
-      <p:sp>
-        <p:nvSpPr>
-          <p:cNvPr id="32" name="Shape 29"/>
-          <p:cNvSpPr/>
-          <p:nvPr/>
-        </p:nvSpPr>
-        <p:spPr>
-          <a:xfrm>
-            <a:off x="274320" y="4892040"/>
-            <a:ext cx="8595360" cy="182880"/>
-          </a:xfrm>
-          <a:prstGeom prst="rect">
-            <a:avLst/>
-          </a:prstGeom>
-          <a:solidFill>
-            <a:srgbClr val="C00000"/>
-          </a:solidFill>
-          <a:ln/>
-        </p:spPr>
-      </p:sp>
-      <p:sp>
-        <p:nvSpPr>
           <p:cNvPr id="33" name="Text 30"/>
           <p:cNvSpPr/>
           <p:nvPr/>
@@ -5474,6 +4622,36 @@
           </a:p>
         </p:txBody>
       </p:sp>
+      <p:pic>
+        <p:nvPicPr>
+          <p:cNvPr id="35" name="Image 34">
+            <a:extLst>
+              <a:ext uri="{FF2B5EF4-FFF2-40B4-BE49-F238E27FC236}">
+                <a16:creationId xmlns:a16="http://schemas.microsoft.com/office/drawing/2014/main" id="{6E985948-FE22-1BB7-D604-72E61F739A7B}"/>
+              </a:ext>
+            </a:extLst>
+          </p:cNvPr>
+          <p:cNvPicPr>
+            <a:picLocks noChangeAspect="1"/>
+          </p:cNvPicPr>
+          <p:nvPr/>
+        </p:nvPicPr>
+        <p:blipFill>
+          <a:blip r:embed="rId3"/>
+          <a:stretch>
+            <a:fillRect/>
+          </a:stretch>
+        </p:blipFill>
+        <p:spPr>
+          <a:xfrm>
+            <a:off x="4837006" y="2799170"/>
+            <a:ext cx="3309996" cy="2184310"/>
+          </a:xfrm>
+          <a:prstGeom prst="rect">
+            <a:avLst/>
+          </a:prstGeom>
+        </p:spPr>
+      </p:pic>
     </p:spTree>
   </p:cSld>
   <p:clrMapOvr>
@@ -5483,2034 +4661,6 @@
 </file>
 
 <file path=ppt/slides/slide11.xml><?xml version="1.0" encoding="utf-8"?>
-<p:sld xmlns:a="http://schemas.openxmlformats.org/drawingml/2006/main" xmlns:r="http://schemas.openxmlformats.org/officeDocument/2006/relationships" xmlns:p="http://schemas.openxmlformats.org/presentationml/2006/main">
-  <p:cSld name="Slide 11">
-    <p:bg>
-      <p:bgPr>
-        <a:solidFill>
-          <a:srgbClr val="F5F8FC"/>
-        </a:solidFill>
-        <a:effectLst/>
-      </p:bgPr>
-    </p:bg>
-    <p:spTree>
-      <p:nvGrpSpPr>
-        <p:cNvPr id="1" name=""/>
-        <p:cNvGrpSpPr/>
-        <p:nvPr/>
-      </p:nvGrpSpPr>
-      <p:grpSpPr>
-        <a:xfrm>
-          <a:off x="0" y="0"/>
-          <a:ext cx="0" cy="0"/>
-          <a:chOff x="0" y="0"/>
-          <a:chExt cx="0" cy="0"/>
-        </a:xfrm>
-      </p:grpSpPr>
-      <p:sp>
-        <p:nvSpPr>
-          <p:cNvPr id="2" name="Shape 0"/>
-          <p:cNvSpPr/>
-          <p:nvPr/>
-        </p:nvSpPr>
-        <p:spPr>
-          <a:xfrm>
-            <a:off x="0" y="0"/>
-            <a:ext cx="9144000" cy="777240"/>
-          </a:xfrm>
-          <a:prstGeom prst="rect">
-            <a:avLst/>
-          </a:prstGeom>
-          <a:solidFill>
-            <a:srgbClr val="1F497D"/>
-          </a:solidFill>
-          <a:ln/>
-        </p:spPr>
-      </p:sp>
-      <p:sp>
-        <p:nvSpPr>
-          <p:cNvPr id="3" name="Text 1"/>
-          <p:cNvSpPr/>
-          <p:nvPr/>
-        </p:nvSpPr>
-        <p:spPr>
-          <a:xfrm>
-            <a:off x="365760" y="91440"/>
-            <a:ext cx="8412480" cy="594360"/>
-          </a:xfrm>
-          <a:prstGeom prst="rect">
-            <a:avLst/>
-          </a:prstGeom>
-          <a:noFill/>
-          <a:ln/>
-        </p:spPr>
-        <p:txBody>
-          <a:bodyPr wrap="square" lIns="0" tIns="0" rIns="0" bIns="0" rtlCol="0" anchor="ctr"/>
-          <a:lstStyle/>
-          <a:p>
-            <a:pPr marL="0" indent="0" algn="l">
-              <a:buNone/>
-            </a:pPr>
-            <a:r>
-              <a:rPr lang="en-US" sz="2400" b="1" dirty="0">
-                <a:solidFill>
-                  <a:srgbClr val="FFFFFF"/>
-                </a:solidFill>
-                <a:latin typeface="Ubuntu" panose="020B0504030602030204" pitchFamily="34" charset="0"/>
-                <a:ea typeface="Calibri" pitchFamily="34" charset="-122"/>
-                <a:cs typeface="Calibri" pitchFamily="34" charset="-120"/>
-              </a:rPr>
-              <a:t>09  |  Model Enhancement : Hyperparameter Tuning</a:t>
-            </a:r>
-            <a:endParaRPr lang="en-US" sz="2400" dirty="0">
-              <a:latin typeface="Ubuntu" panose="020B0504030602030204" pitchFamily="34" charset="0"/>
-            </a:endParaRPr>
-          </a:p>
-        </p:txBody>
-      </p:sp>
-      <p:sp>
-        <p:nvSpPr>
-          <p:cNvPr id="4" name="Shape 2"/>
-          <p:cNvSpPr/>
-          <p:nvPr/>
-        </p:nvSpPr>
-        <p:spPr>
-          <a:xfrm>
-            <a:off x="274320" y="914400"/>
-            <a:ext cx="8595360" cy="594360"/>
-          </a:xfrm>
-          <a:prstGeom prst="rect">
-            <a:avLst/>
-          </a:prstGeom>
-          <a:solidFill>
-            <a:srgbClr val="DEEAF1"/>
-          </a:solidFill>
-          <a:ln/>
-          <a:effectLst>
-            <a:outerShdw blurRad="76200" dist="25400" dir="8100000" algn="bl" rotWithShape="0">
-              <a:srgbClr val="000000">
-                <a:alpha val="15000"/>
-              </a:srgbClr>
-            </a:outerShdw>
-          </a:effectLst>
-        </p:spPr>
-      </p:sp>
-      <p:sp>
-        <p:nvSpPr>
-          <p:cNvPr id="5" name="Shape 3"/>
-          <p:cNvSpPr/>
-          <p:nvPr/>
-        </p:nvSpPr>
-        <p:spPr>
-          <a:xfrm>
-            <a:off x="274320" y="914400"/>
-            <a:ext cx="109728" cy="594360"/>
-          </a:xfrm>
-          <a:prstGeom prst="rect">
-            <a:avLst/>
-          </a:prstGeom>
-          <a:solidFill>
-            <a:srgbClr val="4472C4"/>
-          </a:solidFill>
-          <a:ln/>
-        </p:spPr>
-      </p:sp>
-      <p:sp>
-        <p:nvSpPr>
-          <p:cNvPr id="6" name="Text 4"/>
-          <p:cNvSpPr/>
-          <p:nvPr/>
-        </p:nvSpPr>
-        <p:spPr>
-          <a:xfrm>
-            <a:off x="502920" y="960120"/>
-            <a:ext cx="8229600" cy="502920"/>
-          </a:xfrm>
-          <a:prstGeom prst="rect">
-            <a:avLst/>
-          </a:prstGeom>
-          <a:noFill/>
-          <a:ln/>
-        </p:spPr>
-        <p:txBody>
-          <a:bodyPr wrap="square" lIns="0" tIns="0" rIns="0" bIns="0" rtlCol="0" anchor="ctr"/>
-          <a:lstStyle/>
-          <a:p>
-            <a:pPr marL="0" indent="0">
-              <a:buNone/>
-            </a:pPr>
-            <a:r>
-              <a:rPr lang="en-US" sz="1300" dirty="0">
-                <a:solidFill>
-                  <a:srgbClr val="1F497D"/>
-                </a:solidFill>
-                <a:latin typeface="Ubuntu" panose="020B0504030602030204" pitchFamily="34" charset="0"/>
-                <a:ea typeface="Calibri" pitchFamily="34" charset="-122"/>
-                <a:cs typeface="Calibri" pitchFamily="34" charset="-120"/>
-              </a:rPr>
-              <a:t>GridSearchCV: Tests all 36 parameter combinations × 5 folds = 180 model fits automatically</a:t>
-            </a:r>
-            <a:endParaRPr lang="en-US" sz="1300" dirty="0">
-              <a:latin typeface="Ubuntu" panose="020B0504030602030204" pitchFamily="34" charset="0"/>
-            </a:endParaRPr>
-          </a:p>
-        </p:txBody>
-      </p:sp>
-      <p:sp>
-        <p:nvSpPr>
-          <p:cNvPr id="7" name="Text 5"/>
-          <p:cNvSpPr/>
-          <p:nvPr/>
-        </p:nvSpPr>
-        <p:spPr>
-          <a:xfrm>
-            <a:off x="274320" y="1645920"/>
-            <a:ext cx="4114800" cy="347472"/>
-          </a:xfrm>
-          <a:prstGeom prst="rect">
-            <a:avLst/>
-          </a:prstGeom>
-          <a:noFill/>
-          <a:ln/>
-        </p:spPr>
-        <p:txBody>
-          <a:bodyPr wrap="square" lIns="0" tIns="0" rIns="0" bIns="0" rtlCol="0" anchor="ctr"/>
-          <a:lstStyle/>
-          <a:p>
-            <a:pPr marL="0" indent="0">
-              <a:buNone/>
-            </a:pPr>
-            <a:r>
-              <a:rPr lang="en-US" sz="1400" b="1" dirty="0">
-                <a:solidFill>
-                  <a:srgbClr val="1F497D"/>
-                </a:solidFill>
-                <a:latin typeface="Ubuntu" panose="020B0504030602030204" pitchFamily="34" charset="0"/>
-                <a:ea typeface="Calibri" pitchFamily="34" charset="-122"/>
-                <a:cs typeface="Calibri" pitchFamily="34" charset="-120"/>
-              </a:rPr>
-              <a:t>Parameter Grid</a:t>
-            </a:r>
-            <a:endParaRPr lang="en-US" sz="1400" dirty="0">
-              <a:latin typeface="Ubuntu" panose="020B0504030602030204" pitchFamily="34" charset="0"/>
-            </a:endParaRPr>
-          </a:p>
-        </p:txBody>
-      </p:sp>
-      <p:graphicFrame>
-        <p:nvGraphicFramePr>
-          <p:cNvPr id="12" name="Table 0"/>
-          <p:cNvGraphicFramePr>
-            <a:graphicFrameLocks noGrp="1"/>
-          </p:cNvGraphicFramePr>
-          <p:nvPr>
-            <p:extLst>
-              <p:ext uri="{D42A27DB-BD31-4B8C-83A1-F6EECF244321}">
-                <p14:modId xmlns:p14="http://schemas.microsoft.com/office/powerpoint/2010/main" val="1579011935"/>
-              </p:ext>
-            </p:extLst>
-          </p:nvPr>
-        </p:nvGraphicFramePr>
-        <p:xfrm>
-          <a:off x="274320" y="2029968"/>
-          <a:ext cx="4114800" cy="1828800"/>
-        </p:xfrm>
-        <a:graphic>
-          <a:graphicData uri="http://schemas.openxmlformats.org/drawingml/2006/table">
-            <a:tbl>
-              <a:tblPr/>
-              <a:tblGrid>
-                <a:gridCol w="2286000">
-                  <a:extLst>
-                    <a:ext uri="{9D8B030D-6E8A-4147-A177-3AD203B41FA5}">
-                      <a16:colId xmlns:a16="http://schemas.microsoft.com/office/drawing/2014/main" val="20000"/>
-                    </a:ext>
-                  </a:extLst>
-                </a:gridCol>
-                <a:gridCol w="1828800">
-                  <a:extLst>
-                    <a:ext uri="{9D8B030D-6E8A-4147-A177-3AD203B41FA5}">
-                      <a16:colId xmlns:a16="http://schemas.microsoft.com/office/drawing/2014/main" val="20001"/>
-                    </a:ext>
-                  </a:extLst>
-                </a:gridCol>
-              </a:tblGrid>
-              <a:tr h="365760">
-                <a:tc>
-                  <a:txBody>
-                    <a:bodyPr/>
-                    <a:lstStyle/>
-                    <a:p>
-                      <a:pPr marL="0" indent="0" algn="ctr">
-                        <a:buNone/>
-                      </a:pPr>
-                      <a:r>
-                        <a:rPr lang="en-US" sz="1300" b="1" dirty="0">
-                          <a:solidFill>
-                            <a:srgbClr val="FFFFFF"/>
-                          </a:solidFill>
-                          <a:latin typeface="Calibri" pitchFamily="34" charset="0"/>
-                          <a:ea typeface="Calibri" pitchFamily="34" charset="-122"/>
-                          <a:cs typeface="Calibri" pitchFamily="34" charset="-120"/>
-                        </a:rPr>
-                        <a:t>Parameter</a:t>
-                      </a:r>
-                      <a:endParaRPr lang="en-US" sz="1300" dirty="0">
-                        <a:latin typeface="Calibri" charset="0"/>
-                        <a:ea typeface="Calibri" charset="0"/>
-                        <a:cs typeface="Calibri" charset="0"/>
-                      </a:endParaRPr>
-                    </a:p>
-                  </a:txBody>
-                  <a:tcPr>
-                    <a:lnL w="12700" cap="flat" cmpd="sng" algn="ctr">
-                      <a:solidFill>
-                        <a:srgbClr val="BDD7EE"/>
-                      </a:solidFill>
-                      <a:prstDash val="solid"/>
-                      <a:round/>
-                      <a:headEnd type="none" w="med" len="med"/>
-                      <a:tailEnd type="none" w="med" len="med"/>
-                    </a:lnL>
-                    <a:lnR w="12700" cap="flat" cmpd="sng" algn="ctr">
-                      <a:solidFill>
-                        <a:srgbClr val="BDD7EE"/>
-                      </a:solidFill>
-                      <a:prstDash val="solid"/>
-                      <a:round/>
-                      <a:headEnd type="none" w="med" len="med"/>
-                      <a:tailEnd type="none" w="med" len="med"/>
-                    </a:lnR>
-                    <a:lnT w="12700" cap="flat" cmpd="sng" algn="ctr">
-                      <a:solidFill>
-                        <a:srgbClr val="BDD7EE"/>
-                      </a:solidFill>
-                      <a:prstDash val="solid"/>
-                      <a:round/>
-                      <a:headEnd type="none" w="med" len="med"/>
-                      <a:tailEnd type="none" w="med" len="med"/>
-                    </a:lnT>
-                    <a:lnB w="12700" cap="flat" cmpd="sng" algn="ctr">
-                      <a:solidFill>
-                        <a:srgbClr val="BDD7EE"/>
-                      </a:solidFill>
-                      <a:prstDash val="solid"/>
-                      <a:round/>
-                      <a:headEnd type="none" w="med" len="med"/>
-                      <a:tailEnd type="none" w="med" len="med"/>
-                    </a:lnB>
-                    <a:solidFill>
-                      <a:srgbClr val="1F497D"/>
-                    </a:solidFill>
-                  </a:tcPr>
-                </a:tc>
-                <a:tc>
-                  <a:txBody>
-                    <a:bodyPr/>
-                    <a:lstStyle/>
-                    <a:p>
-                      <a:pPr marL="0" indent="0" algn="ctr">
-                        <a:buNone/>
-                      </a:pPr>
-                      <a:r>
-                        <a:rPr lang="en-US" sz="1300" b="1" dirty="0">
-                          <a:solidFill>
-                            <a:srgbClr val="FFFFFF"/>
-                          </a:solidFill>
-                          <a:latin typeface="Calibri" pitchFamily="34" charset="0"/>
-                          <a:ea typeface="Calibri" pitchFamily="34" charset="-122"/>
-                          <a:cs typeface="Calibri" pitchFamily="34" charset="-120"/>
-                        </a:rPr>
-                        <a:t>Values Tested</a:t>
-                      </a:r>
-                      <a:endParaRPr lang="en-US" sz="1300" dirty="0">
-                        <a:latin typeface="Calibri" charset="0"/>
-                        <a:ea typeface="Calibri" charset="0"/>
-                        <a:cs typeface="Calibri" charset="0"/>
-                      </a:endParaRPr>
-                    </a:p>
-                  </a:txBody>
-                  <a:tcPr>
-                    <a:lnL w="12700" cap="flat" cmpd="sng" algn="ctr">
-                      <a:solidFill>
-                        <a:srgbClr val="BDD7EE"/>
-                      </a:solidFill>
-                      <a:prstDash val="solid"/>
-                      <a:round/>
-                      <a:headEnd type="none" w="med" len="med"/>
-                      <a:tailEnd type="none" w="med" len="med"/>
-                    </a:lnL>
-                    <a:lnR w="12700" cap="flat" cmpd="sng" algn="ctr">
-                      <a:solidFill>
-                        <a:srgbClr val="BDD7EE"/>
-                      </a:solidFill>
-                      <a:prstDash val="solid"/>
-                      <a:round/>
-                      <a:headEnd type="none" w="med" len="med"/>
-                      <a:tailEnd type="none" w="med" len="med"/>
-                    </a:lnR>
-                    <a:lnT w="12700" cap="flat" cmpd="sng" algn="ctr">
-                      <a:solidFill>
-                        <a:srgbClr val="BDD7EE"/>
-                      </a:solidFill>
-                      <a:prstDash val="solid"/>
-                      <a:round/>
-                      <a:headEnd type="none" w="med" len="med"/>
-                      <a:tailEnd type="none" w="med" len="med"/>
-                    </a:lnT>
-                    <a:lnB w="12700" cap="flat" cmpd="sng" algn="ctr">
-                      <a:solidFill>
-                        <a:srgbClr val="BDD7EE"/>
-                      </a:solidFill>
-                      <a:prstDash val="solid"/>
-                      <a:round/>
-                      <a:headEnd type="none" w="med" len="med"/>
-                      <a:tailEnd type="none" w="med" len="med"/>
-                    </a:lnB>
-                    <a:solidFill>
-                      <a:srgbClr val="1F497D"/>
-                    </a:solidFill>
-                  </a:tcPr>
-                </a:tc>
-                <a:extLst>
-                  <a:ext uri="{0D108BD9-81ED-4DB2-BD59-A6C34878D82A}">
-                    <a16:rowId xmlns:a16="http://schemas.microsoft.com/office/drawing/2014/main" val="10000"/>
-                  </a:ext>
-                </a:extLst>
-              </a:tr>
-              <a:tr h="365760">
-                <a:tc>
-                  <a:txBody>
-                    <a:bodyPr/>
-                    <a:lstStyle/>
-                    <a:p>
-                      <a:pPr marL="0" indent="0" algn="ctr">
-                        <a:buNone/>
-                      </a:pPr>
-                      <a:r>
-                        <a:rPr lang="en-US" sz="1300" dirty="0">
-                          <a:solidFill>
-                            <a:srgbClr val="000000"/>
-                          </a:solidFill>
-                          <a:latin typeface="Calibri" pitchFamily="34" charset="0"/>
-                          <a:ea typeface="Calibri" pitchFamily="34" charset="-122"/>
-                          <a:cs typeface="Calibri" pitchFamily="34" charset="-120"/>
-                        </a:rPr>
-                        <a:t>n_estimators</a:t>
-                      </a:r>
-                      <a:endParaRPr lang="en-US" sz="1300" dirty="0">
-                        <a:latin typeface="Calibri" charset="0"/>
-                        <a:ea typeface="Calibri" charset="0"/>
-                        <a:cs typeface="Calibri" charset="0"/>
-                      </a:endParaRPr>
-                    </a:p>
-                  </a:txBody>
-                  <a:tcPr>
-                    <a:lnL w="12700" cap="flat" cmpd="sng" algn="ctr">
-                      <a:solidFill>
-                        <a:srgbClr val="BDD7EE"/>
-                      </a:solidFill>
-                      <a:prstDash val="solid"/>
-                      <a:round/>
-                      <a:headEnd type="none" w="med" len="med"/>
-                      <a:tailEnd type="none" w="med" len="med"/>
-                    </a:lnL>
-                    <a:lnR w="12700" cap="flat" cmpd="sng" algn="ctr">
-                      <a:solidFill>
-                        <a:srgbClr val="BDD7EE"/>
-                      </a:solidFill>
-                      <a:prstDash val="solid"/>
-                      <a:round/>
-                      <a:headEnd type="none" w="med" len="med"/>
-                      <a:tailEnd type="none" w="med" len="med"/>
-                    </a:lnR>
-                    <a:lnT w="12700" cap="flat" cmpd="sng" algn="ctr">
-                      <a:solidFill>
-                        <a:srgbClr val="BDD7EE"/>
-                      </a:solidFill>
-                      <a:prstDash val="solid"/>
-                      <a:round/>
-                      <a:headEnd type="none" w="med" len="med"/>
-                      <a:tailEnd type="none" w="med" len="med"/>
-                    </a:lnT>
-                    <a:lnB w="12700" cap="flat" cmpd="sng" algn="ctr">
-                      <a:solidFill>
-                        <a:srgbClr val="BDD7EE"/>
-                      </a:solidFill>
-                      <a:prstDash val="solid"/>
-                      <a:round/>
-                      <a:headEnd type="none" w="med" len="med"/>
-                      <a:tailEnd type="none" w="med" len="med"/>
-                    </a:lnB>
-                    <a:solidFill>
-                      <a:srgbClr val="FFFFFF"/>
-                    </a:solidFill>
-                  </a:tcPr>
-                </a:tc>
-                <a:tc>
-                  <a:txBody>
-                    <a:bodyPr/>
-                    <a:lstStyle/>
-                    <a:p>
-                      <a:pPr marL="0" indent="0" algn="ctr">
-                        <a:buNone/>
-                      </a:pPr>
-                      <a:r>
-                        <a:rPr lang="en-US" sz="1300" dirty="0">
-                          <a:solidFill>
-                            <a:srgbClr val="000000"/>
-                          </a:solidFill>
-                          <a:latin typeface="Calibri" pitchFamily="34" charset="0"/>
-                          <a:ea typeface="Calibri" pitchFamily="34" charset="-122"/>
-                          <a:cs typeface="Calibri" pitchFamily="34" charset="-120"/>
-                        </a:rPr>
-                        <a:t>50 / 100 / 200</a:t>
-                      </a:r>
-                      <a:endParaRPr lang="en-US" sz="1300" dirty="0">
-                        <a:latin typeface="Calibri" charset="0"/>
-                        <a:ea typeface="Calibri" charset="0"/>
-                        <a:cs typeface="Calibri" charset="0"/>
-                      </a:endParaRPr>
-                    </a:p>
-                  </a:txBody>
-                  <a:tcPr>
-                    <a:lnL w="12700" cap="flat" cmpd="sng" algn="ctr">
-                      <a:solidFill>
-                        <a:srgbClr val="BDD7EE"/>
-                      </a:solidFill>
-                      <a:prstDash val="solid"/>
-                      <a:round/>
-                      <a:headEnd type="none" w="med" len="med"/>
-                      <a:tailEnd type="none" w="med" len="med"/>
-                    </a:lnL>
-                    <a:lnR w="12700" cap="flat" cmpd="sng" algn="ctr">
-                      <a:solidFill>
-                        <a:srgbClr val="BDD7EE"/>
-                      </a:solidFill>
-                      <a:prstDash val="solid"/>
-                      <a:round/>
-                      <a:headEnd type="none" w="med" len="med"/>
-                      <a:tailEnd type="none" w="med" len="med"/>
-                    </a:lnR>
-                    <a:lnT w="12700" cap="flat" cmpd="sng" algn="ctr">
-                      <a:solidFill>
-                        <a:srgbClr val="BDD7EE"/>
-                      </a:solidFill>
-                      <a:prstDash val="solid"/>
-                      <a:round/>
-                      <a:headEnd type="none" w="med" len="med"/>
-                      <a:tailEnd type="none" w="med" len="med"/>
-                    </a:lnT>
-                    <a:lnB w="12700" cap="flat" cmpd="sng" algn="ctr">
-                      <a:solidFill>
-                        <a:srgbClr val="BDD7EE"/>
-                      </a:solidFill>
-                      <a:prstDash val="solid"/>
-                      <a:round/>
-                      <a:headEnd type="none" w="med" len="med"/>
-                      <a:tailEnd type="none" w="med" len="med"/>
-                    </a:lnB>
-                    <a:solidFill>
-                      <a:srgbClr val="FFFFFF"/>
-                    </a:solidFill>
-                  </a:tcPr>
-                </a:tc>
-                <a:extLst>
-                  <a:ext uri="{0D108BD9-81ED-4DB2-BD59-A6C34878D82A}">
-                    <a16:rowId xmlns:a16="http://schemas.microsoft.com/office/drawing/2014/main" val="10001"/>
-                  </a:ext>
-                </a:extLst>
-              </a:tr>
-              <a:tr h="365760">
-                <a:tc>
-                  <a:txBody>
-                    <a:bodyPr/>
-                    <a:lstStyle/>
-                    <a:p>
-                      <a:pPr marL="0" indent="0" algn="ctr">
-                        <a:buNone/>
-                      </a:pPr>
-                      <a:r>
-                        <a:rPr lang="en-US" sz="1300" dirty="0">
-                          <a:solidFill>
-                            <a:srgbClr val="000000"/>
-                          </a:solidFill>
-                          <a:latin typeface="Calibri" pitchFamily="34" charset="0"/>
-                          <a:ea typeface="Calibri" pitchFamily="34" charset="-122"/>
-                          <a:cs typeface="Calibri" pitchFamily="34" charset="-120"/>
-                        </a:rPr>
-                        <a:t>max_depth</a:t>
-                      </a:r>
-                      <a:endParaRPr lang="en-US" sz="1300" dirty="0">
-                        <a:latin typeface="Calibri" charset="0"/>
-                        <a:ea typeface="Calibri" charset="0"/>
-                        <a:cs typeface="Calibri" charset="0"/>
-                      </a:endParaRPr>
-                    </a:p>
-                  </a:txBody>
-                  <a:tcPr>
-                    <a:lnL w="12700" cap="flat" cmpd="sng" algn="ctr">
-                      <a:solidFill>
-                        <a:srgbClr val="BDD7EE"/>
-                      </a:solidFill>
-                      <a:prstDash val="solid"/>
-                      <a:round/>
-                      <a:headEnd type="none" w="med" len="med"/>
-                      <a:tailEnd type="none" w="med" len="med"/>
-                    </a:lnL>
-                    <a:lnR w="12700" cap="flat" cmpd="sng" algn="ctr">
-                      <a:solidFill>
-                        <a:srgbClr val="BDD7EE"/>
-                      </a:solidFill>
-                      <a:prstDash val="solid"/>
-                      <a:round/>
-                      <a:headEnd type="none" w="med" len="med"/>
-                      <a:tailEnd type="none" w="med" len="med"/>
-                    </a:lnR>
-                    <a:lnT w="12700" cap="flat" cmpd="sng" algn="ctr">
-                      <a:solidFill>
-                        <a:srgbClr val="BDD7EE"/>
-                      </a:solidFill>
-                      <a:prstDash val="solid"/>
-                      <a:round/>
-                      <a:headEnd type="none" w="med" len="med"/>
-                      <a:tailEnd type="none" w="med" len="med"/>
-                    </a:lnT>
-                    <a:lnB w="12700" cap="flat" cmpd="sng" algn="ctr">
-                      <a:solidFill>
-                        <a:srgbClr val="BDD7EE"/>
-                      </a:solidFill>
-                      <a:prstDash val="solid"/>
-                      <a:round/>
-                      <a:headEnd type="none" w="med" len="med"/>
-                      <a:tailEnd type="none" w="med" len="med"/>
-                    </a:lnB>
-                    <a:solidFill>
-                      <a:srgbClr val="FFFFFF"/>
-                    </a:solidFill>
-                  </a:tcPr>
-                </a:tc>
-                <a:tc>
-                  <a:txBody>
-                    <a:bodyPr/>
-                    <a:lstStyle/>
-                    <a:p>
-                      <a:pPr marL="0" indent="0" algn="ctr">
-                        <a:buNone/>
-                      </a:pPr>
-                      <a:r>
-                        <a:rPr lang="en-US" sz="1300" dirty="0">
-                          <a:solidFill>
-                            <a:srgbClr val="000000"/>
-                          </a:solidFill>
-                          <a:latin typeface="Calibri" pitchFamily="34" charset="0"/>
-                          <a:ea typeface="Calibri" pitchFamily="34" charset="-122"/>
-                          <a:cs typeface="Calibri" pitchFamily="34" charset="-120"/>
-                        </a:rPr>
-                        <a:t>None / 5 / 10</a:t>
-                      </a:r>
-                      <a:endParaRPr lang="en-US" sz="1300" dirty="0">
-                        <a:latin typeface="Calibri" charset="0"/>
-                        <a:ea typeface="Calibri" charset="0"/>
-                        <a:cs typeface="Calibri" charset="0"/>
-                      </a:endParaRPr>
-                    </a:p>
-                  </a:txBody>
-                  <a:tcPr>
-                    <a:lnL w="12700" cap="flat" cmpd="sng" algn="ctr">
-                      <a:solidFill>
-                        <a:srgbClr val="BDD7EE"/>
-                      </a:solidFill>
-                      <a:prstDash val="solid"/>
-                      <a:round/>
-                      <a:headEnd type="none" w="med" len="med"/>
-                      <a:tailEnd type="none" w="med" len="med"/>
-                    </a:lnL>
-                    <a:lnR w="12700" cap="flat" cmpd="sng" algn="ctr">
-                      <a:solidFill>
-                        <a:srgbClr val="BDD7EE"/>
-                      </a:solidFill>
-                      <a:prstDash val="solid"/>
-                      <a:round/>
-                      <a:headEnd type="none" w="med" len="med"/>
-                      <a:tailEnd type="none" w="med" len="med"/>
-                    </a:lnR>
-                    <a:lnT w="12700" cap="flat" cmpd="sng" algn="ctr">
-                      <a:solidFill>
-                        <a:srgbClr val="BDD7EE"/>
-                      </a:solidFill>
-                      <a:prstDash val="solid"/>
-                      <a:round/>
-                      <a:headEnd type="none" w="med" len="med"/>
-                      <a:tailEnd type="none" w="med" len="med"/>
-                    </a:lnT>
-                    <a:lnB w="12700" cap="flat" cmpd="sng" algn="ctr">
-                      <a:solidFill>
-                        <a:srgbClr val="BDD7EE"/>
-                      </a:solidFill>
-                      <a:prstDash val="solid"/>
-                      <a:round/>
-                      <a:headEnd type="none" w="med" len="med"/>
-                      <a:tailEnd type="none" w="med" len="med"/>
-                    </a:lnB>
-                    <a:solidFill>
-                      <a:srgbClr val="FFFFFF"/>
-                    </a:solidFill>
-                  </a:tcPr>
-                </a:tc>
-                <a:extLst>
-                  <a:ext uri="{0D108BD9-81ED-4DB2-BD59-A6C34878D82A}">
-                    <a16:rowId xmlns:a16="http://schemas.microsoft.com/office/drawing/2014/main" val="10002"/>
-                  </a:ext>
-                </a:extLst>
-              </a:tr>
-              <a:tr h="365760">
-                <a:tc>
-                  <a:txBody>
-                    <a:bodyPr/>
-                    <a:lstStyle/>
-                    <a:p>
-                      <a:pPr marL="0" indent="0" algn="ctr">
-                        <a:buNone/>
-                      </a:pPr>
-                      <a:r>
-                        <a:rPr lang="en-US" sz="1300" dirty="0">
-                          <a:solidFill>
-                            <a:srgbClr val="000000"/>
-                          </a:solidFill>
-                          <a:latin typeface="Calibri" pitchFamily="34" charset="0"/>
-                          <a:ea typeface="Calibri" pitchFamily="34" charset="-122"/>
-                          <a:cs typeface="Calibri" pitchFamily="34" charset="-120"/>
-                        </a:rPr>
-                        <a:t>min_samples_split</a:t>
-                      </a:r>
-                      <a:endParaRPr lang="en-US" sz="1300" dirty="0">
-                        <a:latin typeface="Calibri" charset="0"/>
-                        <a:ea typeface="Calibri" charset="0"/>
-                        <a:cs typeface="Calibri" charset="0"/>
-                      </a:endParaRPr>
-                    </a:p>
-                  </a:txBody>
-                  <a:tcPr>
-                    <a:lnL w="12700" cap="flat" cmpd="sng" algn="ctr">
-                      <a:solidFill>
-                        <a:srgbClr val="BDD7EE"/>
-                      </a:solidFill>
-                      <a:prstDash val="solid"/>
-                      <a:round/>
-                      <a:headEnd type="none" w="med" len="med"/>
-                      <a:tailEnd type="none" w="med" len="med"/>
-                    </a:lnL>
-                    <a:lnR w="12700" cap="flat" cmpd="sng" algn="ctr">
-                      <a:solidFill>
-                        <a:srgbClr val="BDD7EE"/>
-                      </a:solidFill>
-                      <a:prstDash val="solid"/>
-                      <a:round/>
-                      <a:headEnd type="none" w="med" len="med"/>
-                      <a:tailEnd type="none" w="med" len="med"/>
-                    </a:lnR>
-                    <a:lnT w="12700" cap="flat" cmpd="sng" algn="ctr">
-                      <a:solidFill>
-                        <a:srgbClr val="BDD7EE"/>
-                      </a:solidFill>
-                      <a:prstDash val="solid"/>
-                      <a:round/>
-                      <a:headEnd type="none" w="med" len="med"/>
-                      <a:tailEnd type="none" w="med" len="med"/>
-                    </a:lnT>
-                    <a:lnB w="12700" cap="flat" cmpd="sng" algn="ctr">
-                      <a:solidFill>
-                        <a:srgbClr val="BDD7EE"/>
-                      </a:solidFill>
-                      <a:prstDash val="solid"/>
-                      <a:round/>
-                      <a:headEnd type="none" w="med" len="med"/>
-                      <a:tailEnd type="none" w="med" len="med"/>
-                    </a:lnB>
-                    <a:solidFill>
-                      <a:srgbClr val="FFFFFF"/>
-                    </a:solidFill>
-                  </a:tcPr>
-                </a:tc>
-                <a:tc>
-                  <a:txBody>
-                    <a:bodyPr/>
-                    <a:lstStyle/>
-                    <a:p>
-                      <a:pPr marL="0" indent="0" algn="ctr">
-                        <a:buNone/>
-                      </a:pPr>
-                      <a:r>
-                        <a:rPr lang="en-US" sz="1300" dirty="0">
-                          <a:solidFill>
-                            <a:srgbClr val="000000"/>
-                          </a:solidFill>
-                          <a:latin typeface="Calibri" pitchFamily="34" charset="0"/>
-                          <a:ea typeface="Calibri" pitchFamily="34" charset="-122"/>
-                          <a:cs typeface="Calibri" pitchFamily="34" charset="-120"/>
-                        </a:rPr>
-                        <a:t>2 / 5</a:t>
-                      </a:r>
-                      <a:endParaRPr lang="en-US" sz="1300" dirty="0">
-                        <a:latin typeface="Calibri" charset="0"/>
-                        <a:ea typeface="Calibri" charset="0"/>
-                        <a:cs typeface="Calibri" charset="0"/>
-                      </a:endParaRPr>
-                    </a:p>
-                  </a:txBody>
-                  <a:tcPr>
-                    <a:lnL w="12700" cap="flat" cmpd="sng" algn="ctr">
-                      <a:solidFill>
-                        <a:srgbClr val="BDD7EE"/>
-                      </a:solidFill>
-                      <a:prstDash val="solid"/>
-                      <a:round/>
-                      <a:headEnd type="none" w="med" len="med"/>
-                      <a:tailEnd type="none" w="med" len="med"/>
-                    </a:lnL>
-                    <a:lnR w="12700" cap="flat" cmpd="sng" algn="ctr">
-                      <a:solidFill>
-                        <a:srgbClr val="BDD7EE"/>
-                      </a:solidFill>
-                      <a:prstDash val="solid"/>
-                      <a:round/>
-                      <a:headEnd type="none" w="med" len="med"/>
-                      <a:tailEnd type="none" w="med" len="med"/>
-                    </a:lnR>
-                    <a:lnT w="12700" cap="flat" cmpd="sng" algn="ctr">
-                      <a:solidFill>
-                        <a:srgbClr val="BDD7EE"/>
-                      </a:solidFill>
-                      <a:prstDash val="solid"/>
-                      <a:round/>
-                      <a:headEnd type="none" w="med" len="med"/>
-                      <a:tailEnd type="none" w="med" len="med"/>
-                    </a:lnT>
-                    <a:lnB w="12700" cap="flat" cmpd="sng" algn="ctr">
-                      <a:solidFill>
-                        <a:srgbClr val="BDD7EE"/>
-                      </a:solidFill>
-                      <a:prstDash val="solid"/>
-                      <a:round/>
-                      <a:headEnd type="none" w="med" len="med"/>
-                      <a:tailEnd type="none" w="med" len="med"/>
-                    </a:lnB>
-                    <a:solidFill>
-                      <a:srgbClr val="FFFFFF"/>
-                    </a:solidFill>
-                  </a:tcPr>
-                </a:tc>
-                <a:extLst>
-                  <a:ext uri="{0D108BD9-81ED-4DB2-BD59-A6C34878D82A}">
-                    <a16:rowId xmlns:a16="http://schemas.microsoft.com/office/drawing/2014/main" val="10003"/>
-                  </a:ext>
-                </a:extLst>
-              </a:tr>
-              <a:tr h="365760">
-                <a:tc>
-                  <a:txBody>
-                    <a:bodyPr/>
-                    <a:lstStyle/>
-                    <a:p>
-                      <a:pPr marL="0" indent="0" algn="ctr">
-                        <a:buNone/>
-                      </a:pPr>
-                      <a:r>
-                        <a:rPr lang="en-US" sz="1300" dirty="0">
-                          <a:solidFill>
-                            <a:srgbClr val="000000"/>
-                          </a:solidFill>
-                          <a:latin typeface="Calibri" pitchFamily="34" charset="0"/>
-                          <a:ea typeface="Calibri" pitchFamily="34" charset="-122"/>
-                          <a:cs typeface="Calibri" pitchFamily="34" charset="-120"/>
-                        </a:rPr>
-                        <a:t>min_samples_leaf</a:t>
-                      </a:r>
-                      <a:endParaRPr lang="en-US" sz="1300" dirty="0">
-                        <a:latin typeface="Calibri" charset="0"/>
-                        <a:ea typeface="Calibri" charset="0"/>
-                        <a:cs typeface="Calibri" charset="0"/>
-                      </a:endParaRPr>
-                    </a:p>
-                  </a:txBody>
-                  <a:tcPr>
-                    <a:lnL w="12700" cap="flat" cmpd="sng" algn="ctr">
-                      <a:solidFill>
-                        <a:srgbClr val="BDD7EE"/>
-                      </a:solidFill>
-                      <a:prstDash val="solid"/>
-                      <a:round/>
-                      <a:headEnd type="none" w="med" len="med"/>
-                      <a:tailEnd type="none" w="med" len="med"/>
-                    </a:lnL>
-                    <a:lnR w="12700" cap="flat" cmpd="sng" algn="ctr">
-                      <a:solidFill>
-                        <a:srgbClr val="BDD7EE"/>
-                      </a:solidFill>
-                      <a:prstDash val="solid"/>
-                      <a:round/>
-                      <a:headEnd type="none" w="med" len="med"/>
-                      <a:tailEnd type="none" w="med" len="med"/>
-                    </a:lnR>
-                    <a:lnT w="12700" cap="flat" cmpd="sng" algn="ctr">
-                      <a:solidFill>
-                        <a:srgbClr val="BDD7EE"/>
-                      </a:solidFill>
-                      <a:prstDash val="solid"/>
-                      <a:round/>
-                      <a:headEnd type="none" w="med" len="med"/>
-                      <a:tailEnd type="none" w="med" len="med"/>
-                    </a:lnT>
-                    <a:lnB w="12700" cap="flat" cmpd="sng" algn="ctr">
-                      <a:solidFill>
-                        <a:srgbClr val="BDD7EE"/>
-                      </a:solidFill>
-                      <a:prstDash val="solid"/>
-                      <a:round/>
-                      <a:headEnd type="none" w="med" len="med"/>
-                      <a:tailEnd type="none" w="med" len="med"/>
-                    </a:lnB>
-                    <a:solidFill>
-                      <a:srgbClr val="FFFFFF"/>
-                    </a:solidFill>
-                  </a:tcPr>
-                </a:tc>
-                <a:tc>
-                  <a:txBody>
-                    <a:bodyPr/>
-                    <a:lstStyle/>
-                    <a:p>
-                      <a:pPr marL="0" indent="0" algn="ctr">
-                        <a:buNone/>
-                      </a:pPr>
-                      <a:r>
-                        <a:rPr lang="en-US" sz="1300" dirty="0">
-                          <a:solidFill>
-                            <a:srgbClr val="000000"/>
-                          </a:solidFill>
-                          <a:latin typeface="Calibri" pitchFamily="34" charset="0"/>
-                          <a:ea typeface="Calibri" pitchFamily="34" charset="-122"/>
-                          <a:cs typeface="Calibri" pitchFamily="34" charset="-120"/>
-                        </a:rPr>
-                        <a:t>1 / 2</a:t>
-                      </a:r>
-                      <a:endParaRPr lang="en-US" sz="1300" dirty="0">
-                        <a:latin typeface="Calibri" charset="0"/>
-                        <a:ea typeface="Calibri" charset="0"/>
-                        <a:cs typeface="Calibri" charset="0"/>
-                      </a:endParaRPr>
-                    </a:p>
-                  </a:txBody>
-                  <a:tcPr>
-                    <a:lnL w="12700" cap="flat" cmpd="sng" algn="ctr">
-                      <a:solidFill>
-                        <a:srgbClr val="BDD7EE"/>
-                      </a:solidFill>
-                      <a:prstDash val="solid"/>
-                      <a:round/>
-                      <a:headEnd type="none" w="med" len="med"/>
-                      <a:tailEnd type="none" w="med" len="med"/>
-                    </a:lnL>
-                    <a:lnR w="12700" cap="flat" cmpd="sng" algn="ctr">
-                      <a:solidFill>
-                        <a:srgbClr val="BDD7EE"/>
-                      </a:solidFill>
-                      <a:prstDash val="solid"/>
-                      <a:round/>
-                      <a:headEnd type="none" w="med" len="med"/>
-                      <a:tailEnd type="none" w="med" len="med"/>
-                    </a:lnR>
-                    <a:lnT w="12700" cap="flat" cmpd="sng" algn="ctr">
-                      <a:solidFill>
-                        <a:srgbClr val="BDD7EE"/>
-                      </a:solidFill>
-                      <a:prstDash val="solid"/>
-                      <a:round/>
-                      <a:headEnd type="none" w="med" len="med"/>
-                      <a:tailEnd type="none" w="med" len="med"/>
-                    </a:lnT>
-                    <a:lnB w="12700" cap="flat" cmpd="sng" algn="ctr">
-                      <a:solidFill>
-                        <a:srgbClr val="BDD7EE"/>
-                      </a:solidFill>
-                      <a:prstDash val="solid"/>
-                      <a:round/>
-                      <a:headEnd type="none" w="med" len="med"/>
-                      <a:tailEnd type="none" w="med" len="med"/>
-                    </a:lnB>
-                    <a:solidFill>
-                      <a:srgbClr val="FFFFFF"/>
-                    </a:solidFill>
-                  </a:tcPr>
-                </a:tc>
-                <a:extLst>
-                  <a:ext uri="{0D108BD9-81ED-4DB2-BD59-A6C34878D82A}">
-                    <a16:rowId xmlns:a16="http://schemas.microsoft.com/office/drawing/2014/main" val="10004"/>
-                  </a:ext>
-                </a:extLst>
-              </a:tr>
-            </a:tbl>
-          </a:graphicData>
-        </a:graphic>
-      </p:graphicFrame>
-      <p:sp>
-        <p:nvSpPr>
-          <p:cNvPr id="9" name="Text 6"/>
-          <p:cNvSpPr/>
-          <p:nvPr/>
-        </p:nvSpPr>
-        <p:spPr>
-          <a:xfrm>
-            <a:off x="4663440" y="1645920"/>
-            <a:ext cx="4206240" cy="347472"/>
-          </a:xfrm>
-          <a:prstGeom prst="rect">
-            <a:avLst/>
-          </a:prstGeom>
-          <a:noFill/>
-          <a:ln/>
-        </p:spPr>
-        <p:txBody>
-          <a:bodyPr wrap="square" lIns="0" tIns="0" rIns="0" bIns="0" rtlCol="0" anchor="ctr"/>
-          <a:lstStyle/>
-          <a:p>
-            <a:pPr marL="0" indent="0">
-              <a:buNone/>
-            </a:pPr>
-            <a:r>
-              <a:rPr lang="en-US" sz="1400" b="1" dirty="0">
-                <a:solidFill>
-                  <a:srgbClr val="1F497D"/>
-                </a:solidFill>
-                <a:latin typeface="Ubuntu" panose="020B0504030602030204" pitchFamily="34" charset="0"/>
-                <a:ea typeface="Calibri" pitchFamily="34" charset="-122"/>
-                <a:cs typeface="Calibri" pitchFamily="34" charset="-120"/>
-              </a:rPr>
-              <a:t>Best Parameters Found</a:t>
-            </a:r>
-            <a:endParaRPr lang="en-US" sz="1400" dirty="0">
-              <a:latin typeface="Ubuntu" panose="020B0504030602030204" pitchFamily="34" charset="0"/>
-            </a:endParaRPr>
-          </a:p>
-        </p:txBody>
-      </p:sp>
-      <p:graphicFrame>
-        <p:nvGraphicFramePr>
-          <p:cNvPr id="23" name="Table 1"/>
-          <p:cNvGraphicFramePr>
-            <a:graphicFrameLocks noGrp="1"/>
-          </p:cNvGraphicFramePr>
-          <p:nvPr>
-            <p:extLst>
-              <p:ext uri="{D42A27DB-BD31-4B8C-83A1-F6EECF244321}">
-                <p14:modId xmlns:p14="http://schemas.microsoft.com/office/powerpoint/2010/main" val="1579011935"/>
-              </p:ext>
-            </p:extLst>
-          </p:nvPr>
-        </p:nvGraphicFramePr>
-        <p:xfrm>
-          <a:off x="4663440" y="2029968"/>
-          <a:ext cx="4206240" cy="2103120"/>
-        </p:xfrm>
-        <a:graphic>
-          <a:graphicData uri="http://schemas.openxmlformats.org/drawingml/2006/table">
-            <a:tbl>
-              <a:tblPr/>
-              <a:tblGrid>
-                <a:gridCol w="2377440">
-                  <a:extLst>
-                    <a:ext uri="{9D8B030D-6E8A-4147-A177-3AD203B41FA5}">
-                      <a16:colId xmlns:a16="http://schemas.microsoft.com/office/drawing/2014/main" val="20000"/>
-                    </a:ext>
-                  </a:extLst>
-                </a:gridCol>
-                <a:gridCol w="1828800">
-                  <a:extLst>
-                    <a:ext uri="{9D8B030D-6E8A-4147-A177-3AD203B41FA5}">
-                      <a16:colId xmlns:a16="http://schemas.microsoft.com/office/drawing/2014/main" val="20001"/>
-                    </a:ext>
-                  </a:extLst>
-                </a:gridCol>
-              </a:tblGrid>
-              <a:tr h="350520">
-                <a:tc>
-                  <a:txBody>
-                    <a:bodyPr/>
-                    <a:lstStyle/>
-                    <a:p>
-                      <a:pPr marL="0" indent="0" algn="ctr">
-                        <a:buNone/>
-                      </a:pPr>
-                      <a:r>
-                        <a:rPr lang="en-US" sz="1300" b="1" dirty="0">
-                          <a:solidFill>
-                            <a:srgbClr val="FFFFFF"/>
-                          </a:solidFill>
-                          <a:latin typeface="Calibri" pitchFamily="34" charset="0"/>
-                          <a:ea typeface="Calibri" pitchFamily="34" charset="-122"/>
-                          <a:cs typeface="Calibri" pitchFamily="34" charset="-120"/>
-                        </a:rPr>
-                        <a:t>Parameter</a:t>
-                      </a:r>
-                      <a:endParaRPr lang="en-US" sz="1300" dirty="0">
-                        <a:latin typeface="Calibri" charset="0"/>
-                        <a:ea typeface="Calibri" charset="0"/>
-                        <a:cs typeface="Calibri" charset="0"/>
-                      </a:endParaRPr>
-                    </a:p>
-                  </a:txBody>
-                  <a:tcPr>
-                    <a:lnL w="12700" cap="flat" cmpd="sng" algn="ctr">
-                      <a:solidFill>
-                        <a:srgbClr val="E2EFDA"/>
-                      </a:solidFill>
-                      <a:prstDash val="solid"/>
-                      <a:round/>
-                      <a:headEnd type="none" w="med" len="med"/>
-                      <a:tailEnd type="none" w="med" len="med"/>
-                    </a:lnL>
-                    <a:lnR w="12700" cap="flat" cmpd="sng" algn="ctr">
-                      <a:solidFill>
-                        <a:srgbClr val="E2EFDA"/>
-                      </a:solidFill>
-                      <a:prstDash val="solid"/>
-                      <a:round/>
-                      <a:headEnd type="none" w="med" len="med"/>
-                      <a:tailEnd type="none" w="med" len="med"/>
-                    </a:lnR>
-                    <a:lnT w="12700" cap="flat" cmpd="sng" algn="ctr">
-                      <a:solidFill>
-                        <a:srgbClr val="E2EFDA"/>
-                      </a:solidFill>
-                      <a:prstDash val="solid"/>
-                      <a:round/>
-                      <a:headEnd type="none" w="med" len="med"/>
-                      <a:tailEnd type="none" w="med" len="med"/>
-                    </a:lnT>
-                    <a:lnB w="12700" cap="flat" cmpd="sng" algn="ctr">
-                      <a:solidFill>
-                        <a:srgbClr val="E2EFDA"/>
-                      </a:solidFill>
-                      <a:prstDash val="solid"/>
-                      <a:round/>
-                      <a:headEnd type="none" w="med" len="med"/>
-                      <a:tailEnd type="none" w="med" len="med"/>
-                    </a:lnB>
-                    <a:solidFill>
-                      <a:srgbClr val="375623"/>
-                    </a:solidFill>
-                  </a:tcPr>
-                </a:tc>
-                <a:tc>
-                  <a:txBody>
-                    <a:bodyPr/>
-                    <a:lstStyle/>
-                    <a:p>
-                      <a:pPr marL="0" indent="0" algn="ctr">
-                        <a:buNone/>
-                      </a:pPr>
-                      <a:r>
-                        <a:rPr lang="en-US" sz="1300" b="1" dirty="0">
-                          <a:solidFill>
-                            <a:srgbClr val="FFFFFF"/>
-                          </a:solidFill>
-                          <a:latin typeface="Calibri" pitchFamily="34" charset="0"/>
-                          <a:ea typeface="Calibri" pitchFamily="34" charset="-122"/>
-                          <a:cs typeface="Calibri" pitchFamily="34" charset="-120"/>
-                        </a:rPr>
-                        <a:t>Optimal Value</a:t>
-                      </a:r>
-                      <a:endParaRPr lang="en-US" sz="1300" dirty="0">
-                        <a:latin typeface="Calibri" charset="0"/>
-                        <a:ea typeface="Calibri" charset="0"/>
-                        <a:cs typeface="Calibri" charset="0"/>
-                      </a:endParaRPr>
-                    </a:p>
-                  </a:txBody>
-                  <a:tcPr>
-                    <a:lnL w="12700" cap="flat" cmpd="sng" algn="ctr">
-                      <a:solidFill>
-                        <a:srgbClr val="E2EFDA"/>
-                      </a:solidFill>
-                      <a:prstDash val="solid"/>
-                      <a:round/>
-                      <a:headEnd type="none" w="med" len="med"/>
-                      <a:tailEnd type="none" w="med" len="med"/>
-                    </a:lnL>
-                    <a:lnR w="12700" cap="flat" cmpd="sng" algn="ctr">
-                      <a:solidFill>
-                        <a:srgbClr val="E2EFDA"/>
-                      </a:solidFill>
-                      <a:prstDash val="solid"/>
-                      <a:round/>
-                      <a:headEnd type="none" w="med" len="med"/>
-                      <a:tailEnd type="none" w="med" len="med"/>
-                    </a:lnR>
-                    <a:lnT w="12700" cap="flat" cmpd="sng" algn="ctr">
-                      <a:solidFill>
-                        <a:srgbClr val="E2EFDA"/>
-                      </a:solidFill>
-                      <a:prstDash val="solid"/>
-                      <a:round/>
-                      <a:headEnd type="none" w="med" len="med"/>
-                      <a:tailEnd type="none" w="med" len="med"/>
-                    </a:lnT>
-                    <a:lnB w="12700" cap="flat" cmpd="sng" algn="ctr">
-                      <a:solidFill>
-                        <a:srgbClr val="E2EFDA"/>
-                      </a:solidFill>
-                      <a:prstDash val="solid"/>
-                      <a:round/>
-                      <a:headEnd type="none" w="med" len="med"/>
-                      <a:tailEnd type="none" w="med" len="med"/>
-                    </a:lnB>
-                    <a:solidFill>
-                      <a:srgbClr val="375623"/>
-                    </a:solidFill>
-                  </a:tcPr>
-                </a:tc>
-                <a:extLst>
-                  <a:ext uri="{0D108BD9-81ED-4DB2-BD59-A6C34878D82A}">
-                    <a16:rowId xmlns:a16="http://schemas.microsoft.com/office/drawing/2014/main" val="10000"/>
-                  </a:ext>
-                </a:extLst>
-              </a:tr>
-              <a:tr h="350520">
-                <a:tc>
-                  <a:txBody>
-                    <a:bodyPr/>
-                    <a:lstStyle/>
-                    <a:p>
-                      <a:pPr marL="0" indent="0" algn="ctr">
-                        <a:buNone/>
-                      </a:pPr>
-                      <a:r>
-                        <a:rPr lang="en-US" sz="1300" dirty="0">
-                          <a:solidFill>
-                            <a:srgbClr val="000000"/>
-                          </a:solidFill>
-                          <a:latin typeface="Calibri" pitchFamily="34" charset="0"/>
-                          <a:ea typeface="Calibri" pitchFamily="34" charset="-122"/>
-                          <a:cs typeface="Calibri" pitchFamily="34" charset="-120"/>
-                        </a:rPr>
-                        <a:t>n_estimators</a:t>
-                      </a:r>
-                      <a:endParaRPr lang="en-US" sz="1300" dirty="0">
-                        <a:latin typeface="Calibri" charset="0"/>
-                        <a:ea typeface="Calibri" charset="0"/>
-                        <a:cs typeface="Calibri" charset="0"/>
-                      </a:endParaRPr>
-                    </a:p>
-                  </a:txBody>
-                  <a:tcPr>
-                    <a:lnL w="12700" cap="flat" cmpd="sng" algn="ctr">
-                      <a:solidFill>
-                        <a:srgbClr val="E2EFDA"/>
-                      </a:solidFill>
-                      <a:prstDash val="solid"/>
-                      <a:round/>
-                      <a:headEnd type="none" w="med" len="med"/>
-                      <a:tailEnd type="none" w="med" len="med"/>
-                    </a:lnL>
-                    <a:lnR w="12700" cap="flat" cmpd="sng" algn="ctr">
-                      <a:solidFill>
-                        <a:srgbClr val="E2EFDA"/>
-                      </a:solidFill>
-                      <a:prstDash val="solid"/>
-                      <a:round/>
-                      <a:headEnd type="none" w="med" len="med"/>
-                      <a:tailEnd type="none" w="med" len="med"/>
-                    </a:lnR>
-                    <a:lnT w="12700" cap="flat" cmpd="sng" algn="ctr">
-                      <a:solidFill>
-                        <a:srgbClr val="E2EFDA"/>
-                      </a:solidFill>
-                      <a:prstDash val="solid"/>
-                      <a:round/>
-                      <a:headEnd type="none" w="med" len="med"/>
-                      <a:tailEnd type="none" w="med" len="med"/>
-                    </a:lnT>
-                    <a:lnB w="12700" cap="flat" cmpd="sng" algn="ctr">
-                      <a:solidFill>
-                        <a:srgbClr val="E2EFDA"/>
-                      </a:solidFill>
-                      <a:prstDash val="solid"/>
-                      <a:round/>
-                      <a:headEnd type="none" w="med" len="med"/>
-                      <a:tailEnd type="none" w="med" len="med"/>
-                    </a:lnB>
-                    <a:solidFill>
-                      <a:srgbClr val="FFFFFF"/>
-                    </a:solidFill>
-                  </a:tcPr>
-                </a:tc>
-                <a:tc>
-                  <a:txBody>
-                    <a:bodyPr/>
-                    <a:lstStyle/>
-                    <a:p>
-                      <a:pPr marL="0" indent="0" algn="ctr">
-                        <a:buNone/>
-                      </a:pPr>
-                      <a:r>
-                        <a:rPr lang="en-US" sz="1300" dirty="0">
-                          <a:solidFill>
-                            <a:srgbClr val="000000"/>
-                          </a:solidFill>
-                          <a:latin typeface="Calibri" pitchFamily="34" charset="0"/>
-                          <a:ea typeface="Calibri" pitchFamily="34" charset="-122"/>
-                          <a:cs typeface="Calibri" pitchFamily="34" charset="-120"/>
-                        </a:rPr>
-                        <a:t>200</a:t>
-                      </a:r>
-                      <a:endParaRPr lang="en-US" sz="1300" dirty="0">
-                        <a:latin typeface="Calibri" charset="0"/>
-                        <a:ea typeface="Calibri" charset="0"/>
-                        <a:cs typeface="Calibri" charset="0"/>
-                      </a:endParaRPr>
-                    </a:p>
-                  </a:txBody>
-                  <a:tcPr>
-                    <a:lnL w="12700" cap="flat" cmpd="sng" algn="ctr">
-                      <a:solidFill>
-                        <a:srgbClr val="E2EFDA"/>
-                      </a:solidFill>
-                      <a:prstDash val="solid"/>
-                      <a:round/>
-                      <a:headEnd type="none" w="med" len="med"/>
-                      <a:tailEnd type="none" w="med" len="med"/>
-                    </a:lnL>
-                    <a:lnR w="12700" cap="flat" cmpd="sng" algn="ctr">
-                      <a:solidFill>
-                        <a:srgbClr val="E2EFDA"/>
-                      </a:solidFill>
-                      <a:prstDash val="solid"/>
-                      <a:round/>
-                      <a:headEnd type="none" w="med" len="med"/>
-                      <a:tailEnd type="none" w="med" len="med"/>
-                    </a:lnR>
-                    <a:lnT w="12700" cap="flat" cmpd="sng" algn="ctr">
-                      <a:solidFill>
-                        <a:srgbClr val="E2EFDA"/>
-                      </a:solidFill>
-                      <a:prstDash val="solid"/>
-                      <a:round/>
-                      <a:headEnd type="none" w="med" len="med"/>
-                      <a:tailEnd type="none" w="med" len="med"/>
-                    </a:lnT>
-                    <a:lnB w="12700" cap="flat" cmpd="sng" algn="ctr">
-                      <a:solidFill>
-                        <a:srgbClr val="E2EFDA"/>
-                      </a:solidFill>
-                      <a:prstDash val="solid"/>
-                      <a:round/>
-                      <a:headEnd type="none" w="med" len="med"/>
-                      <a:tailEnd type="none" w="med" len="med"/>
-                    </a:lnB>
-                    <a:solidFill>
-                      <a:srgbClr val="FFFFFF"/>
-                    </a:solidFill>
-                  </a:tcPr>
-                </a:tc>
-                <a:extLst>
-                  <a:ext uri="{0D108BD9-81ED-4DB2-BD59-A6C34878D82A}">
-                    <a16:rowId xmlns:a16="http://schemas.microsoft.com/office/drawing/2014/main" val="10001"/>
-                  </a:ext>
-                </a:extLst>
-              </a:tr>
-              <a:tr h="350520">
-                <a:tc>
-                  <a:txBody>
-                    <a:bodyPr/>
-                    <a:lstStyle/>
-                    <a:p>
-                      <a:pPr marL="0" indent="0" algn="ctr">
-                        <a:buNone/>
-                      </a:pPr>
-                      <a:r>
-                        <a:rPr lang="en-US" sz="1300" dirty="0">
-                          <a:solidFill>
-                            <a:srgbClr val="000000"/>
-                          </a:solidFill>
-                          <a:latin typeface="Calibri" pitchFamily="34" charset="0"/>
-                          <a:ea typeface="Calibri" pitchFamily="34" charset="-122"/>
-                          <a:cs typeface="Calibri" pitchFamily="34" charset="-120"/>
-                        </a:rPr>
-                        <a:t>max_depth</a:t>
-                      </a:r>
-                      <a:endParaRPr lang="en-US" sz="1300" dirty="0">
-                        <a:latin typeface="Calibri" charset="0"/>
-                        <a:ea typeface="Calibri" charset="0"/>
-                        <a:cs typeface="Calibri" charset="0"/>
-                      </a:endParaRPr>
-                    </a:p>
-                  </a:txBody>
-                  <a:tcPr>
-                    <a:lnL w="12700" cap="flat" cmpd="sng" algn="ctr">
-                      <a:solidFill>
-                        <a:srgbClr val="E2EFDA"/>
-                      </a:solidFill>
-                      <a:prstDash val="solid"/>
-                      <a:round/>
-                      <a:headEnd type="none" w="med" len="med"/>
-                      <a:tailEnd type="none" w="med" len="med"/>
-                    </a:lnL>
-                    <a:lnR w="12700" cap="flat" cmpd="sng" algn="ctr">
-                      <a:solidFill>
-                        <a:srgbClr val="E2EFDA"/>
-                      </a:solidFill>
-                      <a:prstDash val="solid"/>
-                      <a:round/>
-                      <a:headEnd type="none" w="med" len="med"/>
-                      <a:tailEnd type="none" w="med" len="med"/>
-                    </a:lnR>
-                    <a:lnT w="12700" cap="flat" cmpd="sng" algn="ctr">
-                      <a:solidFill>
-                        <a:srgbClr val="E2EFDA"/>
-                      </a:solidFill>
-                      <a:prstDash val="solid"/>
-                      <a:round/>
-                      <a:headEnd type="none" w="med" len="med"/>
-                      <a:tailEnd type="none" w="med" len="med"/>
-                    </a:lnT>
-                    <a:lnB w="12700" cap="flat" cmpd="sng" algn="ctr">
-                      <a:solidFill>
-                        <a:srgbClr val="E2EFDA"/>
-                      </a:solidFill>
-                      <a:prstDash val="solid"/>
-                      <a:round/>
-                      <a:headEnd type="none" w="med" len="med"/>
-                      <a:tailEnd type="none" w="med" len="med"/>
-                    </a:lnB>
-                    <a:solidFill>
-                      <a:srgbClr val="FFFFFF"/>
-                    </a:solidFill>
-                  </a:tcPr>
-                </a:tc>
-                <a:tc>
-                  <a:txBody>
-                    <a:bodyPr/>
-                    <a:lstStyle/>
-                    <a:p>
-                      <a:pPr marL="0" indent="0" algn="ctr">
-                        <a:buNone/>
-                      </a:pPr>
-                      <a:r>
-                        <a:rPr lang="en-US" sz="1300" dirty="0">
-                          <a:solidFill>
-                            <a:srgbClr val="000000"/>
-                          </a:solidFill>
-                          <a:latin typeface="Calibri" pitchFamily="34" charset="0"/>
-                          <a:ea typeface="Calibri" pitchFamily="34" charset="-122"/>
-                          <a:cs typeface="Calibri" pitchFamily="34" charset="-120"/>
-                        </a:rPr>
-                        <a:t>None</a:t>
-                      </a:r>
-                      <a:endParaRPr lang="en-US" sz="1300" dirty="0">
-                        <a:latin typeface="Calibri" charset="0"/>
-                        <a:ea typeface="Calibri" charset="0"/>
-                        <a:cs typeface="Calibri" charset="0"/>
-                      </a:endParaRPr>
-                    </a:p>
-                  </a:txBody>
-                  <a:tcPr>
-                    <a:lnL w="12700" cap="flat" cmpd="sng" algn="ctr">
-                      <a:solidFill>
-                        <a:srgbClr val="E2EFDA"/>
-                      </a:solidFill>
-                      <a:prstDash val="solid"/>
-                      <a:round/>
-                      <a:headEnd type="none" w="med" len="med"/>
-                      <a:tailEnd type="none" w="med" len="med"/>
-                    </a:lnL>
-                    <a:lnR w="12700" cap="flat" cmpd="sng" algn="ctr">
-                      <a:solidFill>
-                        <a:srgbClr val="E2EFDA"/>
-                      </a:solidFill>
-                      <a:prstDash val="solid"/>
-                      <a:round/>
-                      <a:headEnd type="none" w="med" len="med"/>
-                      <a:tailEnd type="none" w="med" len="med"/>
-                    </a:lnR>
-                    <a:lnT w="12700" cap="flat" cmpd="sng" algn="ctr">
-                      <a:solidFill>
-                        <a:srgbClr val="E2EFDA"/>
-                      </a:solidFill>
-                      <a:prstDash val="solid"/>
-                      <a:round/>
-                      <a:headEnd type="none" w="med" len="med"/>
-                      <a:tailEnd type="none" w="med" len="med"/>
-                    </a:lnT>
-                    <a:lnB w="12700" cap="flat" cmpd="sng" algn="ctr">
-                      <a:solidFill>
-                        <a:srgbClr val="E2EFDA"/>
-                      </a:solidFill>
-                      <a:prstDash val="solid"/>
-                      <a:round/>
-                      <a:headEnd type="none" w="med" len="med"/>
-                      <a:tailEnd type="none" w="med" len="med"/>
-                    </a:lnB>
-                    <a:solidFill>
-                      <a:srgbClr val="FFFFFF"/>
-                    </a:solidFill>
-                  </a:tcPr>
-                </a:tc>
-                <a:extLst>
-                  <a:ext uri="{0D108BD9-81ED-4DB2-BD59-A6C34878D82A}">
-                    <a16:rowId xmlns:a16="http://schemas.microsoft.com/office/drawing/2014/main" val="10002"/>
-                  </a:ext>
-                </a:extLst>
-              </a:tr>
-              <a:tr h="350520">
-                <a:tc>
-                  <a:txBody>
-                    <a:bodyPr/>
-                    <a:lstStyle/>
-                    <a:p>
-                      <a:pPr marL="0" indent="0" algn="ctr">
-                        <a:buNone/>
-                      </a:pPr>
-                      <a:r>
-                        <a:rPr lang="en-US" sz="1300" dirty="0">
-                          <a:solidFill>
-                            <a:srgbClr val="000000"/>
-                          </a:solidFill>
-                          <a:latin typeface="Calibri" pitchFamily="34" charset="0"/>
-                          <a:ea typeface="Calibri" pitchFamily="34" charset="-122"/>
-                          <a:cs typeface="Calibri" pitchFamily="34" charset="-120"/>
-                        </a:rPr>
-                        <a:t>min_samples_split</a:t>
-                      </a:r>
-                      <a:endParaRPr lang="en-US" sz="1300" dirty="0">
-                        <a:latin typeface="Calibri" charset="0"/>
-                        <a:ea typeface="Calibri" charset="0"/>
-                        <a:cs typeface="Calibri" charset="0"/>
-                      </a:endParaRPr>
-                    </a:p>
-                  </a:txBody>
-                  <a:tcPr>
-                    <a:lnL w="12700" cap="flat" cmpd="sng" algn="ctr">
-                      <a:solidFill>
-                        <a:srgbClr val="E2EFDA"/>
-                      </a:solidFill>
-                      <a:prstDash val="solid"/>
-                      <a:round/>
-                      <a:headEnd type="none" w="med" len="med"/>
-                      <a:tailEnd type="none" w="med" len="med"/>
-                    </a:lnL>
-                    <a:lnR w="12700" cap="flat" cmpd="sng" algn="ctr">
-                      <a:solidFill>
-                        <a:srgbClr val="E2EFDA"/>
-                      </a:solidFill>
-                      <a:prstDash val="solid"/>
-                      <a:round/>
-                      <a:headEnd type="none" w="med" len="med"/>
-                      <a:tailEnd type="none" w="med" len="med"/>
-                    </a:lnR>
-                    <a:lnT w="12700" cap="flat" cmpd="sng" algn="ctr">
-                      <a:solidFill>
-                        <a:srgbClr val="E2EFDA"/>
-                      </a:solidFill>
-                      <a:prstDash val="solid"/>
-                      <a:round/>
-                      <a:headEnd type="none" w="med" len="med"/>
-                      <a:tailEnd type="none" w="med" len="med"/>
-                    </a:lnT>
-                    <a:lnB w="12700" cap="flat" cmpd="sng" algn="ctr">
-                      <a:solidFill>
-                        <a:srgbClr val="E2EFDA"/>
-                      </a:solidFill>
-                      <a:prstDash val="solid"/>
-                      <a:round/>
-                      <a:headEnd type="none" w="med" len="med"/>
-                      <a:tailEnd type="none" w="med" len="med"/>
-                    </a:lnB>
-                    <a:solidFill>
-                      <a:srgbClr val="FFFFFF"/>
-                    </a:solidFill>
-                  </a:tcPr>
-                </a:tc>
-                <a:tc>
-                  <a:txBody>
-                    <a:bodyPr/>
-                    <a:lstStyle/>
-                    <a:p>
-                      <a:pPr marL="0" indent="0" algn="ctr">
-                        <a:buNone/>
-                      </a:pPr>
-                      <a:r>
-                        <a:rPr lang="en-US" sz="1300" dirty="0">
-                          <a:solidFill>
-                            <a:srgbClr val="000000"/>
-                          </a:solidFill>
-                          <a:latin typeface="Calibri" pitchFamily="34" charset="0"/>
-                          <a:ea typeface="Calibri" pitchFamily="34" charset="-122"/>
-                          <a:cs typeface="Calibri" pitchFamily="34" charset="-120"/>
-                        </a:rPr>
-                        <a:t>2</a:t>
-                      </a:r>
-                      <a:endParaRPr lang="en-US" sz="1300" dirty="0">
-                        <a:latin typeface="Calibri" charset="0"/>
-                        <a:ea typeface="Calibri" charset="0"/>
-                        <a:cs typeface="Calibri" charset="0"/>
-                      </a:endParaRPr>
-                    </a:p>
-                  </a:txBody>
-                  <a:tcPr>
-                    <a:lnL w="12700" cap="flat" cmpd="sng" algn="ctr">
-                      <a:solidFill>
-                        <a:srgbClr val="E2EFDA"/>
-                      </a:solidFill>
-                      <a:prstDash val="solid"/>
-                      <a:round/>
-                      <a:headEnd type="none" w="med" len="med"/>
-                      <a:tailEnd type="none" w="med" len="med"/>
-                    </a:lnL>
-                    <a:lnR w="12700" cap="flat" cmpd="sng" algn="ctr">
-                      <a:solidFill>
-                        <a:srgbClr val="E2EFDA"/>
-                      </a:solidFill>
-                      <a:prstDash val="solid"/>
-                      <a:round/>
-                      <a:headEnd type="none" w="med" len="med"/>
-                      <a:tailEnd type="none" w="med" len="med"/>
-                    </a:lnR>
-                    <a:lnT w="12700" cap="flat" cmpd="sng" algn="ctr">
-                      <a:solidFill>
-                        <a:srgbClr val="E2EFDA"/>
-                      </a:solidFill>
-                      <a:prstDash val="solid"/>
-                      <a:round/>
-                      <a:headEnd type="none" w="med" len="med"/>
-                      <a:tailEnd type="none" w="med" len="med"/>
-                    </a:lnT>
-                    <a:lnB w="12700" cap="flat" cmpd="sng" algn="ctr">
-                      <a:solidFill>
-                        <a:srgbClr val="E2EFDA"/>
-                      </a:solidFill>
-                      <a:prstDash val="solid"/>
-                      <a:round/>
-                      <a:headEnd type="none" w="med" len="med"/>
-                      <a:tailEnd type="none" w="med" len="med"/>
-                    </a:lnB>
-                    <a:solidFill>
-                      <a:srgbClr val="FFFFFF"/>
-                    </a:solidFill>
-                  </a:tcPr>
-                </a:tc>
-                <a:extLst>
-                  <a:ext uri="{0D108BD9-81ED-4DB2-BD59-A6C34878D82A}">
-                    <a16:rowId xmlns:a16="http://schemas.microsoft.com/office/drawing/2014/main" val="10003"/>
-                  </a:ext>
-                </a:extLst>
-              </a:tr>
-              <a:tr h="350520">
-                <a:tc>
-                  <a:txBody>
-                    <a:bodyPr/>
-                    <a:lstStyle/>
-                    <a:p>
-                      <a:pPr marL="0" indent="0" algn="ctr">
-                        <a:buNone/>
-                      </a:pPr>
-                      <a:r>
-                        <a:rPr lang="en-US" sz="1300" dirty="0">
-                          <a:solidFill>
-                            <a:srgbClr val="000000"/>
-                          </a:solidFill>
-                          <a:latin typeface="Calibri" pitchFamily="34" charset="0"/>
-                          <a:ea typeface="Calibri" pitchFamily="34" charset="-122"/>
-                          <a:cs typeface="Calibri" pitchFamily="34" charset="-120"/>
-                        </a:rPr>
-                        <a:t>min_samples_leaf</a:t>
-                      </a:r>
-                      <a:endParaRPr lang="en-US" sz="1300" dirty="0">
-                        <a:latin typeface="Calibri" charset="0"/>
-                        <a:ea typeface="Calibri" charset="0"/>
-                        <a:cs typeface="Calibri" charset="0"/>
-                      </a:endParaRPr>
-                    </a:p>
-                  </a:txBody>
-                  <a:tcPr>
-                    <a:lnL w="12700" cap="flat" cmpd="sng" algn="ctr">
-                      <a:solidFill>
-                        <a:srgbClr val="E2EFDA"/>
-                      </a:solidFill>
-                      <a:prstDash val="solid"/>
-                      <a:round/>
-                      <a:headEnd type="none" w="med" len="med"/>
-                      <a:tailEnd type="none" w="med" len="med"/>
-                    </a:lnL>
-                    <a:lnR w="12700" cap="flat" cmpd="sng" algn="ctr">
-                      <a:solidFill>
-                        <a:srgbClr val="E2EFDA"/>
-                      </a:solidFill>
-                      <a:prstDash val="solid"/>
-                      <a:round/>
-                      <a:headEnd type="none" w="med" len="med"/>
-                      <a:tailEnd type="none" w="med" len="med"/>
-                    </a:lnR>
-                    <a:lnT w="12700" cap="flat" cmpd="sng" algn="ctr">
-                      <a:solidFill>
-                        <a:srgbClr val="E2EFDA"/>
-                      </a:solidFill>
-                      <a:prstDash val="solid"/>
-                      <a:round/>
-                      <a:headEnd type="none" w="med" len="med"/>
-                      <a:tailEnd type="none" w="med" len="med"/>
-                    </a:lnT>
-                    <a:lnB w="12700" cap="flat" cmpd="sng" algn="ctr">
-                      <a:solidFill>
-                        <a:srgbClr val="E2EFDA"/>
-                      </a:solidFill>
-                      <a:prstDash val="solid"/>
-                      <a:round/>
-                      <a:headEnd type="none" w="med" len="med"/>
-                      <a:tailEnd type="none" w="med" len="med"/>
-                    </a:lnB>
-                    <a:solidFill>
-                      <a:srgbClr val="FFFFFF"/>
-                    </a:solidFill>
-                  </a:tcPr>
-                </a:tc>
-                <a:tc>
-                  <a:txBody>
-                    <a:bodyPr/>
-                    <a:lstStyle/>
-                    <a:p>
-                      <a:pPr marL="0" indent="0" algn="ctr">
-                        <a:buNone/>
-                      </a:pPr>
-                      <a:r>
-                        <a:rPr lang="en-US" sz="1300" dirty="0">
-                          <a:solidFill>
-                            <a:srgbClr val="000000"/>
-                          </a:solidFill>
-                          <a:latin typeface="Calibri" pitchFamily="34" charset="0"/>
-                          <a:ea typeface="Calibri" pitchFamily="34" charset="-122"/>
-                          <a:cs typeface="Calibri" pitchFamily="34" charset="-120"/>
-                        </a:rPr>
-                        <a:t>1</a:t>
-                      </a:r>
-                      <a:endParaRPr lang="en-US" sz="1300" dirty="0">
-                        <a:latin typeface="Calibri" charset="0"/>
-                        <a:ea typeface="Calibri" charset="0"/>
-                        <a:cs typeface="Calibri" charset="0"/>
-                      </a:endParaRPr>
-                    </a:p>
-                  </a:txBody>
-                  <a:tcPr>
-                    <a:lnL w="12700" cap="flat" cmpd="sng" algn="ctr">
-                      <a:solidFill>
-                        <a:srgbClr val="E2EFDA"/>
-                      </a:solidFill>
-                      <a:prstDash val="solid"/>
-                      <a:round/>
-                      <a:headEnd type="none" w="med" len="med"/>
-                      <a:tailEnd type="none" w="med" len="med"/>
-                    </a:lnL>
-                    <a:lnR w="12700" cap="flat" cmpd="sng" algn="ctr">
-                      <a:solidFill>
-                        <a:srgbClr val="E2EFDA"/>
-                      </a:solidFill>
-                      <a:prstDash val="solid"/>
-                      <a:round/>
-                      <a:headEnd type="none" w="med" len="med"/>
-                      <a:tailEnd type="none" w="med" len="med"/>
-                    </a:lnR>
-                    <a:lnT w="12700" cap="flat" cmpd="sng" algn="ctr">
-                      <a:solidFill>
-                        <a:srgbClr val="E2EFDA"/>
-                      </a:solidFill>
-                      <a:prstDash val="solid"/>
-                      <a:round/>
-                      <a:headEnd type="none" w="med" len="med"/>
-                      <a:tailEnd type="none" w="med" len="med"/>
-                    </a:lnT>
-                    <a:lnB w="12700" cap="flat" cmpd="sng" algn="ctr">
-                      <a:solidFill>
-                        <a:srgbClr val="E2EFDA"/>
-                      </a:solidFill>
-                      <a:prstDash val="solid"/>
-                      <a:round/>
-                      <a:headEnd type="none" w="med" len="med"/>
-                      <a:tailEnd type="none" w="med" len="med"/>
-                    </a:lnB>
-                    <a:solidFill>
-                      <a:srgbClr val="FFFFFF"/>
-                    </a:solidFill>
-                  </a:tcPr>
-                </a:tc>
-                <a:extLst>
-                  <a:ext uri="{0D108BD9-81ED-4DB2-BD59-A6C34878D82A}">
-                    <a16:rowId xmlns:a16="http://schemas.microsoft.com/office/drawing/2014/main" val="10004"/>
-                  </a:ext>
-                </a:extLst>
-              </a:tr>
-              <a:tr h="350520">
-                <a:tc>
-                  <a:txBody>
-                    <a:bodyPr/>
-                    <a:lstStyle/>
-                    <a:p>
-                      <a:pPr marL="0" indent="0" algn="ctr">
-                        <a:buNone/>
-                      </a:pPr>
-                      <a:r>
-                        <a:rPr lang="en-US" sz="1300" b="1" dirty="0">
-                          <a:solidFill>
-                            <a:srgbClr val="000000"/>
-                          </a:solidFill>
-                          <a:latin typeface="Calibri" pitchFamily="34" charset="0"/>
-                          <a:ea typeface="Calibri" pitchFamily="34" charset="-122"/>
-                          <a:cs typeface="Calibri" pitchFamily="34" charset="-120"/>
-                        </a:rPr>
-                        <a:t>Best AUC (CV)</a:t>
-                      </a:r>
-                      <a:endParaRPr lang="en-US" sz="1300" dirty="0">
-                        <a:latin typeface="Calibri" charset="0"/>
-                        <a:ea typeface="Calibri" charset="0"/>
-                        <a:cs typeface="Calibri" charset="0"/>
-                      </a:endParaRPr>
-                    </a:p>
-                  </a:txBody>
-                  <a:tcPr>
-                    <a:lnL w="12700" cap="flat" cmpd="sng" algn="ctr">
-                      <a:solidFill>
-                        <a:srgbClr val="E2EFDA"/>
-                      </a:solidFill>
-                      <a:prstDash val="solid"/>
-                      <a:round/>
-                      <a:headEnd type="none" w="med" len="med"/>
-                      <a:tailEnd type="none" w="med" len="med"/>
-                    </a:lnL>
-                    <a:lnR w="12700" cap="flat" cmpd="sng" algn="ctr">
-                      <a:solidFill>
-                        <a:srgbClr val="E2EFDA"/>
-                      </a:solidFill>
-                      <a:prstDash val="solid"/>
-                      <a:round/>
-                      <a:headEnd type="none" w="med" len="med"/>
-                      <a:tailEnd type="none" w="med" len="med"/>
-                    </a:lnR>
-                    <a:lnT w="12700" cap="flat" cmpd="sng" algn="ctr">
-                      <a:solidFill>
-                        <a:srgbClr val="E2EFDA"/>
-                      </a:solidFill>
-                      <a:prstDash val="solid"/>
-                      <a:round/>
-                      <a:headEnd type="none" w="med" len="med"/>
-                      <a:tailEnd type="none" w="med" len="med"/>
-                    </a:lnT>
-                    <a:lnB w="12700" cap="flat" cmpd="sng" algn="ctr">
-                      <a:solidFill>
-                        <a:srgbClr val="E2EFDA"/>
-                      </a:solidFill>
-                      <a:prstDash val="solid"/>
-                      <a:round/>
-                      <a:headEnd type="none" w="med" len="med"/>
-                      <a:tailEnd type="none" w="med" len="med"/>
-                    </a:lnB>
-                    <a:solidFill>
-                      <a:srgbClr val="FFFFFF"/>
-                    </a:solidFill>
-                  </a:tcPr>
-                </a:tc>
-                <a:tc>
-                  <a:txBody>
-                    <a:bodyPr/>
-                    <a:lstStyle/>
-                    <a:p>
-                      <a:pPr marL="0" indent="0" algn="ctr">
-                        <a:buNone/>
-                      </a:pPr>
-                      <a:r>
-                        <a:rPr lang="en-US" sz="1300" b="1" dirty="0">
-                          <a:solidFill>
-                            <a:srgbClr val="375623"/>
-                          </a:solidFill>
-                          <a:latin typeface="Calibri" pitchFamily="34" charset="0"/>
-                          <a:ea typeface="Calibri" pitchFamily="34" charset="-122"/>
-                          <a:cs typeface="Calibri" pitchFamily="34" charset="-120"/>
-                        </a:rPr>
-                        <a:t>0.9993</a:t>
-                      </a:r>
-                      <a:endParaRPr lang="en-US" sz="1300" dirty="0">
-                        <a:latin typeface="Calibri" charset="0"/>
-                        <a:ea typeface="Calibri" charset="0"/>
-                        <a:cs typeface="Calibri" charset="0"/>
-                      </a:endParaRPr>
-                    </a:p>
-                  </a:txBody>
-                  <a:tcPr>
-                    <a:lnL w="12700" cap="flat" cmpd="sng" algn="ctr">
-                      <a:solidFill>
-                        <a:srgbClr val="E2EFDA"/>
-                      </a:solidFill>
-                      <a:prstDash val="solid"/>
-                      <a:round/>
-                      <a:headEnd type="none" w="med" len="med"/>
-                      <a:tailEnd type="none" w="med" len="med"/>
-                    </a:lnL>
-                    <a:lnR w="12700" cap="flat" cmpd="sng" algn="ctr">
-                      <a:solidFill>
-                        <a:srgbClr val="E2EFDA"/>
-                      </a:solidFill>
-                      <a:prstDash val="solid"/>
-                      <a:round/>
-                      <a:headEnd type="none" w="med" len="med"/>
-                      <a:tailEnd type="none" w="med" len="med"/>
-                    </a:lnR>
-                    <a:lnT w="12700" cap="flat" cmpd="sng" algn="ctr">
-                      <a:solidFill>
-                        <a:srgbClr val="E2EFDA"/>
-                      </a:solidFill>
-                      <a:prstDash val="solid"/>
-                      <a:round/>
-                      <a:headEnd type="none" w="med" len="med"/>
-                      <a:tailEnd type="none" w="med" len="med"/>
-                    </a:lnT>
-                    <a:lnB w="12700" cap="flat" cmpd="sng" algn="ctr">
-                      <a:solidFill>
-                        <a:srgbClr val="E2EFDA"/>
-                      </a:solidFill>
-                      <a:prstDash val="solid"/>
-                      <a:round/>
-                      <a:headEnd type="none" w="med" len="med"/>
-                      <a:tailEnd type="none" w="med" len="med"/>
-                    </a:lnB>
-                    <a:solidFill>
-                      <a:srgbClr val="FFFFFF"/>
-                    </a:solidFill>
-                  </a:tcPr>
-                </a:tc>
-                <a:extLst>
-                  <a:ext uri="{0D108BD9-81ED-4DB2-BD59-A6C34878D82A}">
-                    <a16:rowId xmlns:a16="http://schemas.microsoft.com/office/drawing/2014/main" val="10005"/>
-                  </a:ext>
-                </a:extLst>
-              </a:tr>
-            </a:tbl>
-          </a:graphicData>
-        </a:graphic>
-      </p:graphicFrame>
-      <p:sp>
-        <p:nvSpPr>
-          <p:cNvPr id="11" name="Shape 7"/>
-          <p:cNvSpPr/>
-          <p:nvPr/>
-        </p:nvSpPr>
-        <p:spPr>
-          <a:xfrm>
-            <a:off x="274320" y="4023360"/>
-            <a:ext cx="8595360" cy="914400"/>
-          </a:xfrm>
-          <a:prstGeom prst="rect">
-            <a:avLst/>
-          </a:prstGeom>
-          <a:solidFill>
-            <a:srgbClr val="BDD7EE"/>
-          </a:solidFill>
-          <a:ln/>
-          <a:effectLst>
-            <a:outerShdw blurRad="76200" dist="25400" dir="8100000" algn="bl" rotWithShape="0">
-              <a:srgbClr val="000000">
-                <a:alpha val="15000"/>
-              </a:srgbClr>
-            </a:outerShdw>
-          </a:effectLst>
-        </p:spPr>
-      </p:sp>
-      <p:sp>
-        <p:nvSpPr>
-          <p:cNvPr id="8" name="Shape 8"/>
-          <p:cNvSpPr/>
-          <p:nvPr/>
-        </p:nvSpPr>
-        <p:spPr>
-          <a:xfrm>
-            <a:off x="274320" y="4023360"/>
-            <a:ext cx="109728" cy="914400"/>
-          </a:xfrm>
-          <a:prstGeom prst="rect">
-            <a:avLst/>
-          </a:prstGeom>
-          <a:solidFill>
-            <a:srgbClr val="4472C4"/>
-          </a:solidFill>
-          <a:ln/>
-        </p:spPr>
-      </p:sp>
-      <p:sp>
-        <p:nvSpPr>
-          <p:cNvPr id="13" name="Text 9"/>
-          <p:cNvSpPr/>
-          <p:nvPr/>
-        </p:nvSpPr>
-        <p:spPr>
-          <a:xfrm>
-            <a:off x="502920" y="4096512"/>
-            <a:ext cx="8229600" cy="777240"/>
-          </a:xfrm>
-          <a:prstGeom prst="rect">
-            <a:avLst/>
-          </a:prstGeom>
-          <a:noFill/>
-          <a:ln/>
-        </p:spPr>
-        <p:txBody>
-          <a:bodyPr wrap="square" lIns="0" tIns="0" rIns="0" bIns="0" rtlCol="0" anchor="ctr"/>
-          <a:lstStyle/>
-          <a:p>
-            <a:pPr marL="0" indent="0">
-              <a:buNone/>
-            </a:pPr>
-            <a:r>
-              <a:rPr lang="en-US" sz="1300" b="1" dirty="0">
-                <a:solidFill>
-                  <a:srgbClr val="1F497D"/>
-                </a:solidFill>
-                <a:latin typeface="Ubuntu" panose="020B0504030602030204" pitchFamily="34" charset="0"/>
-                <a:ea typeface="Calibri" pitchFamily="34" charset="-122"/>
-                <a:cs typeface="Calibri" pitchFamily="34" charset="-120"/>
-              </a:rPr>
-              <a:t>Why tune if already 100%?</a:t>
-            </a:r>
-            <a:endParaRPr lang="en-US" sz="1300" dirty="0">
-              <a:latin typeface="Ubuntu" panose="020B0504030602030204" pitchFamily="34" charset="0"/>
-            </a:endParaRPr>
-          </a:p>
-          <a:p>
-            <a:pPr marL="0" indent="0">
-              <a:buNone/>
-            </a:pPr>
-            <a:r>
-              <a:rPr lang="en-US" sz="1300" dirty="0">
-                <a:solidFill>
-                  <a:srgbClr val="1F497D"/>
-                </a:solidFill>
-                <a:latin typeface="Ubuntu" panose="020B0504030602030204" pitchFamily="34" charset="0"/>
-                <a:ea typeface="Calibri" pitchFamily="34" charset="-122"/>
-                <a:cs typeface="Calibri" pitchFamily="34" charset="-120"/>
-              </a:rPr>
-              <a:t>Tuning confirms model robustness and ensures optimal generalization on new, real-world data.</a:t>
-            </a:r>
-            <a:endParaRPr lang="en-US" sz="1300" dirty="0">
-              <a:latin typeface="Ubuntu" panose="020B0504030602030204" pitchFamily="34" charset="0"/>
-            </a:endParaRPr>
-          </a:p>
-        </p:txBody>
-      </p:sp>
-    </p:spTree>
-  </p:cSld>
-  <p:clrMapOvr>
-    <a:masterClrMapping/>
-  </p:clrMapOvr>
-</p:sld>
-</file>
-
-<file path=ppt/slides/slide12.xml><?xml version="1.0" encoding="utf-8"?>
 <p:sld xmlns:a="http://schemas.openxmlformats.org/drawingml/2006/main" xmlns:r="http://schemas.openxmlformats.org/officeDocument/2006/relationships" xmlns:p="http://schemas.openxmlformats.org/presentationml/2006/main">
   <p:cSld name="Slide 12">
     <p:bg>
@@ -7563,7 +4713,7 @@
         </p:nvSpPr>
         <p:spPr>
           <a:xfrm>
-            <a:off x="365760" y="182880"/>
+            <a:off x="175846" y="36576"/>
             <a:ext cx="8412480" cy="594360"/>
           </a:xfrm>
           <a:prstGeom prst="rect">
@@ -7596,2003 +4746,6 @@
           </a:p>
         </p:txBody>
       </p:sp>
-      <p:graphicFrame>
-        <p:nvGraphicFramePr>
-          <p:cNvPr id="13" name="Table 0"/>
-          <p:cNvGraphicFramePr>
-            <a:graphicFrameLocks noGrp="1"/>
-          </p:cNvGraphicFramePr>
-          <p:nvPr>
-            <p:extLst>
-              <p:ext uri="{D42A27DB-BD31-4B8C-83A1-F6EECF244321}">
-                <p14:modId xmlns:p14="http://schemas.microsoft.com/office/powerpoint/2010/main" val="3787209620"/>
-              </p:ext>
-            </p:extLst>
-          </p:nvPr>
-        </p:nvGraphicFramePr>
-        <p:xfrm>
-          <a:off x="211016" y="689672"/>
-          <a:ext cx="4436314" cy="4088068"/>
-        </p:xfrm>
-        <a:graphic>
-          <a:graphicData uri="http://schemas.openxmlformats.org/drawingml/2006/table">
-            <a:tbl>
-              <a:tblPr/>
-              <a:tblGrid>
-                <a:gridCol w="1876902">
-                  <a:extLst>
-                    <a:ext uri="{9D8B030D-6E8A-4147-A177-3AD203B41FA5}">
-                      <a16:colId xmlns:a16="http://schemas.microsoft.com/office/drawing/2014/main" val="20000"/>
-                    </a:ext>
-                  </a:extLst>
-                </a:gridCol>
-                <a:gridCol w="2559412">
-                  <a:extLst>
-                    <a:ext uri="{9D8B030D-6E8A-4147-A177-3AD203B41FA5}">
-                      <a16:colId xmlns:a16="http://schemas.microsoft.com/office/drawing/2014/main" val="20001"/>
-                    </a:ext>
-                  </a:extLst>
-                </a:gridCol>
-              </a:tblGrid>
-              <a:tr h="395889">
-                <a:tc>
-                  <a:txBody>
-                    <a:bodyPr/>
-                    <a:lstStyle/>
-                    <a:p>
-                      <a:pPr marL="0" indent="0" algn="l">
-                        <a:buNone/>
-                      </a:pPr>
-                      <a:r>
-                        <a:rPr lang="en-US" sz="1100" b="1" dirty="0">
-                          <a:solidFill>
-                            <a:srgbClr val="FFFFFF"/>
-                          </a:solidFill>
-                          <a:latin typeface="Ubuntu" panose="020B0504030602030204" pitchFamily="34" charset="0"/>
-                          <a:ea typeface="Calibri" pitchFamily="34" charset="-122"/>
-                          <a:cs typeface="Calibri" pitchFamily="34" charset="-120"/>
-                        </a:rPr>
-                        <a:t>Step</a:t>
-                      </a:r>
-                      <a:endParaRPr lang="en-US" sz="1100" dirty="0">
-                        <a:latin typeface="Ubuntu" panose="020B0504030602030204" pitchFamily="34" charset="0"/>
-                        <a:ea typeface="Calibri" charset="0"/>
-                        <a:cs typeface="Calibri" charset="0"/>
-                      </a:endParaRPr>
-                    </a:p>
-                  </a:txBody>
-                  <a:tcPr>
-                    <a:lnL w="12700" cap="flat" cmpd="sng" algn="ctr">
-                      <a:solidFill>
-                        <a:srgbClr val="2A4F7A"/>
-                      </a:solidFill>
-                      <a:prstDash val="solid"/>
-                      <a:round/>
-                      <a:headEnd type="none" w="med" len="med"/>
-                      <a:tailEnd type="none" w="med" len="med"/>
-                    </a:lnL>
-                    <a:lnR w="12700" cap="flat" cmpd="sng" algn="ctr">
-                      <a:solidFill>
-                        <a:srgbClr val="2A4F7A"/>
-                      </a:solidFill>
-                      <a:prstDash val="solid"/>
-                      <a:round/>
-                      <a:headEnd type="none" w="med" len="med"/>
-                      <a:tailEnd type="none" w="med" len="med"/>
-                    </a:lnR>
-                    <a:lnT w="12700" cap="flat" cmpd="sng" algn="ctr">
-                      <a:solidFill>
-                        <a:srgbClr val="2A4F7A"/>
-                      </a:solidFill>
-                      <a:prstDash val="solid"/>
-                      <a:round/>
-                      <a:headEnd type="none" w="med" len="med"/>
-                      <a:tailEnd type="none" w="med" len="med"/>
-                    </a:lnT>
-                    <a:lnB w="12700" cap="flat" cmpd="sng" algn="ctr">
-                      <a:solidFill>
-                        <a:srgbClr val="2A4F7A"/>
-                      </a:solidFill>
-                      <a:prstDash val="solid"/>
-                      <a:round/>
-                      <a:headEnd type="none" w="med" len="med"/>
-                      <a:tailEnd type="none" w="med" len="med"/>
-                    </a:lnB>
-                    <a:solidFill>
-                      <a:srgbClr val="17375E"/>
-                    </a:solidFill>
-                  </a:tcPr>
-                </a:tc>
-                <a:tc>
-                  <a:txBody>
-                    <a:bodyPr/>
-                    <a:lstStyle/>
-                    <a:p>
-                      <a:pPr marL="0" indent="0" algn="l">
-                        <a:buNone/>
-                      </a:pPr>
-                      <a:r>
-                        <a:rPr lang="en-US" sz="1100" b="1" dirty="0">
-                          <a:solidFill>
-                            <a:srgbClr val="FFFFFF"/>
-                          </a:solidFill>
-                          <a:latin typeface="Ubuntu" panose="020B0504030602030204" pitchFamily="34" charset="0"/>
-                          <a:ea typeface="Calibri" pitchFamily="34" charset="-122"/>
-                          <a:cs typeface="Calibri" pitchFamily="34" charset="-120"/>
-                        </a:rPr>
-                        <a:t>Achievement</a:t>
-                      </a:r>
-                      <a:endParaRPr lang="en-US" sz="1100" dirty="0">
-                        <a:latin typeface="Ubuntu" panose="020B0504030602030204" pitchFamily="34" charset="0"/>
-                        <a:ea typeface="Calibri" charset="0"/>
-                        <a:cs typeface="Calibri" charset="0"/>
-                      </a:endParaRPr>
-                    </a:p>
-                  </a:txBody>
-                  <a:tcPr>
-                    <a:lnL w="12700" cap="flat" cmpd="sng" algn="ctr">
-                      <a:solidFill>
-                        <a:srgbClr val="2A4F7A"/>
-                      </a:solidFill>
-                      <a:prstDash val="solid"/>
-                      <a:round/>
-                      <a:headEnd type="none" w="med" len="med"/>
-                      <a:tailEnd type="none" w="med" len="med"/>
-                    </a:lnL>
-                    <a:lnR w="12700" cap="flat" cmpd="sng" algn="ctr">
-                      <a:solidFill>
-                        <a:srgbClr val="2A4F7A"/>
-                      </a:solidFill>
-                      <a:prstDash val="solid"/>
-                      <a:round/>
-                      <a:headEnd type="none" w="med" len="med"/>
-                      <a:tailEnd type="none" w="med" len="med"/>
-                    </a:lnR>
-                    <a:lnT w="12700" cap="flat" cmpd="sng" algn="ctr">
-                      <a:solidFill>
-                        <a:srgbClr val="2A4F7A"/>
-                      </a:solidFill>
-                      <a:prstDash val="solid"/>
-                      <a:round/>
-                      <a:headEnd type="none" w="med" len="med"/>
-                      <a:tailEnd type="none" w="med" len="med"/>
-                    </a:lnT>
-                    <a:lnB w="12700" cap="flat" cmpd="sng" algn="ctr">
-                      <a:solidFill>
-                        <a:srgbClr val="2A4F7A"/>
-                      </a:solidFill>
-                      <a:prstDash val="solid"/>
-                      <a:round/>
-                      <a:headEnd type="none" w="med" len="med"/>
-                      <a:tailEnd type="none" w="med" len="med"/>
-                    </a:lnB>
-                    <a:solidFill>
-                      <a:srgbClr val="17375E"/>
-                    </a:solidFill>
-                  </a:tcPr>
-                </a:tc>
-                <a:extLst>
-                  <a:ext uri="{0D108BD9-81ED-4DB2-BD59-A6C34878D82A}">
-                    <a16:rowId xmlns:a16="http://schemas.microsoft.com/office/drawing/2014/main" val="10000"/>
-                  </a:ext>
-                </a:extLst>
-              </a:tr>
-              <a:tr h="395889">
-                <a:tc>
-                  <a:txBody>
-                    <a:bodyPr/>
-                    <a:lstStyle/>
-                    <a:p>
-                      <a:pPr marL="0" indent="0" algn="l">
-                        <a:buNone/>
-                      </a:pPr>
-                      <a:r>
-                        <a:rPr lang="en-US" sz="1100" dirty="0">
-                          <a:solidFill>
-                            <a:srgbClr val="BDD7EE"/>
-                          </a:solidFill>
-                          <a:latin typeface="Ubuntu" panose="020B0504030602030204" pitchFamily="34" charset="0"/>
-                          <a:ea typeface="Calibri" pitchFamily="34" charset="-122"/>
-                          <a:cs typeface="Calibri" pitchFamily="34" charset="-120"/>
-                        </a:rPr>
-                        <a:t>Dataset Search</a:t>
-                      </a:r>
-                      <a:endParaRPr lang="en-US" sz="1100" dirty="0">
-                        <a:latin typeface="Ubuntu" panose="020B0504030602030204" pitchFamily="34" charset="0"/>
-                        <a:ea typeface="Calibri" charset="0"/>
-                        <a:cs typeface="Calibri" charset="0"/>
-                      </a:endParaRPr>
-                    </a:p>
-                  </a:txBody>
-                  <a:tcPr>
-                    <a:lnL w="12700" cap="flat" cmpd="sng" algn="ctr">
-                      <a:solidFill>
-                        <a:srgbClr val="2A4F7A"/>
-                      </a:solidFill>
-                      <a:prstDash val="solid"/>
-                      <a:round/>
-                      <a:headEnd type="none" w="med" len="med"/>
-                      <a:tailEnd type="none" w="med" len="med"/>
-                    </a:lnL>
-                    <a:lnR w="12700" cap="flat" cmpd="sng" algn="ctr">
-                      <a:solidFill>
-                        <a:srgbClr val="2A4F7A"/>
-                      </a:solidFill>
-                      <a:prstDash val="solid"/>
-                      <a:round/>
-                      <a:headEnd type="none" w="med" len="med"/>
-                      <a:tailEnd type="none" w="med" len="med"/>
-                    </a:lnR>
-                    <a:lnT w="12700" cap="flat" cmpd="sng" algn="ctr">
-                      <a:solidFill>
-                        <a:srgbClr val="2A4F7A"/>
-                      </a:solidFill>
-                      <a:prstDash val="solid"/>
-                      <a:round/>
-                      <a:headEnd type="none" w="med" len="med"/>
-                      <a:tailEnd type="none" w="med" len="med"/>
-                    </a:lnT>
-                    <a:lnB w="12700" cap="flat" cmpd="sng" algn="ctr">
-                      <a:solidFill>
-                        <a:srgbClr val="2A4F7A"/>
-                      </a:solidFill>
-                      <a:prstDash val="solid"/>
-                      <a:round/>
-                      <a:headEnd type="none" w="med" len="med"/>
-                      <a:tailEnd type="none" w="med" len="med"/>
-                    </a:lnB>
-                    <a:solidFill>
-                      <a:srgbClr val="17375E"/>
-                    </a:solidFill>
-                  </a:tcPr>
-                </a:tc>
-                <a:tc>
-                  <a:txBody>
-                    <a:bodyPr/>
-                    <a:lstStyle/>
-                    <a:p>
-                      <a:pPr marL="0" indent="0" algn="l">
-                        <a:buNone/>
-                      </a:pPr>
-                      <a:r>
-                        <a:rPr lang="en-US" sz="1100" dirty="0">
-                          <a:solidFill>
-                            <a:srgbClr val="BDD7EE"/>
-                          </a:solidFill>
-                          <a:latin typeface="Ubuntu" panose="020B0504030602030204" pitchFamily="34" charset="0"/>
-                          <a:ea typeface="Calibri" pitchFamily="34" charset="-122"/>
-                          <a:cs typeface="Calibri" pitchFamily="34" charset="-120"/>
-                        </a:rPr>
-                        <a:t>UCI dataset downloaded and analyzed</a:t>
-                      </a:r>
-                      <a:endParaRPr lang="en-US" sz="1100" dirty="0">
-                        <a:latin typeface="Ubuntu" panose="020B0504030602030204" pitchFamily="34" charset="0"/>
-                        <a:ea typeface="Calibri" charset="0"/>
-                        <a:cs typeface="Calibri" charset="0"/>
-                      </a:endParaRPr>
-                    </a:p>
-                  </a:txBody>
-                  <a:tcPr>
-                    <a:lnL w="12700" cap="flat" cmpd="sng" algn="ctr">
-                      <a:solidFill>
-                        <a:srgbClr val="2A4F7A"/>
-                      </a:solidFill>
-                      <a:prstDash val="solid"/>
-                      <a:round/>
-                      <a:headEnd type="none" w="med" len="med"/>
-                      <a:tailEnd type="none" w="med" len="med"/>
-                    </a:lnL>
-                    <a:lnR w="12700" cap="flat" cmpd="sng" algn="ctr">
-                      <a:solidFill>
-                        <a:srgbClr val="2A4F7A"/>
-                      </a:solidFill>
-                      <a:prstDash val="solid"/>
-                      <a:round/>
-                      <a:headEnd type="none" w="med" len="med"/>
-                      <a:tailEnd type="none" w="med" len="med"/>
-                    </a:lnR>
-                    <a:lnT w="12700" cap="flat" cmpd="sng" algn="ctr">
-                      <a:solidFill>
-                        <a:srgbClr val="2A4F7A"/>
-                      </a:solidFill>
-                      <a:prstDash val="solid"/>
-                      <a:round/>
-                      <a:headEnd type="none" w="med" len="med"/>
-                      <a:tailEnd type="none" w="med" len="med"/>
-                    </a:lnT>
-                    <a:lnB w="12700" cap="flat" cmpd="sng" algn="ctr">
-                      <a:solidFill>
-                        <a:srgbClr val="2A4F7A"/>
-                      </a:solidFill>
-                      <a:prstDash val="solid"/>
-                      <a:round/>
-                      <a:headEnd type="none" w="med" len="med"/>
-                      <a:tailEnd type="none" w="med" len="med"/>
-                    </a:lnB>
-                    <a:solidFill>
-                      <a:srgbClr val="17375E"/>
-                    </a:solidFill>
-                  </a:tcPr>
-                </a:tc>
-                <a:extLst>
-                  <a:ext uri="{0D108BD9-81ED-4DB2-BD59-A6C34878D82A}">
-                    <a16:rowId xmlns:a16="http://schemas.microsoft.com/office/drawing/2014/main" val="10001"/>
-                  </a:ext>
-                </a:extLst>
-              </a:tr>
-              <a:tr h="429647">
-                <a:tc>
-                  <a:txBody>
-                    <a:bodyPr/>
-                    <a:lstStyle/>
-                    <a:p>
-                      <a:pPr marL="0" indent="0" algn="l">
-                        <a:buNone/>
-                      </a:pPr>
-                      <a:r>
-                        <a:rPr lang="en-US" sz="1100" dirty="0">
-                          <a:solidFill>
-                            <a:srgbClr val="BDD7EE"/>
-                          </a:solidFill>
-                          <a:latin typeface="Ubuntu" panose="020B0504030602030204" pitchFamily="34" charset="0"/>
-                          <a:ea typeface="Calibri" pitchFamily="34" charset="-122"/>
-                          <a:cs typeface="Calibri" pitchFamily="34" charset="-120"/>
-                        </a:rPr>
-                        <a:t>Gen. AI + Aug.</a:t>
-                      </a:r>
-                      <a:endParaRPr lang="en-US" sz="1100" dirty="0">
-                        <a:latin typeface="Ubuntu" panose="020B0504030602030204" pitchFamily="34" charset="0"/>
-                        <a:ea typeface="Calibri" charset="0"/>
-                        <a:cs typeface="Calibri" charset="0"/>
-                      </a:endParaRPr>
-                    </a:p>
-                  </a:txBody>
-                  <a:tcPr>
-                    <a:lnL w="12700" cap="flat" cmpd="sng" algn="ctr">
-                      <a:solidFill>
-                        <a:srgbClr val="2A4F7A"/>
-                      </a:solidFill>
-                      <a:prstDash val="solid"/>
-                      <a:round/>
-                      <a:headEnd type="none" w="med" len="med"/>
-                      <a:tailEnd type="none" w="med" len="med"/>
-                    </a:lnL>
-                    <a:lnR w="12700" cap="flat" cmpd="sng" algn="ctr">
-                      <a:solidFill>
-                        <a:srgbClr val="2A4F7A"/>
-                      </a:solidFill>
-                      <a:prstDash val="solid"/>
-                      <a:round/>
-                      <a:headEnd type="none" w="med" len="med"/>
-                      <a:tailEnd type="none" w="med" len="med"/>
-                    </a:lnR>
-                    <a:lnT w="12700" cap="flat" cmpd="sng" algn="ctr">
-                      <a:solidFill>
-                        <a:srgbClr val="2A4F7A"/>
-                      </a:solidFill>
-                      <a:prstDash val="solid"/>
-                      <a:round/>
-                      <a:headEnd type="none" w="med" len="med"/>
-                      <a:tailEnd type="none" w="med" len="med"/>
-                    </a:lnT>
-                    <a:lnB w="12700" cap="flat" cmpd="sng" algn="ctr">
-                      <a:solidFill>
-                        <a:srgbClr val="2A4F7A"/>
-                      </a:solidFill>
-                      <a:prstDash val="solid"/>
-                      <a:round/>
-                      <a:headEnd type="none" w="med" len="med"/>
-                      <a:tailEnd type="none" w="med" len="med"/>
-                    </a:lnB>
-                    <a:solidFill>
-                      <a:srgbClr val="17375E"/>
-                    </a:solidFill>
-                  </a:tcPr>
-                </a:tc>
-                <a:tc>
-                  <a:txBody>
-                    <a:bodyPr/>
-                    <a:lstStyle/>
-                    <a:p>
-                      <a:pPr marL="0" indent="0" algn="l">
-                        <a:buNone/>
-                      </a:pPr>
-                      <a:r>
-                        <a:rPr lang="en-US" sz="1100" dirty="0">
-                          <a:solidFill>
-                            <a:srgbClr val="BDD7EE"/>
-                          </a:solidFill>
-                          <a:latin typeface="Ubuntu" panose="020B0504030602030204" pitchFamily="34" charset="0"/>
-                          <a:ea typeface="Calibri" pitchFamily="34" charset="-122"/>
-                          <a:cs typeface="Calibri" pitchFamily="34" charset="-120"/>
-                        </a:rPr>
-                        <a:t>100 synthetic patients used via Augmentation</a:t>
-                      </a:r>
-                      <a:endParaRPr lang="en-US" sz="1100" dirty="0">
-                        <a:latin typeface="Ubuntu" panose="020B0504030602030204" pitchFamily="34" charset="0"/>
-                        <a:ea typeface="Calibri" charset="0"/>
-                        <a:cs typeface="Calibri" charset="0"/>
-                      </a:endParaRPr>
-                    </a:p>
-                  </a:txBody>
-                  <a:tcPr>
-                    <a:lnL w="12700" cap="flat" cmpd="sng" algn="ctr">
-                      <a:solidFill>
-                        <a:srgbClr val="2A4F7A"/>
-                      </a:solidFill>
-                      <a:prstDash val="solid"/>
-                      <a:round/>
-                      <a:headEnd type="none" w="med" len="med"/>
-                      <a:tailEnd type="none" w="med" len="med"/>
-                    </a:lnL>
-                    <a:lnR w="12700" cap="flat" cmpd="sng" algn="ctr">
-                      <a:solidFill>
-                        <a:srgbClr val="2A4F7A"/>
-                      </a:solidFill>
-                      <a:prstDash val="solid"/>
-                      <a:round/>
-                      <a:headEnd type="none" w="med" len="med"/>
-                      <a:tailEnd type="none" w="med" len="med"/>
-                    </a:lnR>
-                    <a:lnT w="12700" cap="flat" cmpd="sng" algn="ctr">
-                      <a:solidFill>
-                        <a:srgbClr val="2A4F7A"/>
-                      </a:solidFill>
-                      <a:prstDash val="solid"/>
-                      <a:round/>
-                      <a:headEnd type="none" w="med" len="med"/>
-                      <a:tailEnd type="none" w="med" len="med"/>
-                    </a:lnT>
-                    <a:lnB w="12700" cap="flat" cmpd="sng" algn="ctr">
-                      <a:solidFill>
-                        <a:srgbClr val="2A4F7A"/>
-                      </a:solidFill>
-                      <a:prstDash val="solid"/>
-                      <a:round/>
-                      <a:headEnd type="none" w="med" len="med"/>
-                      <a:tailEnd type="none" w="med" len="med"/>
-                    </a:lnB>
-                    <a:solidFill>
-                      <a:srgbClr val="17375E"/>
-                    </a:solidFill>
-                  </a:tcPr>
-                </a:tc>
-                <a:extLst>
-                  <a:ext uri="{0D108BD9-81ED-4DB2-BD59-A6C34878D82A}">
-                    <a16:rowId xmlns:a16="http://schemas.microsoft.com/office/drawing/2014/main" val="10002"/>
-                  </a:ext>
-                </a:extLst>
-              </a:tr>
-              <a:tr h="429647">
-                <a:tc>
-                  <a:txBody>
-                    <a:bodyPr/>
-                    <a:lstStyle/>
-                    <a:p>
-                      <a:pPr marL="0" indent="0" algn="l">
-                        <a:buNone/>
-                      </a:pPr>
-                      <a:r>
-                        <a:rPr lang="en-US" sz="1100" dirty="0">
-                          <a:solidFill>
-                            <a:srgbClr val="BDD7EE"/>
-                          </a:solidFill>
-                          <a:latin typeface="Ubuntu" panose="020B0504030602030204" pitchFamily="34" charset="0"/>
-                          <a:ea typeface="Calibri" pitchFamily="34" charset="-122"/>
-                          <a:cs typeface="Calibri" pitchFamily="34" charset="-120"/>
-                        </a:rPr>
-                        <a:t>Data Preparation</a:t>
-                      </a:r>
-                      <a:endParaRPr lang="en-US" sz="1100" dirty="0">
-                        <a:latin typeface="Ubuntu" panose="020B0504030602030204" pitchFamily="34" charset="0"/>
-                        <a:ea typeface="Calibri" charset="0"/>
-                        <a:cs typeface="Calibri" charset="0"/>
-                      </a:endParaRPr>
-                    </a:p>
-                  </a:txBody>
-                  <a:tcPr>
-                    <a:lnL w="12700" cap="flat" cmpd="sng" algn="ctr">
-                      <a:solidFill>
-                        <a:srgbClr val="2A4F7A"/>
-                      </a:solidFill>
-                      <a:prstDash val="solid"/>
-                      <a:round/>
-                      <a:headEnd type="none" w="med" len="med"/>
-                      <a:tailEnd type="none" w="med" len="med"/>
-                    </a:lnL>
-                    <a:lnR w="12700" cap="flat" cmpd="sng" algn="ctr">
-                      <a:solidFill>
-                        <a:srgbClr val="2A4F7A"/>
-                      </a:solidFill>
-                      <a:prstDash val="solid"/>
-                      <a:round/>
-                      <a:headEnd type="none" w="med" len="med"/>
-                      <a:tailEnd type="none" w="med" len="med"/>
-                    </a:lnR>
-                    <a:lnT w="12700" cap="flat" cmpd="sng" algn="ctr">
-                      <a:solidFill>
-                        <a:srgbClr val="2A4F7A"/>
-                      </a:solidFill>
-                      <a:prstDash val="solid"/>
-                      <a:round/>
-                      <a:headEnd type="none" w="med" len="med"/>
-                      <a:tailEnd type="none" w="med" len="med"/>
-                    </a:lnT>
-                    <a:lnB w="12700" cap="flat" cmpd="sng" algn="ctr">
-                      <a:solidFill>
-                        <a:srgbClr val="2A4F7A"/>
-                      </a:solidFill>
-                      <a:prstDash val="solid"/>
-                      <a:round/>
-                      <a:headEnd type="none" w="med" len="med"/>
-                      <a:tailEnd type="none" w="med" len="med"/>
-                    </a:lnB>
-                    <a:solidFill>
-                      <a:srgbClr val="17375E"/>
-                    </a:solidFill>
-                  </a:tcPr>
-                </a:tc>
-                <a:tc>
-                  <a:txBody>
-                    <a:bodyPr/>
-                    <a:lstStyle/>
-                    <a:p>
-                      <a:pPr marL="0" indent="0" algn="l">
-                        <a:buNone/>
-                      </a:pPr>
-                      <a:r>
-                        <a:rPr lang="en-US" sz="1100" dirty="0">
-                          <a:solidFill>
-                            <a:srgbClr val="BDD7EE"/>
-                          </a:solidFill>
-                          <a:latin typeface="Ubuntu" panose="020B0504030602030204" pitchFamily="34" charset="0"/>
-                          <a:ea typeface="Calibri" pitchFamily="34" charset="-122"/>
-                          <a:cs typeface="Calibri" pitchFamily="34" charset="-120"/>
-                        </a:rPr>
-                        <a:t>Cleaned, imputed, encoded : 0 missing values</a:t>
-                      </a:r>
-                      <a:endParaRPr lang="en-US" sz="1100" dirty="0">
-                        <a:latin typeface="Ubuntu" panose="020B0504030602030204" pitchFamily="34" charset="0"/>
-                        <a:ea typeface="Calibri" charset="0"/>
-                        <a:cs typeface="Calibri" charset="0"/>
-                      </a:endParaRPr>
-                    </a:p>
-                  </a:txBody>
-                  <a:tcPr>
-                    <a:lnL w="12700" cap="flat" cmpd="sng" algn="ctr">
-                      <a:solidFill>
-                        <a:srgbClr val="2A4F7A"/>
-                      </a:solidFill>
-                      <a:prstDash val="solid"/>
-                      <a:round/>
-                      <a:headEnd type="none" w="med" len="med"/>
-                      <a:tailEnd type="none" w="med" len="med"/>
-                    </a:lnL>
-                    <a:lnR w="12700" cap="flat" cmpd="sng" algn="ctr">
-                      <a:solidFill>
-                        <a:srgbClr val="2A4F7A"/>
-                      </a:solidFill>
-                      <a:prstDash val="solid"/>
-                      <a:round/>
-                      <a:headEnd type="none" w="med" len="med"/>
-                      <a:tailEnd type="none" w="med" len="med"/>
-                    </a:lnR>
-                    <a:lnT w="12700" cap="flat" cmpd="sng" algn="ctr">
-                      <a:solidFill>
-                        <a:srgbClr val="2A4F7A"/>
-                      </a:solidFill>
-                      <a:prstDash val="solid"/>
-                      <a:round/>
-                      <a:headEnd type="none" w="med" len="med"/>
-                      <a:tailEnd type="none" w="med" len="med"/>
-                    </a:lnT>
-                    <a:lnB w="12700" cap="flat" cmpd="sng" algn="ctr">
-                      <a:solidFill>
-                        <a:srgbClr val="2A4F7A"/>
-                      </a:solidFill>
-                      <a:prstDash val="solid"/>
-                      <a:round/>
-                      <a:headEnd type="none" w="med" len="med"/>
-                      <a:tailEnd type="none" w="med" len="med"/>
-                    </a:lnB>
-                    <a:solidFill>
-                      <a:srgbClr val="17375E"/>
-                    </a:solidFill>
-                  </a:tcPr>
-                </a:tc>
-                <a:extLst>
-                  <a:ext uri="{0D108BD9-81ED-4DB2-BD59-A6C34878D82A}">
-                    <a16:rowId xmlns:a16="http://schemas.microsoft.com/office/drawing/2014/main" val="10003"/>
-                  </a:ext>
-                </a:extLst>
-              </a:tr>
-              <a:tr h="395889">
-                <a:tc>
-                  <a:txBody>
-                    <a:bodyPr/>
-                    <a:lstStyle/>
-                    <a:p>
-                      <a:pPr marL="0" indent="0" algn="l">
-                        <a:buNone/>
-                      </a:pPr>
-                      <a:r>
-                        <a:rPr lang="en-US" sz="1100" dirty="0">
-                          <a:solidFill>
-                            <a:srgbClr val="BDD7EE"/>
-                          </a:solidFill>
-                          <a:latin typeface="Ubuntu" panose="020B0504030602030204" pitchFamily="34" charset="0"/>
-                          <a:ea typeface="Calibri" pitchFamily="34" charset="-122"/>
-                          <a:cs typeface="Calibri" pitchFamily="34" charset="-120"/>
-                        </a:rPr>
-                        <a:t>Feature Engineering</a:t>
-                      </a:r>
-                      <a:endParaRPr lang="en-US" sz="1100" dirty="0">
-                        <a:latin typeface="Ubuntu" panose="020B0504030602030204" pitchFamily="34" charset="0"/>
-                        <a:ea typeface="Calibri" charset="0"/>
-                        <a:cs typeface="Calibri" charset="0"/>
-                      </a:endParaRPr>
-                    </a:p>
-                  </a:txBody>
-                  <a:tcPr>
-                    <a:lnL w="12700" cap="flat" cmpd="sng" algn="ctr">
-                      <a:solidFill>
-                        <a:srgbClr val="2A4F7A"/>
-                      </a:solidFill>
-                      <a:prstDash val="solid"/>
-                      <a:round/>
-                      <a:headEnd type="none" w="med" len="med"/>
-                      <a:tailEnd type="none" w="med" len="med"/>
-                    </a:lnL>
-                    <a:lnR w="12700" cap="flat" cmpd="sng" algn="ctr">
-                      <a:solidFill>
-                        <a:srgbClr val="2A4F7A"/>
-                      </a:solidFill>
-                      <a:prstDash val="solid"/>
-                      <a:round/>
-                      <a:headEnd type="none" w="med" len="med"/>
-                      <a:tailEnd type="none" w="med" len="med"/>
-                    </a:lnR>
-                    <a:lnT w="12700" cap="flat" cmpd="sng" algn="ctr">
-                      <a:solidFill>
-                        <a:srgbClr val="2A4F7A"/>
-                      </a:solidFill>
-                      <a:prstDash val="solid"/>
-                      <a:round/>
-                      <a:headEnd type="none" w="med" len="med"/>
-                      <a:tailEnd type="none" w="med" len="med"/>
-                    </a:lnT>
-                    <a:lnB w="12700" cap="flat" cmpd="sng" algn="ctr">
-                      <a:solidFill>
-                        <a:srgbClr val="2A4F7A"/>
-                      </a:solidFill>
-                      <a:prstDash val="solid"/>
-                      <a:round/>
-                      <a:headEnd type="none" w="med" len="med"/>
-                      <a:tailEnd type="none" w="med" len="med"/>
-                    </a:lnB>
-                    <a:solidFill>
-                      <a:srgbClr val="17375E"/>
-                    </a:solidFill>
-                  </a:tcPr>
-                </a:tc>
-                <a:tc>
-                  <a:txBody>
-                    <a:bodyPr/>
-                    <a:lstStyle/>
-                    <a:p>
-                      <a:pPr marL="0" indent="0" algn="l">
-                        <a:buNone/>
-                      </a:pPr>
-                      <a:r>
-                        <a:rPr lang="en-US" sz="1100" dirty="0">
-                          <a:solidFill>
-                            <a:srgbClr val="BDD7EE"/>
-                          </a:solidFill>
-                          <a:latin typeface="Ubuntu" panose="020B0504030602030204" pitchFamily="34" charset="0"/>
-                          <a:ea typeface="Calibri" pitchFamily="34" charset="-122"/>
-                          <a:cs typeface="Calibri" pitchFamily="34" charset="-120"/>
-                        </a:rPr>
-                        <a:t>PCA(24→20), LDA(24→1), RF Top-10</a:t>
-                      </a:r>
-                      <a:endParaRPr lang="en-US" sz="1100" dirty="0">
-                        <a:latin typeface="Ubuntu" panose="020B0504030602030204" pitchFamily="34" charset="0"/>
-                        <a:ea typeface="Calibri" charset="0"/>
-                        <a:cs typeface="Calibri" charset="0"/>
-                      </a:endParaRPr>
-                    </a:p>
-                  </a:txBody>
-                  <a:tcPr>
-                    <a:lnL w="12700" cap="flat" cmpd="sng" algn="ctr">
-                      <a:solidFill>
-                        <a:srgbClr val="2A4F7A"/>
-                      </a:solidFill>
-                      <a:prstDash val="solid"/>
-                      <a:round/>
-                      <a:headEnd type="none" w="med" len="med"/>
-                      <a:tailEnd type="none" w="med" len="med"/>
-                    </a:lnL>
-                    <a:lnR w="12700" cap="flat" cmpd="sng" algn="ctr">
-                      <a:solidFill>
-                        <a:srgbClr val="2A4F7A"/>
-                      </a:solidFill>
-                      <a:prstDash val="solid"/>
-                      <a:round/>
-                      <a:headEnd type="none" w="med" len="med"/>
-                      <a:tailEnd type="none" w="med" len="med"/>
-                    </a:lnR>
-                    <a:lnT w="12700" cap="flat" cmpd="sng" algn="ctr">
-                      <a:solidFill>
-                        <a:srgbClr val="2A4F7A"/>
-                      </a:solidFill>
-                      <a:prstDash val="solid"/>
-                      <a:round/>
-                      <a:headEnd type="none" w="med" len="med"/>
-                      <a:tailEnd type="none" w="med" len="med"/>
-                    </a:lnT>
-                    <a:lnB w="12700" cap="flat" cmpd="sng" algn="ctr">
-                      <a:solidFill>
-                        <a:srgbClr val="2A4F7A"/>
-                      </a:solidFill>
-                      <a:prstDash val="solid"/>
-                      <a:round/>
-                      <a:headEnd type="none" w="med" len="med"/>
-                      <a:tailEnd type="none" w="med" len="med"/>
-                    </a:lnB>
-                    <a:solidFill>
-                      <a:srgbClr val="17375E"/>
-                    </a:solidFill>
-                  </a:tcPr>
-                </a:tc>
-                <a:extLst>
-                  <a:ext uri="{0D108BD9-81ED-4DB2-BD59-A6C34878D82A}">
-                    <a16:rowId xmlns:a16="http://schemas.microsoft.com/office/drawing/2014/main" val="10004"/>
-                  </a:ext>
-                </a:extLst>
-              </a:tr>
-              <a:tr h="395889">
-                <a:tc>
-                  <a:txBody>
-                    <a:bodyPr/>
-                    <a:lstStyle/>
-                    <a:p>
-                      <a:pPr marL="0" indent="0" algn="l">
-                        <a:buNone/>
-                      </a:pPr>
-                      <a:r>
-                        <a:rPr lang="en-US" sz="1100" dirty="0">
-                          <a:solidFill>
-                            <a:srgbClr val="BDD7EE"/>
-                          </a:solidFill>
-                          <a:latin typeface="Ubuntu" panose="020B0504030602030204" pitchFamily="34" charset="0"/>
-                          <a:ea typeface="Calibri" pitchFamily="34" charset="-122"/>
-                          <a:cs typeface="Calibri" pitchFamily="34" charset="-120"/>
-                        </a:rPr>
-                        <a:t>Data Splitting</a:t>
-                      </a:r>
-                      <a:endParaRPr lang="en-US" sz="1100" dirty="0">
-                        <a:latin typeface="Ubuntu" panose="020B0504030602030204" pitchFamily="34" charset="0"/>
-                        <a:ea typeface="Calibri" charset="0"/>
-                        <a:cs typeface="Calibri" charset="0"/>
-                      </a:endParaRPr>
-                    </a:p>
-                  </a:txBody>
-                  <a:tcPr>
-                    <a:lnL w="12700" cap="flat" cmpd="sng" algn="ctr">
-                      <a:solidFill>
-                        <a:srgbClr val="2A4F7A"/>
-                      </a:solidFill>
-                      <a:prstDash val="solid"/>
-                      <a:round/>
-                      <a:headEnd type="none" w="med" len="med"/>
-                      <a:tailEnd type="none" w="med" len="med"/>
-                    </a:lnL>
-                    <a:lnR w="12700" cap="flat" cmpd="sng" algn="ctr">
-                      <a:solidFill>
-                        <a:srgbClr val="2A4F7A"/>
-                      </a:solidFill>
-                      <a:prstDash val="solid"/>
-                      <a:round/>
-                      <a:headEnd type="none" w="med" len="med"/>
-                      <a:tailEnd type="none" w="med" len="med"/>
-                    </a:lnR>
-                    <a:lnT w="12700" cap="flat" cmpd="sng" algn="ctr">
-                      <a:solidFill>
-                        <a:srgbClr val="2A4F7A"/>
-                      </a:solidFill>
-                      <a:prstDash val="solid"/>
-                      <a:round/>
-                      <a:headEnd type="none" w="med" len="med"/>
-                      <a:tailEnd type="none" w="med" len="med"/>
-                    </a:lnT>
-                    <a:lnB w="12700" cap="flat" cmpd="sng" algn="ctr">
-                      <a:solidFill>
-                        <a:srgbClr val="2A4F7A"/>
-                      </a:solidFill>
-                      <a:prstDash val="solid"/>
-                      <a:round/>
-                      <a:headEnd type="none" w="med" len="med"/>
-                      <a:tailEnd type="none" w="med" len="med"/>
-                    </a:lnB>
-                    <a:solidFill>
-                      <a:srgbClr val="17375E"/>
-                    </a:solidFill>
-                  </a:tcPr>
-                </a:tc>
-                <a:tc>
-                  <a:txBody>
-                    <a:bodyPr/>
-                    <a:lstStyle/>
-                    <a:p>
-                      <a:pPr marL="0" indent="0" algn="l">
-                        <a:buNone/>
-                      </a:pPr>
-                      <a:r>
-                        <a:rPr lang="en-US" sz="1100" dirty="0">
-                          <a:solidFill>
-                            <a:srgbClr val="BDD7EE"/>
-                          </a:solidFill>
-                          <a:latin typeface="Ubuntu" panose="020B0504030602030204" pitchFamily="34" charset="0"/>
-                          <a:ea typeface="Calibri" pitchFamily="34" charset="-122"/>
-                          <a:cs typeface="Calibri" pitchFamily="34" charset="-120"/>
-                        </a:rPr>
-                        <a:t>60/20/20 + 5-Fold Stratified CV</a:t>
-                      </a:r>
-                      <a:endParaRPr lang="en-US" sz="1100" dirty="0">
-                        <a:latin typeface="Ubuntu" panose="020B0504030602030204" pitchFamily="34" charset="0"/>
-                        <a:ea typeface="Calibri" charset="0"/>
-                        <a:cs typeface="Calibri" charset="0"/>
-                      </a:endParaRPr>
-                    </a:p>
-                  </a:txBody>
-                  <a:tcPr>
-                    <a:lnL w="12700" cap="flat" cmpd="sng" algn="ctr">
-                      <a:solidFill>
-                        <a:srgbClr val="2A4F7A"/>
-                      </a:solidFill>
-                      <a:prstDash val="solid"/>
-                      <a:round/>
-                      <a:headEnd type="none" w="med" len="med"/>
-                      <a:tailEnd type="none" w="med" len="med"/>
-                    </a:lnL>
-                    <a:lnR w="12700" cap="flat" cmpd="sng" algn="ctr">
-                      <a:solidFill>
-                        <a:srgbClr val="2A4F7A"/>
-                      </a:solidFill>
-                      <a:prstDash val="solid"/>
-                      <a:round/>
-                      <a:headEnd type="none" w="med" len="med"/>
-                      <a:tailEnd type="none" w="med" len="med"/>
-                    </a:lnR>
-                    <a:lnT w="12700" cap="flat" cmpd="sng" algn="ctr">
-                      <a:solidFill>
-                        <a:srgbClr val="2A4F7A"/>
-                      </a:solidFill>
-                      <a:prstDash val="solid"/>
-                      <a:round/>
-                      <a:headEnd type="none" w="med" len="med"/>
-                      <a:tailEnd type="none" w="med" len="med"/>
-                    </a:lnT>
-                    <a:lnB w="12700" cap="flat" cmpd="sng" algn="ctr">
-                      <a:solidFill>
-                        <a:srgbClr val="2A4F7A"/>
-                      </a:solidFill>
-                      <a:prstDash val="solid"/>
-                      <a:round/>
-                      <a:headEnd type="none" w="med" len="med"/>
-                      <a:tailEnd type="none" w="med" len="med"/>
-                    </a:lnB>
-                    <a:solidFill>
-                      <a:srgbClr val="17375E"/>
-                    </a:solidFill>
-                  </a:tcPr>
-                </a:tc>
-                <a:extLst>
-                  <a:ext uri="{0D108BD9-81ED-4DB2-BD59-A6C34878D82A}">
-                    <a16:rowId xmlns:a16="http://schemas.microsoft.com/office/drawing/2014/main" val="10005"/>
-                  </a:ext>
-                </a:extLst>
-              </a:tr>
-              <a:tr h="395889">
-                <a:tc>
-                  <a:txBody>
-                    <a:bodyPr/>
-                    <a:lstStyle/>
-                    <a:p>
-                      <a:pPr marL="0" indent="0" algn="l">
-                        <a:buNone/>
-                      </a:pPr>
-                      <a:r>
-                        <a:rPr lang="en-US" sz="1100" dirty="0">
-                          <a:solidFill>
-                            <a:srgbClr val="BDD7EE"/>
-                          </a:solidFill>
-                          <a:latin typeface="Ubuntu" panose="020B0504030602030204" pitchFamily="34" charset="0"/>
-                          <a:ea typeface="Calibri" pitchFamily="34" charset="-122"/>
-                          <a:cs typeface="Calibri" pitchFamily="34" charset="-120"/>
-                        </a:rPr>
-                        <a:t>Training</a:t>
-                      </a:r>
-                      <a:endParaRPr lang="en-US" sz="1100" dirty="0">
-                        <a:latin typeface="Ubuntu" panose="020B0504030602030204" pitchFamily="34" charset="0"/>
-                        <a:ea typeface="Calibri" charset="0"/>
-                        <a:cs typeface="Calibri" charset="0"/>
-                      </a:endParaRPr>
-                    </a:p>
-                  </a:txBody>
-                  <a:tcPr>
-                    <a:lnL w="12700" cap="flat" cmpd="sng" algn="ctr">
-                      <a:solidFill>
-                        <a:srgbClr val="2A4F7A"/>
-                      </a:solidFill>
-                      <a:prstDash val="solid"/>
-                      <a:round/>
-                      <a:headEnd type="none" w="med" len="med"/>
-                      <a:tailEnd type="none" w="med" len="med"/>
-                    </a:lnL>
-                    <a:lnR w="12700" cap="flat" cmpd="sng" algn="ctr">
-                      <a:solidFill>
-                        <a:srgbClr val="2A4F7A"/>
-                      </a:solidFill>
-                      <a:prstDash val="solid"/>
-                      <a:round/>
-                      <a:headEnd type="none" w="med" len="med"/>
-                      <a:tailEnd type="none" w="med" len="med"/>
-                    </a:lnR>
-                    <a:lnT w="12700" cap="flat" cmpd="sng" algn="ctr">
-                      <a:solidFill>
-                        <a:srgbClr val="2A4F7A"/>
-                      </a:solidFill>
-                      <a:prstDash val="solid"/>
-                      <a:round/>
-                      <a:headEnd type="none" w="med" len="med"/>
-                      <a:tailEnd type="none" w="med" len="med"/>
-                    </a:lnT>
-                    <a:lnB w="12700" cap="flat" cmpd="sng" algn="ctr">
-                      <a:solidFill>
-                        <a:srgbClr val="2A4F7A"/>
-                      </a:solidFill>
-                      <a:prstDash val="solid"/>
-                      <a:round/>
-                      <a:headEnd type="none" w="med" len="med"/>
-                      <a:tailEnd type="none" w="med" len="med"/>
-                    </a:lnB>
-                    <a:solidFill>
-                      <a:srgbClr val="17375E"/>
-                    </a:solidFill>
-                  </a:tcPr>
-                </a:tc>
-                <a:tc>
-                  <a:txBody>
-                    <a:bodyPr/>
-                    <a:lstStyle/>
-                    <a:p>
-                      <a:pPr marL="0" indent="0" algn="l">
-                        <a:buNone/>
-                      </a:pPr>
-                      <a:r>
-                        <a:rPr lang="en-US" sz="1100" dirty="0">
-                          <a:solidFill>
-                            <a:srgbClr val="BDD7EE"/>
-                          </a:solidFill>
-                          <a:latin typeface="Ubuntu" panose="020B0504030602030204" pitchFamily="34" charset="0"/>
-                          <a:ea typeface="Calibri" pitchFamily="34" charset="-122"/>
-                          <a:cs typeface="Calibri" pitchFamily="34" charset="-120"/>
-                        </a:rPr>
-                        <a:t>6 algorithms trained and compared</a:t>
-                      </a:r>
-                      <a:endParaRPr lang="en-US" sz="1100" dirty="0">
-                        <a:latin typeface="Ubuntu" panose="020B0504030602030204" pitchFamily="34" charset="0"/>
-                        <a:ea typeface="Calibri" charset="0"/>
-                        <a:cs typeface="Calibri" charset="0"/>
-                      </a:endParaRPr>
-                    </a:p>
-                  </a:txBody>
-                  <a:tcPr>
-                    <a:lnL w="12700" cap="flat" cmpd="sng" algn="ctr">
-                      <a:solidFill>
-                        <a:srgbClr val="2A4F7A"/>
-                      </a:solidFill>
-                      <a:prstDash val="solid"/>
-                      <a:round/>
-                      <a:headEnd type="none" w="med" len="med"/>
-                      <a:tailEnd type="none" w="med" len="med"/>
-                    </a:lnL>
-                    <a:lnR w="12700" cap="flat" cmpd="sng" algn="ctr">
-                      <a:solidFill>
-                        <a:srgbClr val="2A4F7A"/>
-                      </a:solidFill>
-                      <a:prstDash val="solid"/>
-                      <a:round/>
-                      <a:headEnd type="none" w="med" len="med"/>
-                      <a:tailEnd type="none" w="med" len="med"/>
-                    </a:lnR>
-                    <a:lnT w="12700" cap="flat" cmpd="sng" algn="ctr">
-                      <a:solidFill>
-                        <a:srgbClr val="2A4F7A"/>
-                      </a:solidFill>
-                      <a:prstDash val="solid"/>
-                      <a:round/>
-                      <a:headEnd type="none" w="med" len="med"/>
-                      <a:tailEnd type="none" w="med" len="med"/>
-                    </a:lnT>
-                    <a:lnB w="12700" cap="flat" cmpd="sng" algn="ctr">
-                      <a:solidFill>
-                        <a:srgbClr val="2A4F7A"/>
-                      </a:solidFill>
-                      <a:prstDash val="solid"/>
-                      <a:round/>
-                      <a:headEnd type="none" w="med" len="med"/>
-                      <a:tailEnd type="none" w="med" len="med"/>
-                    </a:lnB>
-                    <a:solidFill>
-                      <a:srgbClr val="17375E"/>
-                    </a:solidFill>
-                  </a:tcPr>
-                </a:tc>
-                <a:extLst>
-                  <a:ext uri="{0D108BD9-81ED-4DB2-BD59-A6C34878D82A}">
-                    <a16:rowId xmlns:a16="http://schemas.microsoft.com/office/drawing/2014/main" val="10006"/>
-                  </a:ext>
-                </a:extLst>
-              </a:tr>
-              <a:tr h="395889">
-                <a:tc>
-                  <a:txBody>
-                    <a:bodyPr/>
-                    <a:lstStyle/>
-                    <a:p>
-                      <a:pPr marL="0" indent="0" algn="l">
-                        <a:buNone/>
-                      </a:pPr>
-                      <a:r>
-                        <a:rPr lang="en-US" sz="1100" dirty="0">
-                          <a:solidFill>
-                            <a:srgbClr val="BDD7EE"/>
-                          </a:solidFill>
-                          <a:latin typeface="Ubuntu" panose="020B0504030602030204" pitchFamily="34" charset="0"/>
-                          <a:ea typeface="Calibri" pitchFamily="34" charset="-122"/>
-                          <a:cs typeface="Calibri" pitchFamily="34" charset="-120"/>
-                        </a:rPr>
-                        <a:t>Evaluation</a:t>
-                      </a:r>
-                      <a:endParaRPr lang="en-US" sz="1100" dirty="0">
-                        <a:latin typeface="Ubuntu" panose="020B0504030602030204" pitchFamily="34" charset="0"/>
-                        <a:ea typeface="Calibri" charset="0"/>
-                        <a:cs typeface="Calibri" charset="0"/>
-                      </a:endParaRPr>
-                    </a:p>
-                  </a:txBody>
-                  <a:tcPr>
-                    <a:lnL w="12700" cap="flat" cmpd="sng" algn="ctr">
-                      <a:solidFill>
-                        <a:srgbClr val="2A4F7A"/>
-                      </a:solidFill>
-                      <a:prstDash val="solid"/>
-                      <a:round/>
-                      <a:headEnd type="none" w="med" len="med"/>
-                      <a:tailEnd type="none" w="med" len="med"/>
-                    </a:lnL>
-                    <a:lnR w="12700" cap="flat" cmpd="sng" algn="ctr">
-                      <a:solidFill>
-                        <a:srgbClr val="2A4F7A"/>
-                      </a:solidFill>
-                      <a:prstDash val="solid"/>
-                      <a:round/>
-                      <a:headEnd type="none" w="med" len="med"/>
-                      <a:tailEnd type="none" w="med" len="med"/>
-                    </a:lnR>
-                    <a:lnT w="12700" cap="flat" cmpd="sng" algn="ctr">
-                      <a:solidFill>
-                        <a:srgbClr val="2A4F7A"/>
-                      </a:solidFill>
-                      <a:prstDash val="solid"/>
-                      <a:round/>
-                      <a:headEnd type="none" w="med" len="med"/>
-                      <a:tailEnd type="none" w="med" len="med"/>
-                    </a:lnT>
-                    <a:lnB w="12700" cap="flat" cmpd="sng" algn="ctr">
-                      <a:solidFill>
-                        <a:srgbClr val="2A4F7A"/>
-                      </a:solidFill>
-                      <a:prstDash val="solid"/>
-                      <a:round/>
-                      <a:headEnd type="none" w="med" len="med"/>
-                      <a:tailEnd type="none" w="med" len="med"/>
-                    </a:lnB>
-                    <a:solidFill>
-                      <a:srgbClr val="17375E"/>
-                    </a:solidFill>
-                  </a:tcPr>
-                </a:tc>
-                <a:tc>
-                  <a:txBody>
-                    <a:bodyPr/>
-                    <a:lstStyle/>
-                    <a:p>
-                      <a:pPr marL="0" indent="0" algn="l">
-                        <a:buNone/>
-                      </a:pPr>
-                      <a:r>
-                        <a:rPr lang="en-US" sz="1100" dirty="0">
-                          <a:solidFill>
-                            <a:srgbClr val="BDD7EE"/>
-                          </a:solidFill>
-                          <a:latin typeface="Ubuntu" panose="020B0504030602030204" pitchFamily="34" charset="0"/>
-                          <a:ea typeface="Calibri" pitchFamily="34" charset="-122"/>
-                          <a:cs typeface="Calibri" pitchFamily="34" charset="-120"/>
-                        </a:rPr>
-                        <a:t>Accuracy=100%, AUC=1.0, FN=0</a:t>
-                      </a:r>
-                      <a:endParaRPr lang="en-US" sz="1100" dirty="0">
-                        <a:latin typeface="Ubuntu" panose="020B0504030602030204" pitchFamily="34" charset="0"/>
-                        <a:ea typeface="Calibri" charset="0"/>
-                        <a:cs typeface="Calibri" charset="0"/>
-                      </a:endParaRPr>
-                    </a:p>
-                  </a:txBody>
-                  <a:tcPr>
-                    <a:lnL w="12700" cap="flat" cmpd="sng" algn="ctr">
-                      <a:solidFill>
-                        <a:srgbClr val="2A4F7A"/>
-                      </a:solidFill>
-                      <a:prstDash val="solid"/>
-                      <a:round/>
-                      <a:headEnd type="none" w="med" len="med"/>
-                      <a:tailEnd type="none" w="med" len="med"/>
-                    </a:lnL>
-                    <a:lnR w="12700" cap="flat" cmpd="sng" algn="ctr">
-                      <a:solidFill>
-                        <a:srgbClr val="2A4F7A"/>
-                      </a:solidFill>
-                      <a:prstDash val="solid"/>
-                      <a:round/>
-                      <a:headEnd type="none" w="med" len="med"/>
-                      <a:tailEnd type="none" w="med" len="med"/>
-                    </a:lnR>
-                    <a:lnT w="12700" cap="flat" cmpd="sng" algn="ctr">
-                      <a:solidFill>
-                        <a:srgbClr val="2A4F7A"/>
-                      </a:solidFill>
-                      <a:prstDash val="solid"/>
-                      <a:round/>
-                      <a:headEnd type="none" w="med" len="med"/>
-                      <a:tailEnd type="none" w="med" len="med"/>
-                    </a:lnT>
-                    <a:lnB w="12700" cap="flat" cmpd="sng" algn="ctr">
-                      <a:solidFill>
-                        <a:srgbClr val="2A4F7A"/>
-                      </a:solidFill>
-                      <a:prstDash val="solid"/>
-                      <a:round/>
-                      <a:headEnd type="none" w="med" len="med"/>
-                      <a:tailEnd type="none" w="med" len="med"/>
-                    </a:lnB>
-                    <a:solidFill>
-                      <a:srgbClr val="17375E"/>
-                    </a:solidFill>
-                  </a:tcPr>
-                </a:tc>
-                <a:extLst>
-                  <a:ext uri="{0D108BD9-81ED-4DB2-BD59-A6C34878D82A}">
-                    <a16:rowId xmlns:a16="http://schemas.microsoft.com/office/drawing/2014/main" val="10007"/>
-                  </a:ext>
-                </a:extLst>
-              </a:tr>
-              <a:tr h="395889">
-                <a:tc>
-                  <a:txBody>
-                    <a:bodyPr/>
-                    <a:lstStyle/>
-                    <a:p>
-                      <a:pPr marL="0" indent="0" algn="l">
-                        <a:buNone/>
-                      </a:pPr>
-                      <a:r>
-                        <a:rPr lang="en-US" sz="1100" dirty="0">
-                          <a:solidFill>
-                            <a:srgbClr val="BDD7EE"/>
-                          </a:solidFill>
-                          <a:latin typeface="Ubuntu" panose="020B0504030602030204" pitchFamily="34" charset="0"/>
-                          <a:ea typeface="Calibri" pitchFamily="34" charset="-122"/>
-                          <a:cs typeface="Calibri" pitchFamily="34" charset="-120"/>
-                        </a:rPr>
-                        <a:t>Enhancement</a:t>
-                      </a:r>
-                      <a:endParaRPr lang="en-US" sz="1100" dirty="0">
-                        <a:latin typeface="Ubuntu" panose="020B0504030602030204" pitchFamily="34" charset="0"/>
-                        <a:ea typeface="Calibri" charset="0"/>
-                        <a:cs typeface="Calibri" charset="0"/>
-                      </a:endParaRPr>
-                    </a:p>
-                  </a:txBody>
-                  <a:tcPr>
-                    <a:lnL w="12700" cap="flat" cmpd="sng" algn="ctr">
-                      <a:solidFill>
-                        <a:srgbClr val="2A4F7A"/>
-                      </a:solidFill>
-                      <a:prstDash val="solid"/>
-                      <a:round/>
-                      <a:headEnd type="none" w="med" len="med"/>
-                      <a:tailEnd type="none" w="med" len="med"/>
-                    </a:lnL>
-                    <a:lnR w="12700" cap="flat" cmpd="sng" algn="ctr">
-                      <a:solidFill>
-                        <a:srgbClr val="2A4F7A"/>
-                      </a:solidFill>
-                      <a:prstDash val="solid"/>
-                      <a:round/>
-                      <a:headEnd type="none" w="med" len="med"/>
-                      <a:tailEnd type="none" w="med" len="med"/>
-                    </a:lnR>
-                    <a:lnT w="12700" cap="flat" cmpd="sng" algn="ctr">
-                      <a:solidFill>
-                        <a:srgbClr val="2A4F7A"/>
-                      </a:solidFill>
-                      <a:prstDash val="solid"/>
-                      <a:round/>
-                      <a:headEnd type="none" w="med" len="med"/>
-                      <a:tailEnd type="none" w="med" len="med"/>
-                    </a:lnT>
-                    <a:lnB w="12700" cap="flat" cmpd="sng" algn="ctr">
-                      <a:solidFill>
-                        <a:srgbClr val="2A4F7A"/>
-                      </a:solidFill>
-                      <a:prstDash val="solid"/>
-                      <a:round/>
-                      <a:headEnd type="none" w="med" len="med"/>
-                      <a:tailEnd type="none" w="med" len="med"/>
-                    </a:lnB>
-                    <a:solidFill>
-                      <a:srgbClr val="17375E"/>
-                    </a:solidFill>
-                  </a:tcPr>
-                </a:tc>
-                <a:tc>
-                  <a:txBody>
-                    <a:bodyPr/>
-                    <a:lstStyle/>
-                    <a:p>
-                      <a:pPr marL="0" indent="0" algn="l">
-                        <a:buNone/>
-                      </a:pPr>
-                      <a:r>
-                        <a:rPr lang="en-US" sz="1100" dirty="0">
-                          <a:solidFill>
-                            <a:srgbClr val="BDD7EE"/>
-                          </a:solidFill>
-                          <a:latin typeface="Ubuntu" panose="020B0504030602030204" pitchFamily="34" charset="0"/>
-                          <a:ea typeface="Calibri" pitchFamily="34" charset="-122"/>
-                          <a:cs typeface="Calibri" pitchFamily="34" charset="-120"/>
-                        </a:rPr>
-                        <a:t>GridSearchCV: 36 combos × 5 folds</a:t>
-                      </a:r>
-                      <a:endParaRPr lang="en-US" sz="1100" dirty="0">
-                        <a:latin typeface="Ubuntu" panose="020B0504030602030204" pitchFamily="34" charset="0"/>
-                        <a:ea typeface="Calibri" charset="0"/>
-                        <a:cs typeface="Calibri" charset="0"/>
-                      </a:endParaRPr>
-                    </a:p>
-                  </a:txBody>
-                  <a:tcPr>
-                    <a:lnL w="12700" cap="flat" cmpd="sng" algn="ctr">
-                      <a:solidFill>
-                        <a:srgbClr val="2A4F7A"/>
-                      </a:solidFill>
-                      <a:prstDash val="solid"/>
-                      <a:round/>
-                      <a:headEnd type="none" w="med" len="med"/>
-                      <a:tailEnd type="none" w="med" len="med"/>
-                    </a:lnL>
-                    <a:lnR w="12700" cap="flat" cmpd="sng" algn="ctr">
-                      <a:solidFill>
-                        <a:srgbClr val="2A4F7A"/>
-                      </a:solidFill>
-                      <a:prstDash val="solid"/>
-                      <a:round/>
-                      <a:headEnd type="none" w="med" len="med"/>
-                      <a:tailEnd type="none" w="med" len="med"/>
-                    </a:lnR>
-                    <a:lnT w="12700" cap="flat" cmpd="sng" algn="ctr">
-                      <a:solidFill>
-                        <a:srgbClr val="2A4F7A"/>
-                      </a:solidFill>
-                      <a:prstDash val="solid"/>
-                      <a:round/>
-                      <a:headEnd type="none" w="med" len="med"/>
-                      <a:tailEnd type="none" w="med" len="med"/>
-                    </a:lnT>
-                    <a:lnB w="12700" cap="flat" cmpd="sng" algn="ctr">
-                      <a:solidFill>
-                        <a:srgbClr val="2A4F7A"/>
-                      </a:solidFill>
-                      <a:prstDash val="solid"/>
-                      <a:round/>
-                      <a:headEnd type="none" w="med" len="med"/>
-                      <a:tailEnd type="none" w="med" len="med"/>
-                    </a:lnB>
-                    <a:solidFill>
-                      <a:srgbClr val="17375E"/>
-                    </a:solidFill>
-                  </a:tcPr>
-                </a:tc>
-                <a:extLst>
-                  <a:ext uri="{0D108BD9-81ED-4DB2-BD59-A6C34878D82A}">
-                    <a16:rowId xmlns:a16="http://schemas.microsoft.com/office/drawing/2014/main" val="10008"/>
-                  </a:ext>
-                </a:extLst>
-              </a:tr>
-              <a:tr h="395889">
-                <a:tc>
-                  <a:txBody>
-                    <a:bodyPr/>
-                    <a:lstStyle/>
-                    <a:p>
-                      <a:pPr marL="0" indent="0" algn="l">
-                        <a:buNone/>
-                      </a:pPr>
-                      <a:r>
-                        <a:rPr lang="en-US" sz="1100" b="1" dirty="0">
-                          <a:solidFill>
-                            <a:srgbClr val="BDD7EE"/>
-                          </a:solidFill>
-                          <a:latin typeface="Ubuntu" panose="020B0504030602030204" pitchFamily="34" charset="0"/>
-                          <a:ea typeface="Calibri" pitchFamily="34" charset="-122"/>
-                          <a:cs typeface="Calibri" pitchFamily="34" charset="-120"/>
-                        </a:rPr>
-                        <a:t>TOTAL</a:t>
-                      </a:r>
-                      <a:endParaRPr lang="en-US" sz="1100" dirty="0">
-                        <a:latin typeface="Ubuntu" panose="020B0504030602030204" pitchFamily="34" charset="0"/>
-                        <a:ea typeface="Calibri" charset="0"/>
-                        <a:cs typeface="Calibri" charset="0"/>
-                      </a:endParaRPr>
-                    </a:p>
-                  </a:txBody>
-                  <a:tcPr>
-                    <a:lnL w="12700" cap="flat" cmpd="sng" algn="ctr">
-                      <a:solidFill>
-                        <a:srgbClr val="2A4F7A"/>
-                      </a:solidFill>
-                      <a:prstDash val="solid"/>
-                      <a:round/>
-                      <a:headEnd type="none" w="med" len="med"/>
-                      <a:tailEnd type="none" w="med" len="med"/>
-                    </a:lnL>
-                    <a:lnR w="12700" cap="flat" cmpd="sng" algn="ctr">
-                      <a:solidFill>
-                        <a:srgbClr val="2A4F7A"/>
-                      </a:solidFill>
-                      <a:prstDash val="solid"/>
-                      <a:round/>
-                      <a:headEnd type="none" w="med" len="med"/>
-                      <a:tailEnd type="none" w="med" len="med"/>
-                    </a:lnR>
-                    <a:lnT w="12700" cap="flat" cmpd="sng" algn="ctr">
-                      <a:solidFill>
-                        <a:srgbClr val="2A4F7A"/>
-                      </a:solidFill>
-                      <a:prstDash val="solid"/>
-                      <a:round/>
-                      <a:headEnd type="none" w="med" len="med"/>
-                      <a:tailEnd type="none" w="med" len="med"/>
-                    </a:lnT>
-                    <a:lnB w="12700" cap="flat" cmpd="sng" algn="ctr">
-                      <a:solidFill>
-                        <a:srgbClr val="2A4F7A"/>
-                      </a:solidFill>
-                      <a:prstDash val="solid"/>
-                      <a:round/>
-                      <a:headEnd type="none" w="med" len="med"/>
-                      <a:tailEnd type="none" w="med" len="med"/>
-                    </a:lnB>
-                    <a:solidFill>
-                      <a:srgbClr val="17375E"/>
-                    </a:solidFill>
-                  </a:tcPr>
-                </a:tc>
-                <a:tc>
-                  <a:txBody>
-                    <a:bodyPr/>
-                    <a:lstStyle/>
-                    <a:p>
-                      <a:pPr marL="0" indent="0" algn="l">
-                        <a:buNone/>
-                      </a:pPr>
-                      <a:r>
-                        <a:rPr lang="en-US" sz="1100" b="1" dirty="0">
-                          <a:solidFill>
-                            <a:srgbClr val="BDD7EE"/>
-                          </a:solidFill>
-                          <a:latin typeface="Ubuntu" panose="020B0504030602030204" pitchFamily="34" charset="0"/>
-                          <a:ea typeface="Calibri" pitchFamily="34" charset="-122"/>
-                          <a:cs typeface="Calibri" pitchFamily="34" charset="-120"/>
-                        </a:rPr>
-                        <a:t>Random Forest :Perfect Classification</a:t>
-                      </a:r>
-                      <a:endParaRPr lang="en-US" sz="1100" dirty="0">
-                        <a:latin typeface="Ubuntu" panose="020B0504030602030204" pitchFamily="34" charset="0"/>
-                        <a:ea typeface="Calibri" charset="0"/>
-                        <a:cs typeface="Calibri" charset="0"/>
-                      </a:endParaRPr>
-                    </a:p>
-                  </a:txBody>
-                  <a:tcPr>
-                    <a:lnL w="12700" cap="flat" cmpd="sng" algn="ctr">
-                      <a:solidFill>
-                        <a:srgbClr val="2A4F7A"/>
-                      </a:solidFill>
-                      <a:prstDash val="solid"/>
-                      <a:round/>
-                      <a:headEnd type="none" w="med" len="med"/>
-                      <a:tailEnd type="none" w="med" len="med"/>
-                    </a:lnL>
-                    <a:lnR w="12700" cap="flat" cmpd="sng" algn="ctr">
-                      <a:solidFill>
-                        <a:srgbClr val="2A4F7A"/>
-                      </a:solidFill>
-                      <a:prstDash val="solid"/>
-                      <a:round/>
-                      <a:headEnd type="none" w="med" len="med"/>
-                      <a:tailEnd type="none" w="med" len="med"/>
-                    </a:lnR>
-                    <a:lnT w="12700" cap="flat" cmpd="sng" algn="ctr">
-                      <a:solidFill>
-                        <a:srgbClr val="2A4F7A"/>
-                      </a:solidFill>
-                      <a:prstDash val="solid"/>
-                      <a:round/>
-                      <a:headEnd type="none" w="med" len="med"/>
-                      <a:tailEnd type="none" w="med" len="med"/>
-                    </a:lnT>
-                    <a:lnB w="12700" cap="flat" cmpd="sng" algn="ctr">
-                      <a:solidFill>
-                        <a:srgbClr val="2A4F7A"/>
-                      </a:solidFill>
-                      <a:prstDash val="solid"/>
-                      <a:round/>
-                      <a:headEnd type="none" w="med" len="med"/>
-                      <a:tailEnd type="none" w="med" len="med"/>
-                    </a:lnB>
-                    <a:solidFill>
-                      <a:srgbClr val="17375E"/>
-                    </a:solidFill>
-                  </a:tcPr>
-                </a:tc>
-                <a:extLst>
-                  <a:ext uri="{0D108BD9-81ED-4DB2-BD59-A6C34878D82A}">
-                    <a16:rowId xmlns:a16="http://schemas.microsoft.com/office/drawing/2014/main" val="10009"/>
-                  </a:ext>
-                </a:extLst>
-              </a:tr>
-            </a:tbl>
-          </a:graphicData>
-        </a:graphic>
-      </p:graphicFrame>
-      <p:sp>
-        <p:nvSpPr>
-          <p:cNvPr id="5" name="Text 2"/>
-          <p:cNvSpPr/>
-          <p:nvPr/>
-        </p:nvSpPr>
-        <p:spPr>
-          <a:xfrm>
-            <a:off x="6126480" y="914400"/>
-            <a:ext cx="2743200" cy="347472"/>
-          </a:xfrm>
-          <a:prstGeom prst="rect">
-            <a:avLst/>
-          </a:prstGeom>
-          <a:noFill/>
-          <a:ln/>
-        </p:spPr>
-        <p:txBody>
-          <a:bodyPr wrap="square" lIns="0" tIns="0" rIns="0" bIns="0" rtlCol="0" anchor="ctr"/>
-          <a:lstStyle/>
-          <a:p>
-            <a:pPr marL="0" indent="0">
-              <a:buNone/>
-            </a:pPr>
-            <a:r>
-              <a:rPr lang="en-US" sz="1500" b="1" dirty="0">
-                <a:solidFill>
-                  <a:srgbClr val="ED7D31"/>
-                </a:solidFill>
-                <a:latin typeface="Ubuntu" panose="020B0504030602030204" pitchFamily="34" charset="0"/>
-                <a:ea typeface="Calibri" pitchFamily="34" charset="-122"/>
-                <a:cs typeface="Calibri" pitchFamily="34" charset="-120"/>
-              </a:rPr>
-              <a:t>Key Findings</a:t>
-            </a:r>
-            <a:endParaRPr lang="en-US" sz="1500" dirty="0">
-              <a:latin typeface="Ubuntu" panose="020B0504030602030204" pitchFamily="34" charset="0"/>
-            </a:endParaRPr>
-          </a:p>
-        </p:txBody>
-      </p:sp>
-      <p:sp>
-        <p:nvSpPr>
-          <p:cNvPr id="6" name="Shape 3"/>
-          <p:cNvSpPr/>
-          <p:nvPr/>
-        </p:nvSpPr>
-        <p:spPr>
-          <a:xfrm>
-            <a:off x="6126480" y="1371600"/>
-            <a:ext cx="411480" cy="640080"/>
-          </a:xfrm>
-          <a:prstGeom prst="rect">
-            <a:avLst/>
-          </a:prstGeom>
-          <a:solidFill>
-            <a:srgbClr val="4472C4"/>
-          </a:solidFill>
-          <a:ln/>
-        </p:spPr>
-      </p:sp>
-      <p:sp>
-        <p:nvSpPr>
-          <p:cNvPr id="7" name="Text 4"/>
-          <p:cNvSpPr/>
-          <p:nvPr/>
-        </p:nvSpPr>
-        <p:spPr>
-          <a:xfrm>
-            <a:off x="6126480" y="1371600"/>
-            <a:ext cx="411480" cy="640080"/>
-          </a:xfrm>
-          <a:prstGeom prst="rect">
-            <a:avLst/>
-          </a:prstGeom>
-          <a:noFill/>
-          <a:ln/>
-        </p:spPr>
-        <p:txBody>
-          <a:bodyPr wrap="square" lIns="0" tIns="0" rIns="0" bIns="0" rtlCol="0" anchor="ctr"/>
-          <a:lstStyle/>
-          <a:p>
-            <a:pPr marL="0" indent="0" algn="ctr">
-              <a:buNone/>
-            </a:pPr>
-            <a:r>
-              <a:rPr lang="en-US" sz="1800" b="1" dirty="0">
-                <a:solidFill>
-                  <a:srgbClr val="FFFFFF"/>
-                </a:solidFill>
-                <a:latin typeface="Ubuntu" panose="020B0504030602030204" pitchFamily="34" charset="0"/>
-                <a:ea typeface="Calibri" pitchFamily="34" charset="-122"/>
-                <a:cs typeface="Calibri" pitchFamily="34" charset="-120"/>
-              </a:rPr>
-              <a:t>✓</a:t>
-            </a:r>
-            <a:endParaRPr lang="en-US" sz="1800" dirty="0">
-              <a:latin typeface="Ubuntu" panose="020B0504030602030204" pitchFamily="34" charset="0"/>
-            </a:endParaRPr>
-          </a:p>
-        </p:txBody>
-      </p:sp>
-      <p:sp>
-        <p:nvSpPr>
-          <p:cNvPr id="8" name="Text 5"/>
-          <p:cNvSpPr/>
-          <p:nvPr/>
-        </p:nvSpPr>
-        <p:spPr>
-          <a:xfrm>
-            <a:off x="6629400" y="1417320"/>
-            <a:ext cx="2240280" cy="548640"/>
-          </a:xfrm>
-          <a:prstGeom prst="rect">
-            <a:avLst/>
-          </a:prstGeom>
-          <a:noFill/>
-          <a:ln/>
-        </p:spPr>
-        <p:txBody>
-          <a:bodyPr wrap="square" lIns="0" tIns="0" rIns="0" bIns="0" rtlCol="0" anchor="ctr"/>
-          <a:lstStyle/>
-          <a:p>
-            <a:pPr marL="0" indent="0">
-              <a:buNone/>
-            </a:pPr>
-            <a:r>
-              <a:rPr lang="en-US" sz="1200" dirty="0">
-                <a:solidFill>
-                  <a:srgbClr val="FFFFFF"/>
-                </a:solidFill>
-                <a:latin typeface="Ubuntu" panose="020B0504030602030204" pitchFamily="34" charset="0"/>
-                <a:ea typeface="Calibri" pitchFamily="34" charset="-122"/>
-                <a:cs typeface="Calibri" pitchFamily="34" charset="-120"/>
-              </a:rPr>
-              <a:t>100% Accuracy</a:t>
-            </a:r>
-            <a:endParaRPr lang="en-US" sz="1200" dirty="0">
-              <a:latin typeface="Ubuntu" panose="020B0504030602030204" pitchFamily="34" charset="0"/>
-            </a:endParaRPr>
-          </a:p>
-          <a:p>
-            <a:pPr marL="0" indent="0">
-              <a:buNone/>
-            </a:pPr>
-            <a:r>
-              <a:rPr lang="en-US" sz="1200" dirty="0">
-                <a:solidFill>
-                  <a:srgbClr val="FFFFFF"/>
-                </a:solidFill>
-                <a:latin typeface="Ubuntu" panose="020B0504030602030204" pitchFamily="34" charset="0"/>
-                <a:ea typeface="Calibri" pitchFamily="34" charset="-122"/>
-                <a:cs typeface="Calibri" pitchFamily="34" charset="-120"/>
-              </a:rPr>
-              <a:t>AUC = 1.00</a:t>
-            </a:r>
-            <a:endParaRPr lang="en-US" sz="1200" dirty="0">
-              <a:latin typeface="Ubuntu" panose="020B0504030602030204" pitchFamily="34" charset="0"/>
-            </a:endParaRPr>
-          </a:p>
-        </p:txBody>
-      </p:sp>
-      <p:sp>
-        <p:nvSpPr>
-          <p:cNvPr id="9" name="Shape 6"/>
-          <p:cNvSpPr/>
-          <p:nvPr/>
-        </p:nvSpPr>
-        <p:spPr>
-          <a:xfrm>
-            <a:off x="6126480" y="2240280"/>
-            <a:ext cx="411480" cy="640080"/>
-          </a:xfrm>
-          <a:prstGeom prst="rect">
-            <a:avLst/>
-          </a:prstGeom>
-          <a:solidFill>
-            <a:srgbClr val="4472C4"/>
-          </a:solidFill>
-          <a:ln/>
-        </p:spPr>
-      </p:sp>
-      <p:sp>
-        <p:nvSpPr>
-          <p:cNvPr id="10" name="Text 7"/>
-          <p:cNvSpPr/>
-          <p:nvPr/>
-        </p:nvSpPr>
-        <p:spPr>
-          <a:xfrm>
-            <a:off x="6126480" y="2240280"/>
-            <a:ext cx="411480" cy="640080"/>
-          </a:xfrm>
-          <a:prstGeom prst="rect">
-            <a:avLst/>
-          </a:prstGeom>
-          <a:noFill/>
-          <a:ln/>
-        </p:spPr>
-        <p:txBody>
-          <a:bodyPr wrap="square" lIns="0" tIns="0" rIns="0" bIns="0" rtlCol="0" anchor="ctr"/>
-          <a:lstStyle/>
-          <a:p>
-            <a:pPr marL="0" indent="0" algn="ctr">
-              <a:buNone/>
-            </a:pPr>
-            <a:r>
-              <a:rPr lang="en-US" sz="1800" b="1" dirty="0">
-                <a:solidFill>
-                  <a:srgbClr val="FFFFFF"/>
-                </a:solidFill>
-                <a:latin typeface="Ubuntu" panose="020B0504030602030204" pitchFamily="34" charset="0"/>
-                <a:ea typeface="Calibri" pitchFamily="34" charset="-122"/>
-                <a:cs typeface="Calibri" pitchFamily="34" charset="-120"/>
-              </a:rPr>
-              <a:t>✓</a:t>
-            </a:r>
-            <a:endParaRPr lang="en-US" sz="1800" dirty="0">
-              <a:latin typeface="Ubuntu" panose="020B0504030602030204" pitchFamily="34" charset="0"/>
-            </a:endParaRPr>
-          </a:p>
-        </p:txBody>
-      </p:sp>
-      <p:sp>
-        <p:nvSpPr>
-          <p:cNvPr id="11" name="Text 8"/>
-          <p:cNvSpPr/>
-          <p:nvPr/>
-        </p:nvSpPr>
-        <p:spPr>
-          <a:xfrm>
-            <a:off x="6629400" y="2286000"/>
-            <a:ext cx="2240280" cy="548640"/>
-          </a:xfrm>
-          <a:prstGeom prst="rect">
-            <a:avLst/>
-          </a:prstGeom>
-          <a:noFill/>
-          <a:ln/>
-        </p:spPr>
-        <p:txBody>
-          <a:bodyPr wrap="square" lIns="0" tIns="0" rIns="0" bIns="0" rtlCol="0" anchor="ctr"/>
-          <a:lstStyle/>
-          <a:p>
-            <a:pPr marL="0" indent="0">
-              <a:buNone/>
-            </a:pPr>
-            <a:r>
-              <a:rPr lang="en-US" sz="1200" dirty="0">
-                <a:solidFill>
-                  <a:srgbClr val="FFFFFF"/>
-                </a:solidFill>
-                <a:latin typeface="Ubuntu" panose="020B0504030602030204" pitchFamily="34" charset="0"/>
-                <a:ea typeface="Calibri" pitchFamily="34" charset="-122"/>
-                <a:cs typeface="Calibri" pitchFamily="34" charset="-120"/>
-              </a:rPr>
-              <a:t>FN = 0</a:t>
-            </a:r>
-            <a:endParaRPr lang="en-US" sz="1200" dirty="0">
-              <a:latin typeface="Ubuntu" panose="020B0504030602030204" pitchFamily="34" charset="0"/>
-            </a:endParaRPr>
-          </a:p>
-          <a:p>
-            <a:pPr marL="0" indent="0">
-              <a:buNone/>
-            </a:pPr>
-            <a:r>
-              <a:rPr lang="en-US" sz="1200" dirty="0">
-                <a:solidFill>
-                  <a:srgbClr val="FFFFFF"/>
-                </a:solidFill>
-                <a:latin typeface="Ubuntu" panose="020B0504030602030204" pitchFamily="34" charset="0"/>
-                <a:ea typeface="Calibri" pitchFamily="34" charset="-122"/>
-                <a:cs typeface="Calibri" pitchFamily="34" charset="-120"/>
-              </a:rPr>
-              <a:t>No patient missed</a:t>
-            </a:r>
-            <a:endParaRPr lang="en-US" sz="1200" dirty="0">
-              <a:latin typeface="Ubuntu" panose="020B0504030602030204" pitchFamily="34" charset="0"/>
-            </a:endParaRPr>
-          </a:p>
-        </p:txBody>
-      </p:sp>
-      <p:sp>
-        <p:nvSpPr>
-          <p:cNvPr id="12" name="Shape 9"/>
-          <p:cNvSpPr/>
-          <p:nvPr/>
-        </p:nvSpPr>
-        <p:spPr>
-          <a:xfrm>
-            <a:off x="6126480" y="3108960"/>
-            <a:ext cx="411480" cy="640080"/>
-          </a:xfrm>
-          <a:prstGeom prst="rect">
-            <a:avLst/>
-          </a:prstGeom>
-          <a:solidFill>
-            <a:srgbClr val="4472C4"/>
-          </a:solidFill>
-          <a:ln/>
-        </p:spPr>
-      </p:sp>
-      <p:sp>
-        <p:nvSpPr>
-          <p:cNvPr id="4" name="Text 10"/>
-          <p:cNvSpPr/>
-          <p:nvPr/>
-        </p:nvSpPr>
-        <p:spPr>
-          <a:xfrm>
-            <a:off x="6126480" y="3108960"/>
-            <a:ext cx="411480" cy="640080"/>
-          </a:xfrm>
-          <a:prstGeom prst="rect">
-            <a:avLst/>
-          </a:prstGeom>
-          <a:noFill/>
-          <a:ln/>
-        </p:spPr>
-        <p:txBody>
-          <a:bodyPr wrap="square" lIns="0" tIns="0" rIns="0" bIns="0" rtlCol="0" anchor="ctr"/>
-          <a:lstStyle/>
-          <a:p>
-            <a:pPr marL="0" indent="0" algn="ctr">
-              <a:buNone/>
-            </a:pPr>
-            <a:r>
-              <a:rPr lang="en-US" sz="1800" b="1" dirty="0">
-                <a:solidFill>
-                  <a:srgbClr val="FFFFFF"/>
-                </a:solidFill>
-                <a:latin typeface="Ubuntu" panose="020B0504030602030204" pitchFamily="34" charset="0"/>
-                <a:ea typeface="Calibri" pitchFamily="34" charset="-122"/>
-                <a:cs typeface="Calibri" pitchFamily="34" charset="-120"/>
-              </a:rPr>
-              <a:t>✓</a:t>
-            </a:r>
-            <a:endParaRPr lang="en-US" sz="1800" dirty="0">
-              <a:latin typeface="Ubuntu" panose="020B0504030602030204" pitchFamily="34" charset="0"/>
-            </a:endParaRPr>
-          </a:p>
-        </p:txBody>
-      </p:sp>
-      <p:sp>
-        <p:nvSpPr>
-          <p:cNvPr id="14" name="Text 11"/>
-          <p:cNvSpPr/>
-          <p:nvPr/>
-        </p:nvSpPr>
-        <p:spPr>
-          <a:xfrm>
-            <a:off x="6629400" y="3154680"/>
-            <a:ext cx="2240280" cy="548640"/>
-          </a:xfrm>
-          <a:prstGeom prst="rect">
-            <a:avLst/>
-          </a:prstGeom>
-          <a:noFill/>
-          <a:ln/>
-        </p:spPr>
-        <p:txBody>
-          <a:bodyPr wrap="square" lIns="0" tIns="0" rIns="0" bIns="0" rtlCol="0" anchor="ctr"/>
-          <a:lstStyle/>
-          <a:p>
-            <a:pPr marL="0" indent="0">
-              <a:buNone/>
-            </a:pPr>
-            <a:r>
-              <a:rPr lang="en-US" sz="1200" dirty="0">
-                <a:solidFill>
-                  <a:srgbClr val="FFFFFF"/>
-                </a:solidFill>
-                <a:latin typeface="Ubuntu" panose="020B0504030602030204" pitchFamily="34" charset="0"/>
-                <a:ea typeface="Calibri" pitchFamily="34" charset="-122"/>
-                <a:cs typeface="Calibri" pitchFamily="34" charset="-120"/>
-              </a:rPr>
-              <a:t>sc, pcv, hemo</a:t>
-            </a:r>
-            <a:endParaRPr lang="en-US" sz="1200" dirty="0">
-              <a:latin typeface="Ubuntu" panose="020B0504030602030204" pitchFamily="34" charset="0"/>
-            </a:endParaRPr>
-          </a:p>
-          <a:p>
-            <a:pPr marL="0" indent="0">
-              <a:buNone/>
-            </a:pPr>
-            <a:r>
-              <a:rPr lang="en-US" sz="1200" dirty="0">
-                <a:solidFill>
-                  <a:srgbClr val="FFFFFF"/>
-                </a:solidFill>
-                <a:latin typeface="Ubuntu" panose="020B0504030602030204" pitchFamily="34" charset="0"/>
-                <a:ea typeface="Calibri" pitchFamily="34" charset="-122"/>
-                <a:cs typeface="Calibri" pitchFamily="34" charset="-120"/>
-              </a:rPr>
-              <a:t>Top 3 features</a:t>
-            </a:r>
-            <a:endParaRPr lang="en-US" sz="1200" dirty="0">
-              <a:latin typeface="Ubuntu" panose="020B0504030602030204" pitchFamily="34" charset="0"/>
-            </a:endParaRPr>
-          </a:p>
-        </p:txBody>
-      </p:sp>
-      <p:sp>
-        <p:nvSpPr>
-          <p:cNvPr id="15" name="Shape 12"/>
-          <p:cNvSpPr/>
-          <p:nvPr/>
-        </p:nvSpPr>
-        <p:spPr>
-          <a:xfrm>
-            <a:off x="6126480" y="3977640"/>
-            <a:ext cx="411480" cy="640080"/>
-          </a:xfrm>
-          <a:prstGeom prst="rect">
-            <a:avLst/>
-          </a:prstGeom>
-          <a:solidFill>
-            <a:srgbClr val="4472C4"/>
-          </a:solidFill>
-          <a:ln/>
-        </p:spPr>
-      </p:sp>
-      <p:sp>
-        <p:nvSpPr>
-          <p:cNvPr id="16" name="Text 13"/>
-          <p:cNvSpPr/>
-          <p:nvPr/>
-        </p:nvSpPr>
-        <p:spPr>
-          <a:xfrm>
-            <a:off x="6126480" y="3977640"/>
-            <a:ext cx="411480" cy="640080"/>
-          </a:xfrm>
-          <a:prstGeom prst="rect">
-            <a:avLst/>
-          </a:prstGeom>
-          <a:noFill/>
-          <a:ln/>
-        </p:spPr>
-        <p:txBody>
-          <a:bodyPr wrap="square" lIns="0" tIns="0" rIns="0" bIns="0" rtlCol="0" anchor="ctr"/>
-          <a:lstStyle/>
-          <a:p>
-            <a:pPr marL="0" indent="0" algn="ctr">
-              <a:buNone/>
-            </a:pPr>
-            <a:r>
-              <a:rPr lang="en-US" sz="1800" b="1" dirty="0">
-                <a:solidFill>
-                  <a:srgbClr val="FFFFFF"/>
-                </a:solidFill>
-                <a:latin typeface="Ubuntu" panose="020B0504030602030204" pitchFamily="34" charset="0"/>
-                <a:ea typeface="Calibri" pitchFamily="34" charset="-122"/>
-                <a:cs typeface="Calibri" pitchFamily="34" charset="-120"/>
-              </a:rPr>
-              <a:t>✓</a:t>
-            </a:r>
-            <a:endParaRPr lang="en-US" sz="1800" dirty="0">
-              <a:latin typeface="Ubuntu" panose="020B0504030602030204" pitchFamily="34" charset="0"/>
-            </a:endParaRPr>
-          </a:p>
-        </p:txBody>
-      </p:sp>
-      <p:sp>
-        <p:nvSpPr>
-          <p:cNvPr id="17" name="Text 14"/>
-          <p:cNvSpPr/>
-          <p:nvPr/>
-        </p:nvSpPr>
-        <p:spPr>
-          <a:xfrm>
-            <a:off x="6629400" y="4023360"/>
-            <a:ext cx="2240280" cy="548640"/>
-          </a:xfrm>
-          <a:prstGeom prst="rect">
-            <a:avLst/>
-          </a:prstGeom>
-          <a:noFill/>
-          <a:ln/>
-        </p:spPr>
-        <p:txBody>
-          <a:bodyPr wrap="square" lIns="0" tIns="0" rIns="0" bIns="0" rtlCol="0" anchor="ctr"/>
-          <a:lstStyle/>
-          <a:p>
-            <a:pPr marL="0" indent="0">
-              <a:buNone/>
-            </a:pPr>
-            <a:r>
-              <a:rPr lang="en-US" sz="1200" dirty="0">
-                <a:solidFill>
-                  <a:srgbClr val="FFFFFF"/>
-                </a:solidFill>
-                <a:latin typeface="Ubuntu" panose="020B0504030602030204" pitchFamily="34" charset="0"/>
-                <a:ea typeface="Calibri" pitchFamily="34" charset="-122"/>
-                <a:cs typeface="Calibri" pitchFamily="34" charset="-120"/>
-              </a:rPr>
-              <a:t>+25% more data</a:t>
-            </a:r>
-            <a:endParaRPr lang="en-US" sz="1200" dirty="0">
-              <a:latin typeface="Ubuntu" panose="020B0504030602030204" pitchFamily="34" charset="0"/>
-            </a:endParaRPr>
-          </a:p>
-          <a:p>
-            <a:pPr marL="0" indent="0">
-              <a:buNone/>
-            </a:pPr>
-            <a:r>
-              <a:rPr lang="en-US" sz="1200" dirty="0">
-                <a:solidFill>
-                  <a:srgbClr val="FFFFFF"/>
-                </a:solidFill>
-                <a:latin typeface="Ubuntu" panose="020B0504030602030204" pitchFamily="34" charset="0"/>
-                <a:ea typeface="Calibri" pitchFamily="34" charset="-122"/>
-                <a:cs typeface="Calibri" pitchFamily="34" charset="-120"/>
-              </a:rPr>
-              <a:t>via Augmentation</a:t>
-            </a:r>
-            <a:endParaRPr lang="en-US" sz="1200" dirty="0">
-              <a:latin typeface="Ubuntu" panose="020B0504030602030204" pitchFamily="34" charset="0"/>
-            </a:endParaRPr>
-          </a:p>
-        </p:txBody>
-      </p:sp>
       <p:sp>
         <p:nvSpPr>
           <p:cNvPr id="18" name="Shape 15"/>
@@ -9638,6 +4791,155 @@
               <a:buNone/>
             </a:pPr>
             <a:endParaRPr lang="en-US" sz="1400" dirty="0">
+              <a:latin typeface="Ubuntu" panose="020B0504030602030204" pitchFamily="34" charset="0"/>
+            </a:endParaRPr>
+          </a:p>
+        </p:txBody>
+      </p:sp>
+      <p:sp>
+        <p:nvSpPr>
+          <p:cNvPr id="20" name="ZoneTexte 19">
+            <a:extLst>
+              <a:ext uri="{FF2B5EF4-FFF2-40B4-BE49-F238E27FC236}">
+                <a16:creationId xmlns:a16="http://schemas.microsoft.com/office/drawing/2014/main" id="{7DAF8E19-C0CA-3273-E431-739793267CE0}"/>
+              </a:ext>
+            </a:extLst>
+          </p:cNvPr>
+          <p:cNvSpPr txBox="1"/>
+          <p:nvPr/>
+        </p:nvSpPr>
+        <p:spPr>
+          <a:xfrm>
+            <a:off x="175846" y="745588"/>
+            <a:ext cx="8180363" cy="4104200"/>
+          </a:xfrm>
+          <a:prstGeom prst="rect">
+            <a:avLst/>
+          </a:prstGeom>
+          <a:noFill/>
+        </p:spPr>
+        <p:txBody>
+          <a:bodyPr wrap="square" rtlCol="0">
+            <a:spAutoFit/>
+          </a:bodyPr>
+          <a:lstStyle/>
+          <a:p>
+            <a:pPr algn="just">
+              <a:lnSpc>
+                <a:spcPct val="150000"/>
+              </a:lnSpc>
+            </a:pPr>
+            <a:r>
+              <a:rPr lang="en-US" sz="1600" b="1" dirty="0">
+                <a:solidFill>
+                  <a:schemeClr val="bg1">
+                    <a:lumMod val="50000"/>
+                  </a:schemeClr>
+                </a:solidFill>
+                <a:latin typeface="Ubuntu" panose="020B0504030602030204" pitchFamily="34" charset="0"/>
+              </a:rPr>
+              <a:t>Achieved High Accuracy: </a:t>
+            </a:r>
+            <a:r>
+              <a:rPr lang="en-US" sz="1600" dirty="0">
+                <a:solidFill>
+                  <a:schemeClr val="bg1"/>
+                </a:solidFill>
+                <a:latin typeface="Ubuntu" panose="020B0504030602030204" pitchFamily="34" charset="0"/>
+              </a:rPr>
+              <a:t>The final tuned model achieved an accuracy of approximately 99.75%, demonstrating extreme reliability in distinguishing between healthy patients and those with CKD. </a:t>
+            </a:r>
+          </a:p>
+          <a:p>
+            <a:pPr algn="just">
+              <a:lnSpc>
+                <a:spcPct val="150000"/>
+              </a:lnSpc>
+            </a:pPr>
+            <a:endParaRPr lang="en-US" sz="1600" dirty="0">
+              <a:solidFill>
+                <a:schemeClr val="bg1"/>
+              </a:solidFill>
+              <a:latin typeface="Ubuntu" panose="020B0504030602030204" pitchFamily="34" charset="0"/>
+            </a:endParaRPr>
+          </a:p>
+          <a:p>
+            <a:pPr algn="just">
+              <a:lnSpc>
+                <a:spcPct val="150000"/>
+              </a:lnSpc>
+            </a:pPr>
+            <a:r>
+              <a:rPr lang="en-US" sz="1600" b="1" dirty="0">
+                <a:solidFill>
+                  <a:schemeClr val="bg1">
+                    <a:lumMod val="50000"/>
+                  </a:schemeClr>
+                </a:solidFill>
+                <a:latin typeface="Ubuntu" panose="020B0504030602030204" pitchFamily="34" charset="0"/>
+              </a:rPr>
+              <a:t>Recall: </a:t>
+            </a:r>
+            <a:r>
+              <a:rPr lang="en-US" sz="1600" dirty="0">
+                <a:solidFill>
+                  <a:schemeClr val="bg1"/>
+                </a:solidFill>
+                <a:latin typeface="Ubuntu" panose="020B0504030602030204" pitchFamily="34" charset="0"/>
+              </a:rPr>
+              <a:t>The model reached a 99% recall rate, which is critical for medical screening to ensure that almost all sick patients are correctly identified and no cases are missed.</a:t>
+            </a:r>
+          </a:p>
+          <a:p>
+            <a:pPr algn="just">
+              <a:lnSpc>
+                <a:spcPct val="150000"/>
+              </a:lnSpc>
+            </a:pPr>
+            <a:endParaRPr lang="en-US" sz="1600" dirty="0">
+              <a:solidFill>
+                <a:schemeClr val="bg1"/>
+              </a:solidFill>
+              <a:latin typeface="Ubuntu" panose="020B0504030602030204" pitchFamily="34" charset="0"/>
+            </a:endParaRPr>
+          </a:p>
+          <a:p>
+            <a:pPr algn="just">
+              <a:lnSpc>
+                <a:spcPct val="150000"/>
+              </a:lnSpc>
+            </a:pPr>
+            <a:r>
+              <a:rPr lang="en-US" sz="1600" b="1" dirty="0">
+                <a:solidFill>
+                  <a:schemeClr val="bg1">
+                    <a:lumMod val="50000"/>
+                  </a:schemeClr>
+                </a:solidFill>
+                <a:latin typeface="Ubuntu" panose="020B0504030602030204" pitchFamily="34" charset="0"/>
+              </a:rPr>
+              <a:t>Synthesized Data Utility: </a:t>
+            </a:r>
+            <a:r>
+              <a:rPr lang="en-US" sz="1600" dirty="0">
+                <a:solidFill>
+                  <a:schemeClr val="bg1"/>
+                </a:solidFill>
+                <a:latin typeface="Ubuntu" panose="020B0504030602030204" pitchFamily="34" charset="0"/>
+              </a:rPr>
+              <a:t>The integration of synthetic data (Generative AI) helped balance the dataset, allowing the model to better generalize across different patient profiles and medical scenarios.</a:t>
+            </a:r>
+          </a:p>
+          <a:p>
+            <a:pPr algn="just">
+              <a:lnSpc>
+                <a:spcPct val="150000"/>
+              </a:lnSpc>
+            </a:pPr>
+            <a:endParaRPr lang="en-US" sz="1600" dirty="0">
+              <a:solidFill>
+                <a:schemeClr val="bg1"/>
+              </a:solidFill>
               <a:latin typeface="Ubuntu" panose="020B0504030602030204" pitchFamily="34" charset="0"/>
             </a:endParaRPr>
           </a:p>
@@ -9651,7 +4953,7 @@
 </p:sld>
 </file>
 
-<file path=ppt/slides/slide13.xml><?xml version="1.0" encoding="utf-8"?>
+<file path=ppt/slides/slide12.xml><?xml version="1.0" encoding="utf-8"?>
 <p:sld xmlns:a="http://schemas.openxmlformats.org/drawingml/2006/main" xmlns:r="http://schemas.openxmlformats.org/officeDocument/2006/relationships" xmlns:p="http://schemas.openxmlformats.org/presentationml/2006/main">
   <p:cSld>
     <p:spTree>
@@ -10904,111 +6206,13 @@
       </p:sp>
       <p:sp>
         <p:nvSpPr>
-          <p:cNvPr id="28" name="Shape 26"/>
+          <p:cNvPr id="31" name="Shape 29"/>
           <p:cNvSpPr/>
           <p:nvPr/>
         </p:nvSpPr>
         <p:spPr>
           <a:xfrm>
             <a:off x="4754880" y="3246120"/>
-            <a:ext cx="502920" cy="502920"/>
-          </a:xfrm>
-          <a:prstGeom prst="rect">
-            <a:avLst/>
-          </a:prstGeom>
-          <a:solidFill>
-            <a:srgbClr val="0D6E8A"/>
-          </a:solidFill>
-          <a:ln/>
-        </p:spPr>
-      </p:sp>
-      <p:sp>
-        <p:nvSpPr>
-          <p:cNvPr id="29" name="Text 27"/>
-          <p:cNvSpPr/>
-          <p:nvPr/>
-        </p:nvSpPr>
-        <p:spPr>
-          <a:xfrm>
-            <a:off x="4754880" y="3246120"/>
-            <a:ext cx="502920" cy="502920"/>
-          </a:xfrm>
-          <a:prstGeom prst="rect">
-            <a:avLst/>
-          </a:prstGeom>
-          <a:noFill/>
-          <a:ln/>
-        </p:spPr>
-        <p:txBody>
-          <a:bodyPr wrap="square" lIns="0" tIns="0" rIns="0" bIns="0" rtlCol="0" anchor="ctr"/>
-          <a:lstStyle/>
-          <a:p>
-            <a:pPr marL="0" indent="0" algn="ctr">
-              <a:buNone/>
-            </a:pPr>
-            <a:r>
-              <a:rPr lang="en-US" sz="1400" b="1" dirty="0">
-                <a:solidFill>
-                  <a:srgbClr val="FFFFFF"/>
-                </a:solidFill>
-                <a:latin typeface="Calibri" pitchFamily="34" charset="0"/>
-                <a:ea typeface="Calibri" pitchFamily="34" charset="-122"/>
-                <a:cs typeface="Calibri" pitchFamily="34" charset="-120"/>
-              </a:rPr>
-              <a:t>09</a:t>
-            </a:r>
-            <a:endParaRPr lang="en-US" sz="1400" dirty="0"/>
-          </a:p>
-        </p:txBody>
-      </p:sp>
-      <p:sp>
-        <p:nvSpPr>
-          <p:cNvPr id="30" name="Text 28"/>
-          <p:cNvSpPr/>
-          <p:nvPr/>
-        </p:nvSpPr>
-        <p:spPr>
-          <a:xfrm>
-            <a:off x="5349240" y="3273552"/>
-            <a:ext cx="3749040" cy="457200"/>
-          </a:xfrm>
-          <a:prstGeom prst="rect">
-            <a:avLst/>
-          </a:prstGeom>
-          <a:noFill/>
-          <a:ln/>
-        </p:spPr>
-        <p:txBody>
-          <a:bodyPr wrap="square" lIns="0" tIns="0" rIns="0" bIns="0" rtlCol="0" anchor="ctr"/>
-          <a:lstStyle/>
-          <a:p>
-            <a:pPr marL="0" indent="0" algn="l">
-              <a:buNone/>
-            </a:pPr>
-            <a:r>
-              <a:rPr lang="en-US" sz="1400" dirty="0">
-                <a:solidFill>
-                  <a:srgbClr val="404040"/>
-                </a:solidFill>
-                <a:latin typeface="Calibri" pitchFamily="34" charset="0"/>
-                <a:ea typeface="Calibri" pitchFamily="34" charset="-122"/>
-                <a:cs typeface="Calibri" pitchFamily="34" charset="-120"/>
-              </a:rPr>
-              <a:t>Model Enhancement</a:t>
-            </a:r>
-            <a:endParaRPr lang="en-US" sz="1400" dirty="0"/>
-          </a:p>
-        </p:txBody>
-      </p:sp>
-      <p:sp>
-        <p:nvSpPr>
-          <p:cNvPr id="31" name="Shape 29"/>
-          <p:cNvSpPr/>
-          <p:nvPr/>
-        </p:nvSpPr>
-        <p:spPr>
-          <a:xfrm>
-            <a:off x="4754880" y="4023360"/>
             <a:ext cx="502920" cy="502920"/>
           </a:xfrm>
           <a:prstGeom prst="rect">
@@ -11028,7 +6232,7 @@
         </p:nvSpPr>
         <p:spPr>
           <a:xfrm>
-            <a:off x="4754880" y="4023360"/>
+            <a:off x="4754880" y="3246120"/>
             <a:ext cx="502920" cy="502920"/>
           </a:xfrm>
           <a:prstGeom prst="rect">
@@ -11045,6 +6249,17 @@
               <a:buNone/>
             </a:pPr>
             <a:r>
+              <a:rPr lang="fr-FR" sz="1400" b="1" dirty="0">
+                <a:solidFill>
+                  <a:srgbClr val="FFFFFF"/>
+                </a:solidFill>
+                <a:latin typeface="Calibri" pitchFamily="34" charset="0"/>
+                <a:ea typeface="Calibri" pitchFamily="34" charset="-122"/>
+                <a:cs typeface="Calibri" pitchFamily="34" charset="-120"/>
+              </a:rPr>
+              <a:t>0</a:t>
+            </a:r>
+            <a:r>
               <a:rPr lang="en-US" sz="1400" b="1" dirty="0">
                 <a:solidFill>
                   <a:srgbClr val="FFFFFF"/>
@@ -11053,7 +6268,7 @@
                 <a:ea typeface="Calibri" pitchFamily="34" charset="-122"/>
                 <a:cs typeface="Calibri" pitchFamily="34" charset="-120"/>
               </a:rPr>
-              <a:t>10</a:t>
+              <a:t>9</a:t>
             </a:r>
             <a:endParaRPr lang="en-US" sz="1400" dirty="0"/>
           </a:p>
@@ -11067,7 +6282,7 @@
         </p:nvSpPr>
         <p:spPr>
           <a:xfrm>
-            <a:off x="5349240" y="4050792"/>
+            <a:off x="5349240" y="3273552"/>
             <a:ext cx="3749040" cy="457200"/>
           </a:xfrm>
           <a:prstGeom prst="rect">
@@ -14127,67 +9342,6 @@
           </a:graphicData>
         </a:graphic>
       </p:graphicFrame>
-      <p:sp>
-        <p:nvSpPr>
-          <p:cNvPr id="13" name="Shape 10"/>
-          <p:cNvSpPr/>
-          <p:nvPr/>
-        </p:nvSpPr>
-        <p:spPr>
-          <a:xfrm>
-            <a:off x="274320" y="4434840"/>
-            <a:ext cx="8595360" cy="502920"/>
-          </a:xfrm>
-          <a:prstGeom prst="rect">
-            <a:avLst/>
-          </a:prstGeom>
-          <a:solidFill>
-            <a:srgbClr val="375623"/>
-          </a:solidFill>
-          <a:ln/>
-        </p:spPr>
-      </p:sp>
-      <p:sp>
-        <p:nvSpPr>
-          <p:cNvPr id="14" name="Text 11"/>
-          <p:cNvSpPr/>
-          <p:nvPr/>
-        </p:nvSpPr>
-        <p:spPr>
-          <a:xfrm>
-            <a:off x="274320" y="4434840"/>
-            <a:ext cx="8595360" cy="502920"/>
-          </a:xfrm>
-          <a:prstGeom prst="rect">
-            <a:avLst/>
-          </a:prstGeom>
-          <a:noFill/>
-          <a:ln/>
-        </p:spPr>
-        <p:txBody>
-          <a:bodyPr wrap="square" lIns="0" tIns="0" rIns="0" bIns="0" rtlCol="0" anchor="ctr"/>
-          <a:lstStyle/>
-          <a:p>
-            <a:pPr marL="0" indent="0" algn="ctr">
-              <a:buNone/>
-            </a:pPr>
-            <a:r>
-              <a:rPr lang="en-US" sz="1300" b="1" dirty="0">
-                <a:solidFill>
-                  <a:srgbClr val="FFFFFF"/>
-                </a:solidFill>
-                <a:latin typeface="Ubuntu" panose="020B0504030602030204" pitchFamily="34" charset="0"/>
-                <a:ea typeface="Calibri" pitchFamily="34" charset="-122"/>
-                <a:cs typeface="Calibri" pitchFamily="34" charset="-120"/>
-              </a:rPr>
-              <a:t>400 real + 100 synthetic = 500 patients (+25%)  :  Used for ALL subsequent steps</a:t>
-            </a:r>
-            <a:endParaRPr lang="en-US" sz="1300" dirty="0">
-              <a:latin typeface="Ubuntu" panose="020B0504030602030204" pitchFamily="34" charset="0"/>
-            </a:endParaRPr>
-          </a:p>
-        </p:txBody>
-      </p:sp>
     </p:spTree>
   </p:cSld>
   <p:clrMapOvr>
@@ -16671,7 +11825,7 @@
                 <a:ea typeface="Calibri" pitchFamily="34" charset="-122"/>
                 <a:cs typeface="Calibri" pitchFamily="34" charset="-120"/>
               </a:rPr>
-              <a:t>Technique 2 : Fold Stratified Cross Validation (more reliable estimate)</a:t>
+              <a:t>Technique 2 : Fold Stratified Cross Validation</a:t>
             </a:r>
             <a:endParaRPr lang="en-US" sz="1500" dirty="0">
               <a:latin typeface="Ubuntu" panose="020B0504030602030204" pitchFamily="34" charset="0"/>
@@ -18508,28 +13662,36 @@
           </a:p>
         </p:txBody>
       </p:sp>
-      <p:graphicFrame>
-        <p:nvGraphicFramePr>
-          <p:cNvPr id="29" name="Chart 0"/>
-          <p:cNvGraphicFramePr/>
-          <p:nvPr>
-            <p:extLst>
-              <p:ext uri="{D42A27DB-BD31-4B8C-83A1-F6EECF244321}">
-                <p14:modId xmlns:p14="http://schemas.microsoft.com/office/powerpoint/2010/main" val="629520101"/>
-              </p:ext>
-            </p:extLst>
-          </p:nvPr>
-        </p:nvGraphicFramePr>
-        <p:xfrm>
-          <a:off x="274320" y="2880360"/>
-          <a:ext cx="8595360" cy="2011680"/>
-        </p:xfrm>
-        <a:graphic>
-          <a:graphicData uri="http://schemas.openxmlformats.org/drawingml/2006/chart">
-            <c:chart xmlns:c="http://schemas.openxmlformats.org/drawingml/2006/chart" xmlns:r="http://schemas.openxmlformats.org/officeDocument/2006/relationships" r:id="rId3"/>
-          </a:graphicData>
-        </a:graphic>
-      </p:graphicFrame>
+      <p:pic>
+        <p:nvPicPr>
+          <p:cNvPr id="31" name="Image 30">
+            <a:extLst>
+              <a:ext uri="{FF2B5EF4-FFF2-40B4-BE49-F238E27FC236}">
+                <a16:creationId xmlns:a16="http://schemas.microsoft.com/office/drawing/2014/main" id="{1FFE8137-A5A8-316D-75E7-C4F4F0ED8C30}"/>
+              </a:ext>
+            </a:extLst>
+          </p:cNvPr>
+          <p:cNvPicPr>
+            <a:picLocks noChangeAspect="1"/>
+          </p:cNvPicPr>
+          <p:nvPr/>
+        </p:nvPicPr>
+        <p:blipFill>
+          <a:blip r:embed="rId3"/>
+          <a:stretch>
+            <a:fillRect/>
+          </a:stretch>
+        </p:blipFill>
+        <p:spPr>
+          <a:xfrm>
+            <a:off x="274319" y="2834640"/>
+            <a:ext cx="8736037" cy="2148033"/>
+          </a:xfrm>
+          <a:prstGeom prst="rect">
+            <a:avLst/>
+          </a:prstGeom>
+        </p:spPr>
+      </p:pic>
     </p:spTree>
   </p:cSld>
   <p:clrMapOvr>

--- a/CKD_Presentation.pptx
+++ b/CKD_Presentation.pptx
@@ -3758,9 +3758,7 @@
           <a:bodyPr wrap="square" lIns="0" tIns="0" rIns="0" bIns="0" rtlCol="0" anchor="ctr"/>
           <a:lstStyle/>
           <a:p>
-            <a:pPr marL="0" indent="0" algn="ctr">
-              <a:buNone/>
-            </a:pPr>
+            <a:pPr algn="ctr"/>
             <a:r>
               <a:rPr lang="en-US" sz="1400" b="1" dirty="0">
                 <a:solidFill>
@@ -3770,7 +3768,7 @@
                 <a:ea typeface="Calibri" pitchFamily="34" charset="-122"/>
                 <a:cs typeface="Calibri" pitchFamily="34" charset="-120"/>
               </a:rPr>
-              <a:t>Best Model: Random Forest  |  CV Mean = 99%  |  Test Accuracy = 100%</a:t>
+              <a:t>Best Model: Gradient Boosting  |  CV Mean = 99%  |  Test Accuracy = 100%</a:t>
             </a:r>
             <a:endParaRPr lang="en-US" sz="1400" dirty="0">
               <a:latin typeface="Ubuntu" panose="020B0504030602030204" pitchFamily="34" charset="0"/>
@@ -3947,7 +3945,7 @@
                 <a:ea typeface="Calibri" pitchFamily="34" charset="-122"/>
                 <a:cs typeface="Calibri" pitchFamily="34" charset="-120"/>
               </a:rPr>
-              <a:t>0,9949</a:t>
+              <a:t>0,9982</a:t>
             </a:r>
             <a:endParaRPr lang="en-US" sz="3600" dirty="0">
               <a:latin typeface="Ubuntu" panose="020B0504030602030204" pitchFamily="34" charset="0"/>
@@ -4222,7 +4220,7 @@
         </p:nvSpPr>
         <p:spPr>
           <a:xfrm>
-            <a:off x="274320" y="2880360"/>
+            <a:off x="274320" y="2796255"/>
             <a:ext cx="3657600" cy="320040"/>
           </a:xfrm>
           <a:prstGeom prst="rect">
@@ -4574,47 +4572,6 @@
                 <a:cs typeface="Calibri" pitchFamily="34" charset="-120"/>
               </a:rPr>
               <a:t>Pred: CKD</a:t>
-            </a:r>
-            <a:endParaRPr lang="en-US" sz="1000" dirty="0">
-              <a:latin typeface="Ubuntu" panose="020B0504030602030204" pitchFamily="34" charset="0"/>
-            </a:endParaRPr>
-          </a:p>
-        </p:txBody>
-      </p:sp>
-      <p:sp>
-        <p:nvSpPr>
-          <p:cNvPr id="33" name="Text 30"/>
-          <p:cNvSpPr/>
-          <p:nvPr/>
-        </p:nvSpPr>
-        <p:spPr>
-          <a:xfrm>
-            <a:off x="274320" y="4892040"/>
-            <a:ext cx="8595360" cy="182880"/>
-          </a:xfrm>
-          <a:prstGeom prst="rect">
-            <a:avLst/>
-          </a:prstGeom>
-          <a:noFill/>
-          <a:ln/>
-        </p:spPr>
-        <p:txBody>
-          <a:bodyPr wrap="square" lIns="0" tIns="0" rIns="0" bIns="0" rtlCol="0" anchor="ctr"/>
-          <a:lstStyle/>
-          <a:p>
-            <a:pPr marL="0" indent="0" algn="ctr">
-              <a:buNone/>
-            </a:pPr>
-            <a:r>
-              <a:rPr lang="en-US" sz="1000" b="1" dirty="0">
-                <a:solidFill>
-                  <a:srgbClr val="FFFFFF"/>
-                </a:solidFill>
-                <a:latin typeface="Ubuntu" panose="020B0504030602030204" pitchFamily="34" charset="0"/>
-                <a:ea typeface="Calibri" pitchFamily="34" charset="-122"/>
-                <a:cs typeface="Calibri" pitchFamily="34" charset="-120"/>
-              </a:rPr>
-              <a:t>FN = 0  →  No sick patient was missed — most critical metric in medical diagnosis!</a:t>
             </a:r>
             <a:endParaRPr lang="en-US" sz="1000" dirty="0">
               <a:latin typeface="Ubuntu" panose="020B0504030602030204" pitchFamily="34" charset="0"/>
@@ -4644,7 +4601,7 @@
         </p:blipFill>
         <p:spPr>
           <a:xfrm>
-            <a:off x="4837006" y="2799170"/>
+            <a:off x="3785684" y="2788920"/>
             <a:ext cx="3309996" cy="2184310"/>
           </a:xfrm>
           <a:prstGeom prst="rect">
@@ -4847,7 +4804,25 @@
                 </a:solidFill>
                 <a:latin typeface="Ubuntu" panose="020B0504030602030204" pitchFamily="34" charset="0"/>
               </a:rPr>
-              <a:t>The final tuned model achieved an accuracy of approximately 99.75%, demonstrating extreme reliability in distinguishing between healthy patients and those with CKD. </a:t>
+              <a:t>The final tuned model achieved an accuracy of </a:t>
+            </a:r>
+            <a:r>
+              <a:rPr lang="en-US" sz="1600">
+                <a:solidFill>
+                  <a:schemeClr val="bg1"/>
+                </a:solidFill>
+                <a:latin typeface="Ubuntu" panose="020B0504030602030204" pitchFamily="34" charset="0"/>
+              </a:rPr>
+              <a:t>approximately 98%, </a:t>
+            </a:r>
+            <a:r>
+              <a:rPr lang="en-US" sz="1600" dirty="0">
+                <a:solidFill>
+                  <a:schemeClr val="bg1"/>
+                </a:solidFill>
+                <a:latin typeface="Ubuntu" panose="020B0504030602030204" pitchFamily="34" charset="0"/>
+              </a:rPr>
+              <a:t>demonstrating extreme reliability in distinguishing between healthy patients and those with CKD. </a:t>
             </a:r>
           </a:p>
           <a:p>
